--- a/output/Baikonur_Presentation.pptx
+++ b/output/Baikonur_Presentation.pptx
@@ -2,22 +2,22 @@
 <file path=ppt/presentation.xml><?xml version="1.0" encoding="utf-8"?>
 <p:presentation xmlns:p="http://schemas.openxmlformats.org/presentationml/2006/main">
   <p:sldMasterIdLst>
-    <p:sldMasterId xmlns:r="http://schemas.openxmlformats.org/officeDocument/2006/relationships" id="2147483648" r:id="R20375750489144a7"/>
+    <p:sldMasterId xmlns:r="http://schemas.openxmlformats.org/officeDocument/2006/relationships" id="2147483648" r:id="Rc8a4e3a562644c46"/>
   </p:sldMasterIdLst>
   <p:notesMasterIdLst>
-    <p:notesMasterId xmlns:r="http://schemas.openxmlformats.org/officeDocument/2006/relationships" r:id="Rde3b309d653c4117"/>
+    <p:notesMasterId xmlns:r="http://schemas.openxmlformats.org/officeDocument/2006/relationships" r:id="Rbc83ee10efcb47f2"/>
   </p:notesMasterIdLst>
   <p:sldIdLst>
-    <p:sldId xmlns:r="http://schemas.openxmlformats.org/officeDocument/2006/relationships" id="256" r:id="Rd57b4bf386b94635"/>
-    <p:sldId xmlns:r="http://schemas.openxmlformats.org/officeDocument/2006/relationships" id="257" r:id="R37ea27232a174d92"/>
-    <p:sldId xmlns:r="http://schemas.openxmlformats.org/officeDocument/2006/relationships" id="258" r:id="R6c7192df08f04fc4"/>
-    <p:sldId xmlns:r="http://schemas.openxmlformats.org/officeDocument/2006/relationships" id="259" r:id="R23d2efdf92e54a64"/>
-    <p:sldId xmlns:r="http://schemas.openxmlformats.org/officeDocument/2006/relationships" id="260" r:id="Rdb7f1f0ff12a49ea"/>
-    <p:sldId xmlns:r="http://schemas.openxmlformats.org/officeDocument/2006/relationships" id="261" r:id="Rf6d0dcf400ed40c0"/>
-    <p:sldId xmlns:r="http://schemas.openxmlformats.org/officeDocument/2006/relationships" id="262" r:id="R2c28ab6bc4a14eb9"/>
-    <p:sldId xmlns:r="http://schemas.openxmlformats.org/officeDocument/2006/relationships" id="263" r:id="Re67b06bd6964463b"/>
-    <p:sldId xmlns:r="http://schemas.openxmlformats.org/officeDocument/2006/relationships" id="264" r:id="R4950e736d65445a1"/>
-    <p:sldId xmlns:r="http://schemas.openxmlformats.org/officeDocument/2006/relationships" id="265" r:id="Raf3fef9b57cb4bd5"/>
+    <p:sldId xmlns:r="http://schemas.openxmlformats.org/officeDocument/2006/relationships" id="256" r:id="R57c89145b6b547e7"/>
+    <p:sldId xmlns:r="http://schemas.openxmlformats.org/officeDocument/2006/relationships" id="257" r:id="R4db8a6633c294fb1"/>
+    <p:sldId xmlns:r="http://schemas.openxmlformats.org/officeDocument/2006/relationships" id="258" r:id="R0cab8e2da56e47c7"/>
+    <p:sldId xmlns:r="http://schemas.openxmlformats.org/officeDocument/2006/relationships" id="259" r:id="Rb36880a5394642cc"/>
+    <p:sldId xmlns:r="http://schemas.openxmlformats.org/officeDocument/2006/relationships" id="260" r:id="Rb7cf2302578c43c8"/>
+    <p:sldId xmlns:r="http://schemas.openxmlformats.org/officeDocument/2006/relationships" id="261" r:id="Re81f8cf0c50f493f"/>
+    <p:sldId xmlns:r="http://schemas.openxmlformats.org/officeDocument/2006/relationships" id="262" r:id="Re4e51b9d10b04063"/>
+    <p:sldId xmlns:r="http://schemas.openxmlformats.org/officeDocument/2006/relationships" id="263" r:id="R4d6cd408cee148c7"/>
+    <p:sldId xmlns:r="http://schemas.openxmlformats.org/officeDocument/2006/relationships" id="264" r:id="R4b24af1f045d489f"/>
+    <p:sldId xmlns:r="http://schemas.openxmlformats.org/officeDocument/2006/relationships" id="265" r:id="R165d1726ebf44d19"/>
   </p:sldIdLst>
   <p:sldSz cx="12192000" cy="6858000"/>
   <p:notesSz cx="6858000" cy="9144000"/>
@@ -871,7 +871,7 @@
           <a:lstStyle xmlns:a="http://schemas.openxmlformats.org/drawingml/2006/main"/>
           <a:p xmlns:a="http://schemas.openxmlformats.org/drawingml/2006/main">
             <a:r>
-              <a:t>Suggested presenter: Ayaulym. Target: 60 seconds. The concrete image is generated once at 256 by 256 and receives a mip chain. The ground pattern is an original trigonometric procedural texture, not Perlin noise. Each particle carries position, velocity, age, lifetime, size and material. Smoke expands and fades; fire is short-lived. A shared quad with per-instance attributes reduces draw calls to two. Smoke is sorted back to front; both passes disable depth writes but retain depth tests. Source: Texture.cpp and Particles.cpp. Research context: Reeves [1], Nguyen et al. [5], Lamorlette and Foster [6]. The implementation is simpler than physical fluid simulation.</a:t>
+              <a:t>Suggested presenter: Ayaulym. Target: 60 seconds. The concrete image is generated once at 1024 by 1024 and receives a mip chain. The ground pattern is an original trigonometric procedural texture, not Perlin noise. Each particle carries position, velocity, age, lifetime, size and material. Smoke expands and fades; fire is short-lived. A shared quad with per-instance attributes reduces draw calls to two. Smoke is sorted back to front; both passes disable depth writes but retain depth tests. Source: Texture.cpp and Particles.cpp. Research context: Reeves [1], Nguyen et al. [5], Lamorlette and Foster [6]. The implementation is simpler than physical fluid simulation.</a:t>
             </a:r>
           </a:p>
         </p:txBody>
@@ -1128,7 +1128,7 @@
           <p:cNvPr id="3" name="Title">
             <a:extLst xmlns:a="http://schemas.openxmlformats.org/drawingml/2006/main">
               <a:ext uri="{FF2B5EF4-FFF2-40B4-BE49-F238E27FC236}">
-                <a16:creationId xmlns:a16="http://schemas.microsoft.com/office/drawing/2014/main" id="{BAE1DE09-2E87-4056-ABA3-F5319AAD8565}"/>
+                <a16:creationId xmlns:a16="http://schemas.microsoft.com/office/drawing/2014/main" id="{AAC5279D-31D9-435C-B87B-3D42E159BDF3}"/>
               </a:ext>
             </a:extLst>
           </p:cNvPr>
@@ -1357,7 +1357,7 @@
           <p:cNvPr id="2" name="Subtitle">
             <a:extLst xmlns:a="http://schemas.openxmlformats.org/drawingml/2006/main">
               <a:ext uri="{FF2B5EF4-FFF2-40B4-BE49-F238E27FC236}">
-                <a16:creationId xmlns:a16="http://schemas.microsoft.com/office/drawing/2014/main" id="{596FFB0D-C564-4133-89DF-FCC05E2B5478}"/>
+                <a16:creationId xmlns:a16="http://schemas.microsoft.com/office/drawing/2014/main" id="{474996AE-CE7D-475C-AB5F-D11D04413358}"/>
               </a:ext>
             </a:extLst>
           </p:cNvPr>
@@ -1603,7 +1603,7 @@
           <p:cNvPr id="2" name="Section title">
             <a:extLst xmlns:a="http://schemas.openxmlformats.org/drawingml/2006/main">
               <a:ext uri="{FF2B5EF4-FFF2-40B4-BE49-F238E27FC236}">
-                <a16:creationId xmlns:a16="http://schemas.microsoft.com/office/drawing/2014/main" id="{F194EAC7-D4B1-4E26-8C47-FE3C2BE8B8C4}"/>
+                <a16:creationId xmlns:a16="http://schemas.microsoft.com/office/drawing/2014/main" id="{02A5B5EB-6690-4595-AAFB-BBD5D00BC9B2}"/>
               </a:ext>
             </a:extLst>
           </p:cNvPr>
@@ -1849,7 +1849,7 @@
           <p:cNvPr id="3" name="Title">
             <a:extLst xmlns:a="http://schemas.openxmlformats.org/drawingml/2006/main">
               <a:ext uri="{FF2B5EF4-FFF2-40B4-BE49-F238E27FC236}">
-                <a16:creationId xmlns:a16="http://schemas.microsoft.com/office/drawing/2014/main" id="{A77370D8-49BA-4029-9F61-1E4DCE798CBA}"/>
+                <a16:creationId xmlns:a16="http://schemas.microsoft.com/office/drawing/2014/main" id="{51B0F5AA-7AFD-43FB-B095-7F5C81E9DD50}"/>
               </a:ext>
             </a:extLst>
           </p:cNvPr>
@@ -2078,7 +2078,7 @@
           <p:cNvPr id="2" name="Body">
             <a:extLst xmlns:a="http://schemas.openxmlformats.org/drawingml/2006/main">
               <a:ext uri="{FF2B5EF4-FFF2-40B4-BE49-F238E27FC236}">
-                <a16:creationId xmlns:a16="http://schemas.microsoft.com/office/drawing/2014/main" id="{2A2DE505-10D7-4805-B44B-A5C95AB170D0}"/>
+                <a16:creationId xmlns:a16="http://schemas.microsoft.com/office/drawing/2014/main" id="{7EA4E23C-777E-4E42-9BAA-DF1E8F96AB72}"/>
               </a:ext>
             </a:extLst>
           </p:cNvPr>
@@ -2324,7 +2324,7 @@
           <p:cNvPr id="4" name="Title">
             <a:extLst xmlns:a="http://schemas.openxmlformats.org/drawingml/2006/main">
               <a:ext uri="{FF2B5EF4-FFF2-40B4-BE49-F238E27FC236}">
-                <a16:creationId xmlns:a16="http://schemas.microsoft.com/office/drawing/2014/main" id="{D144EA35-CD14-477E-AB1F-B76074BAF9F6}"/>
+                <a16:creationId xmlns:a16="http://schemas.microsoft.com/office/drawing/2014/main" id="{4425B63B-09FC-4BB1-B32E-524C4B83DB61}"/>
               </a:ext>
             </a:extLst>
           </p:cNvPr>
@@ -2553,7 +2553,7 @@
           <p:cNvPr id="2" name="Left column">
             <a:extLst xmlns:a="http://schemas.openxmlformats.org/drawingml/2006/main">
               <a:ext uri="{FF2B5EF4-FFF2-40B4-BE49-F238E27FC236}">
-                <a16:creationId xmlns:a16="http://schemas.microsoft.com/office/drawing/2014/main" id="{1D26241C-5AEF-49FA-98AE-CAEB1BF988E6}"/>
+                <a16:creationId xmlns:a16="http://schemas.microsoft.com/office/drawing/2014/main" id="{F9261209-7FCC-41E6-BFE3-84C4EA047638}"/>
               </a:ext>
             </a:extLst>
           </p:cNvPr>
@@ -2782,7 +2782,7 @@
           <p:cNvPr id="3" name="Right column">
             <a:extLst xmlns:a="http://schemas.openxmlformats.org/drawingml/2006/main">
               <a:ext uri="{FF2B5EF4-FFF2-40B4-BE49-F238E27FC236}">
-                <a16:creationId xmlns:a16="http://schemas.microsoft.com/office/drawing/2014/main" id="{88270587-D63F-4832-809E-2C0CAE943CC0}"/>
+                <a16:creationId xmlns:a16="http://schemas.microsoft.com/office/drawing/2014/main" id="{AEC24A3D-273D-4F63-B3D1-EC4150B6C930}"/>
               </a:ext>
             </a:extLst>
           </p:cNvPr>
@@ -3028,7 +3028,7 @@
           <p:cNvPr id="3" name="Title">
             <a:extLst xmlns:a="http://schemas.openxmlformats.org/drawingml/2006/main">
               <a:ext uri="{FF2B5EF4-FFF2-40B4-BE49-F238E27FC236}">
-                <a16:creationId xmlns:a16="http://schemas.microsoft.com/office/drawing/2014/main" id="{DFA3786D-FD22-4DEE-AD22-A314E5BF1F41}"/>
+                <a16:creationId xmlns:a16="http://schemas.microsoft.com/office/drawing/2014/main" id="{D088B279-9BFC-47A1-97D0-1EF774C3391A}"/>
               </a:ext>
             </a:extLst>
           </p:cNvPr>
@@ -3257,7 +3257,7 @@
           <p:cNvPr id="2" name="Left column">
             <a:extLst xmlns:a="http://schemas.openxmlformats.org/drawingml/2006/main">
               <a:ext uri="{FF2B5EF4-FFF2-40B4-BE49-F238E27FC236}">
-                <a16:creationId xmlns:a16="http://schemas.microsoft.com/office/drawing/2014/main" id="{8CFA80C6-BFD2-44AB-A0F7-520269E0628D}"/>
+                <a16:creationId xmlns:a16="http://schemas.microsoft.com/office/drawing/2014/main" id="{8A2BABF5-EBA5-4B9B-89D3-EAE86CCB5530}"/>
               </a:ext>
             </a:extLst>
           </p:cNvPr>
@@ -3524,12 +3524,12 @@
   </p:cSld>
   <p:clrMap bg1="lt1" tx1="dk1" bg2="lt2" tx2="dk2" accent1="accent1" accent2="accent2" accent3="accent3" accent4="accent4" accent5="accent5" accent6="accent6" hlink="hlink" folHlink="folHlink"/>
   <p:sldLayoutIdLst>
-    <p:sldLayoutId xmlns:r="http://schemas.openxmlformats.org/officeDocument/2006/relationships" id="2147483649" r:id="R4b83cc540f364747"/>
-    <p:sldLayoutId xmlns:r="http://schemas.openxmlformats.org/officeDocument/2006/relationships" id="2147483650" r:id="R040f7d8ce93b4de2"/>
-    <p:sldLayoutId xmlns:r="http://schemas.openxmlformats.org/officeDocument/2006/relationships" id="2147483651" r:id="R350b7a800d4e4f4b"/>
-    <p:sldLayoutId xmlns:r="http://schemas.openxmlformats.org/officeDocument/2006/relationships" id="2147483652" r:id="R5f7edc666d844271"/>
-    <p:sldLayoutId xmlns:r="http://schemas.openxmlformats.org/officeDocument/2006/relationships" id="2147483653" r:id="Rc9051cd932a04514"/>
-    <p:sldLayoutId xmlns:r="http://schemas.openxmlformats.org/officeDocument/2006/relationships" id="2147483654" r:id="R67a5219f6c114fea"/>
+    <p:sldLayoutId xmlns:r="http://schemas.openxmlformats.org/officeDocument/2006/relationships" id="2147483649" r:id="R770a0b6d5e554bd3"/>
+    <p:sldLayoutId xmlns:r="http://schemas.openxmlformats.org/officeDocument/2006/relationships" id="2147483650" r:id="R3c3520526f924b43"/>
+    <p:sldLayoutId xmlns:r="http://schemas.openxmlformats.org/officeDocument/2006/relationships" id="2147483651" r:id="Rde9603947b7e4035"/>
+    <p:sldLayoutId xmlns:r="http://schemas.openxmlformats.org/officeDocument/2006/relationships" id="2147483652" r:id="Rf929463a5f1746dd"/>
+    <p:sldLayoutId xmlns:r="http://schemas.openxmlformats.org/officeDocument/2006/relationships" id="2147483653" r:id="R0fa37f43999243dd"/>
+    <p:sldLayoutId xmlns:r="http://schemas.openxmlformats.org/officeDocument/2006/relationships" id="2147483654" r:id="R751fb2dfa0e447e2"/>
   </p:sldLayoutIdLst>
   <p:txStyles>
     <p:titleStyle>
@@ -4080,7 +4080,7 @@
           <p:cNvPr id="7" name="">
             <a:extLst xmlns:a="http://schemas.openxmlformats.org/drawingml/2006/main">
               <a:ext uri="{FF2B5EF4-FFF2-40B4-BE49-F238E27FC236}">
-                <a16:creationId xmlns:a16="http://schemas.microsoft.com/office/drawing/2014/main" id="{F0BB3ADB-9C0B-41F6-B718-0D7A5D4DBF97}"/>
+                <a16:creationId xmlns:a16="http://schemas.microsoft.com/office/drawing/2014/main" id="{25523BB7-7C25-4A21-9624-1B5EFA54A392}"/>
               </a:ext>
             </a:extLst>
           </p:cNvPr>
@@ -4236,7 +4236,7 @@
           <p:cNvPr id="2" name="">
             <a:extLst xmlns:a="http://schemas.openxmlformats.org/drawingml/2006/main">
               <a:ext uri="{FF2B5EF4-FFF2-40B4-BE49-F238E27FC236}">
-                <a16:creationId xmlns:a16="http://schemas.microsoft.com/office/drawing/2014/main" id="{EA90D116-301D-4970-BCF2-A5A4F3E609E3}"/>
+                <a16:creationId xmlns:a16="http://schemas.microsoft.com/office/drawing/2014/main" id="{B3BEEBA2-95D7-43E3-9FA3-747D5F88477A}"/>
               </a:ext>
             </a:extLst>
           </p:cNvPr>
@@ -4392,7 +4392,7 @@
           <p:cNvPr id="3" name="">
             <a:extLst xmlns:a="http://schemas.openxmlformats.org/drawingml/2006/main">
               <a:ext uri="{FF2B5EF4-FFF2-40B4-BE49-F238E27FC236}">
-                <a16:creationId xmlns:a16="http://schemas.microsoft.com/office/drawing/2014/main" id="{36ADCCF0-D831-4AC4-847B-EBD04A58CA9B}"/>
+                <a16:creationId xmlns:a16="http://schemas.microsoft.com/office/drawing/2014/main" id="{E5B76AB2-B704-4DBC-85DE-E1E952D8A2EE}"/>
               </a:ext>
             </a:extLst>
           </p:cNvPr>
@@ -4548,7 +4548,7 @@
           <p:cNvPr id="4" name="">
             <a:extLst xmlns:a="http://schemas.openxmlformats.org/drawingml/2006/main">
               <a:ext uri="{FF2B5EF4-FFF2-40B4-BE49-F238E27FC236}">
-                <a16:creationId xmlns:a16="http://schemas.microsoft.com/office/drawing/2014/main" id="{52123423-4729-45E7-A54F-1AC6964B2200}"/>
+                <a16:creationId xmlns:a16="http://schemas.microsoft.com/office/drawing/2014/main" id="{89931DDA-5BCF-4636-86B0-7DCD02022D1E}"/>
               </a:ext>
             </a:extLst>
           </p:cNvPr>
@@ -4558,7 +4558,7 @@
           <p:nvPr/>
         </p:nvPicPr>
         <p:blipFill>
-          <a:blip xmlns:r="http://schemas.openxmlformats.org/officeDocument/2006/relationships" xmlns:a="http://schemas.openxmlformats.org/drawingml/2006/main" r:embed="R70103698304c4254"/>
+          <a:blip xmlns:r="http://schemas.openxmlformats.org/officeDocument/2006/relationships" xmlns:a="http://schemas.openxmlformats.org/drawingml/2006/main" r:embed="Rdf37e5ed3ff840a7"/>
           <a:stretch xmlns:a="http://schemas.openxmlformats.org/drawingml/2006/main"/>
         </p:blipFill>
         <p:spPr>
@@ -4576,7 +4576,7 @@
           <p:cNvPr id="5" name="">
             <a:extLst xmlns:a="http://schemas.openxmlformats.org/drawingml/2006/main">
               <a:ext uri="{FF2B5EF4-FFF2-40B4-BE49-F238E27FC236}">
-                <a16:creationId xmlns:a16="http://schemas.microsoft.com/office/drawing/2014/main" id="{FA4697BE-7B3F-481F-B030-4920CEF51890}"/>
+                <a16:creationId xmlns:a16="http://schemas.microsoft.com/office/drawing/2014/main" id="{C85616F4-19D3-4A3D-95D5-EC279D942F68}"/>
               </a:ext>
             </a:extLst>
           </p:cNvPr>
@@ -4801,7 +4801,7 @@
           <p:cNvPr id="6" name="">
             <a:extLst xmlns:a="http://schemas.openxmlformats.org/drawingml/2006/main">
               <a:ext uri="{FF2B5EF4-FFF2-40B4-BE49-F238E27FC236}">
-                <a16:creationId xmlns:a16="http://schemas.microsoft.com/office/drawing/2014/main" id="{7E55D2C5-B6C4-4014-BD11-EA79E85BA064}"/>
+                <a16:creationId xmlns:a16="http://schemas.microsoft.com/office/drawing/2014/main" id="{88D47E81-ED8C-4376-8E3B-62A00DDD535C}"/>
               </a:ext>
             </a:extLst>
           </p:cNvPr>
@@ -4978,7 +4978,7 @@
     </p:spTree>
     <p:extLst>
       <p:ext uri="{BB962C8B-B14F-4D97-AF65-F5344CB8AC3E}">
-        <p14:creationId xmlns:p14="http://schemas.microsoft.com/office/powerpoint/2010/main" val="1072706714"/>
+        <p14:creationId xmlns:p14="http://schemas.microsoft.com/office/powerpoint/2010/main" val="743722957"/>
       </p:ext>
     </p:extLst>
   </p:cSld>
@@ -5009,7 +5009,7 @@
           <p:cNvPr id="9" name="">
             <a:extLst xmlns:a="http://schemas.openxmlformats.org/drawingml/2006/main">
               <a:ext uri="{FF2B5EF4-FFF2-40B4-BE49-F238E27FC236}">
-                <a16:creationId xmlns:a16="http://schemas.microsoft.com/office/drawing/2014/main" id="{B2A2BFDD-410B-4F1D-B4FB-923C07550B30}"/>
+                <a16:creationId xmlns:a16="http://schemas.microsoft.com/office/drawing/2014/main" id="{EA573B88-3838-4050-A381-7A19AFDDEE5A}"/>
               </a:ext>
             </a:extLst>
           </p:cNvPr>
@@ -5165,7 +5165,7 @@
           <p:cNvPr id="2" name="">
             <a:extLst xmlns:a="http://schemas.openxmlformats.org/drawingml/2006/main">
               <a:ext uri="{FF2B5EF4-FFF2-40B4-BE49-F238E27FC236}">
-                <a16:creationId xmlns:a16="http://schemas.microsoft.com/office/drawing/2014/main" id="{0713B204-E333-4D01-9DFA-1AA5B836525C}"/>
+                <a16:creationId xmlns:a16="http://schemas.microsoft.com/office/drawing/2014/main" id="{5C153362-FFD6-457D-8ECE-D866CCD97A61}"/>
               </a:ext>
             </a:extLst>
           </p:cNvPr>
@@ -5321,7 +5321,7 @@
           <p:cNvPr id="3" name="">
             <a:extLst xmlns:a="http://schemas.openxmlformats.org/drawingml/2006/main">
               <a:ext uri="{FF2B5EF4-FFF2-40B4-BE49-F238E27FC236}">
-                <a16:creationId xmlns:a16="http://schemas.microsoft.com/office/drawing/2014/main" id="{5B6ECB90-A522-410E-85D0-E55F40E2A1EF}"/>
+                <a16:creationId xmlns:a16="http://schemas.microsoft.com/office/drawing/2014/main" id="{88775F2E-58C0-4E78-B6AE-A32DFADAA225}"/>
               </a:ext>
             </a:extLst>
           </p:cNvPr>
@@ -5477,7 +5477,7 @@
           <p:cNvPr id="4" name="">
             <a:extLst xmlns:a="http://schemas.openxmlformats.org/drawingml/2006/main">
               <a:ext uri="{FF2B5EF4-FFF2-40B4-BE49-F238E27FC236}">
-                <a16:creationId xmlns:a16="http://schemas.microsoft.com/office/drawing/2014/main" id="{28875654-5521-4FE5-955C-0D09B1D622EE}"/>
+                <a16:creationId xmlns:a16="http://schemas.microsoft.com/office/drawing/2014/main" id="{D77F0669-265B-4537-8FA7-0F632D3E163C}"/>
               </a:ext>
             </a:extLst>
           </p:cNvPr>
@@ -5656,7 +5656,7 @@
           <p:cNvPr id="5" name="">
             <a:extLst xmlns:a="http://schemas.openxmlformats.org/drawingml/2006/main">
               <a:ext uri="{FF2B5EF4-FFF2-40B4-BE49-F238E27FC236}">
-                <a16:creationId xmlns:a16="http://schemas.microsoft.com/office/drawing/2014/main" id="{B0C7E447-087C-41B8-A31D-7004D0725797}"/>
+                <a16:creationId xmlns:a16="http://schemas.microsoft.com/office/drawing/2014/main" id="{3A2FBCE5-EB89-464B-8A81-2528E1BE4BB5}"/>
               </a:ext>
             </a:extLst>
           </p:cNvPr>
@@ -5812,7 +5812,7 @@
           <p:cNvPr id="6" name="">
             <a:extLst xmlns:a="http://schemas.openxmlformats.org/drawingml/2006/main">
               <a:ext uri="{FF2B5EF4-FFF2-40B4-BE49-F238E27FC236}">
-                <a16:creationId xmlns:a16="http://schemas.microsoft.com/office/drawing/2014/main" id="{0CFD1D46-72B3-4273-8E6D-EAA514EAD9F1}"/>
+                <a16:creationId xmlns:a16="http://schemas.microsoft.com/office/drawing/2014/main" id="{05A77A12-192E-4190-BE94-7CEA2678CCAF}"/>
               </a:ext>
             </a:extLst>
           </p:cNvPr>
@@ -5991,7 +5991,7 @@
           <p:cNvPr id="7" name="">
             <a:extLst xmlns:a="http://schemas.openxmlformats.org/drawingml/2006/main">
               <a:ext uri="{FF2B5EF4-FFF2-40B4-BE49-F238E27FC236}">
-                <a16:creationId xmlns:a16="http://schemas.microsoft.com/office/drawing/2014/main" id="{F2815CC4-F9C2-44DE-B57F-64B8ED1F79D3}"/>
+                <a16:creationId xmlns:a16="http://schemas.microsoft.com/office/drawing/2014/main" id="{D1E20059-7A97-4677-9284-2CC8BFF265EF}"/>
               </a:ext>
             </a:extLst>
           </p:cNvPr>
@@ -6147,7 +6147,7 @@
           <p:cNvPr id="8" name="">
             <a:extLst xmlns:a="http://schemas.openxmlformats.org/drawingml/2006/main">
               <a:ext uri="{FF2B5EF4-FFF2-40B4-BE49-F238E27FC236}">
-                <a16:creationId xmlns:a16="http://schemas.microsoft.com/office/drawing/2014/main" id="{B3673B70-25EC-47C8-8DFA-1C4C440D2CBB}"/>
+                <a16:creationId xmlns:a16="http://schemas.microsoft.com/office/drawing/2014/main" id="{C684FD22-6A7E-4426-B69D-D845011F0FCD}"/>
               </a:ext>
             </a:extLst>
           </p:cNvPr>
@@ -6324,7 +6324,7 @@
     </p:spTree>
     <p:extLst>
       <p:ext uri="{BB962C8B-B14F-4D97-AF65-F5344CB8AC3E}">
-        <p14:creationId xmlns:p14="http://schemas.microsoft.com/office/powerpoint/2010/main" val="885478429"/>
+        <p14:creationId xmlns:p14="http://schemas.microsoft.com/office/powerpoint/2010/main" val="692220151"/>
       </p:ext>
     </p:extLst>
   </p:cSld>
@@ -6355,7 +6355,7 @@
           <p:cNvPr id="8" name="">
             <a:extLst xmlns:a="http://schemas.openxmlformats.org/drawingml/2006/main">
               <a:ext uri="{FF2B5EF4-FFF2-40B4-BE49-F238E27FC236}">
-                <a16:creationId xmlns:a16="http://schemas.microsoft.com/office/drawing/2014/main" id="{A74BE54F-0701-4527-856F-C7E0C49F2775}"/>
+                <a16:creationId xmlns:a16="http://schemas.microsoft.com/office/drawing/2014/main" id="{EF2185CB-1E50-4B15-850C-B578160A059D}"/>
               </a:ext>
             </a:extLst>
           </p:cNvPr>
@@ -6511,7 +6511,7 @@
           <p:cNvPr id="2" name="">
             <a:extLst xmlns:a="http://schemas.openxmlformats.org/drawingml/2006/main">
               <a:ext uri="{FF2B5EF4-FFF2-40B4-BE49-F238E27FC236}">
-                <a16:creationId xmlns:a16="http://schemas.microsoft.com/office/drawing/2014/main" id="{AE3FD8C9-54AF-4C4C-8E64-B4525AB5326C}"/>
+                <a16:creationId xmlns:a16="http://schemas.microsoft.com/office/drawing/2014/main" id="{2DFDBA5D-8BB0-497B-8D2B-E4E5EB6E2AE3}"/>
               </a:ext>
             </a:extLst>
           </p:cNvPr>
@@ -6667,7 +6667,7 @@
           <p:cNvPr id="3" name="">
             <a:extLst xmlns:a="http://schemas.openxmlformats.org/drawingml/2006/main">
               <a:ext uri="{FF2B5EF4-FFF2-40B4-BE49-F238E27FC236}">
-                <a16:creationId xmlns:a16="http://schemas.microsoft.com/office/drawing/2014/main" id="{EA6A3C7E-0066-41B9-94A4-6F3E87BAE02A}"/>
+                <a16:creationId xmlns:a16="http://schemas.microsoft.com/office/drawing/2014/main" id="{DE552B8A-2D89-4264-AEC0-4CA5563F0C06}"/>
               </a:ext>
             </a:extLst>
           </p:cNvPr>
@@ -6677,7 +6677,7 @@
           <p:nvPr/>
         </p:nvPicPr>
         <p:blipFill>
-          <a:blip xmlns:r="http://schemas.openxmlformats.org/officeDocument/2006/relationships" xmlns:a="http://schemas.openxmlformats.org/drawingml/2006/main" r:embed="Rdd82319d95704c75"/>
+          <a:blip xmlns:r="http://schemas.openxmlformats.org/officeDocument/2006/relationships" xmlns:a="http://schemas.openxmlformats.org/drawingml/2006/main" r:embed="R60a26e52b1fc4190"/>
           <a:stretch xmlns:a="http://schemas.openxmlformats.org/drawingml/2006/main"/>
         </p:blipFill>
         <p:spPr>
@@ -6695,7 +6695,7 @@
           <p:cNvPr id="4" name="">
             <a:extLst xmlns:a="http://schemas.openxmlformats.org/drawingml/2006/main">
               <a:ext uri="{FF2B5EF4-FFF2-40B4-BE49-F238E27FC236}">
-                <a16:creationId xmlns:a16="http://schemas.microsoft.com/office/drawing/2014/main" id="{ED0A4B36-F4DF-46B3-B822-7CDD03CCF094}"/>
+                <a16:creationId xmlns:a16="http://schemas.microsoft.com/office/drawing/2014/main" id="{CBEF427E-758C-49BF-9996-4EC70BE5FE9E}"/>
               </a:ext>
             </a:extLst>
           </p:cNvPr>
@@ -6851,7 +6851,7 @@
           <p:cNvPr id="5" name="">
             <a:extLst xmlns:a="http://schemas.openxmlformats.org/drawingml/2006/main">
               <a:ext uri="{FF2B5EF4-FFF2-40B4-BE49-F238E27FC236}">
-                <a16:creationId xmlns:a16="http://schemas.microsoft.com/office/drawing/2014/main" id="{721D26C3-7010-49A9-83AB-6027BE24C1DE}"/>
+                <a16:creationId xmlns:a16="http://schemas.microsoft.com/office/drawing/2014/main" id="{1E22FC3B-16E9-4867-8E2B-5612D8875CC9}"/>
               </a:ext>
             </a:extLst>
           </p:cNvPr>
@@ -7053,7 +7053,7 @@
           <p:cNvPr id="6" name="">
             <a:extLst xmlns:a="http://schemas.openxmlformats.org/drawingml/2006/main">
               <a:ext uri="{FF2B5EF4-FFF2-40B4-BE49-F238E27FC236}">
-                <a16:creationId xmlns:a16="http://schemas.microsoft.com/office/drawing/2014/main" id="{0561E387-EF20-492A-AFAC-24394D2B38C4}"/>
+                <a16:creationId xmlns:a16="http://schemas.microsoft.com/office/drawing/2014/main" id="{DB5C4936-AAEA-47C5-8E1D-4FBCCCDF2568}"/>
               </a:ext>
             </a:extLst>
           </p:cNvPr>
@@ -7255,7 +7255,7 @@
           <p:cNvPr id="7" name="">
             <a:extLst xmlns:a="http://schemas.openxmlformats.org/drawingml/2006/main">
               <a:ext uri="{FF2B5EF4-FFF2-40B4-BE49-F238E27FC236}">
-                <a16:creationId xmlns:a16="http://schemas.microsoft.com/office/drawing/2014/main" id="{3A4C0926-AA3B-42C1-9B29-8763D55CD8FA}"/>
+                <a16:creationId xmlns:a16="http://schemas.microsoft.com/office/drawing/2014/main" id="{1DA1FFA7-F4A6-4F9D-A41E-BA53745E7EF3}"/>
               </a:ext>
             </a:extLst>
           </p:cNvPr>
@@ -7409,7 +7409,7 @@
     </p:spTree>
     <p:extLst>
       <p:ext uri="{BB962C8B-B14F-4D97-AF65-F5344CB8AC3E}">
-        <p14:creationId xmlns:p14="http://schemas.microsoft.com/office/powerpoint/2010/main" val="438098724"/>
+        <p14:creationId xmlns:p14="http://schemas.microsoft.com/office/powerpoint/2010/main" val="1973180045"/>
       </p:ext>
     </p:extLst>
   </p:cSld>
@@ -7440,7 +7440,7 @@
           <p:cNvPr id="9" name="">
             <a:extLst xmlns:a="http://schemas.openxmlformats.org/drawingml/2006/main">
               <a:ext uri="{FF2B5EF4-FFF2-40B4-BE49-F238E27FC236}">
-                <a16:creationId xmlns:a16="http://schemas.microsoft.com/office/drawing/2014/main" id="{0663AA8E-7A4E-42D5-B48F-94A22AE594A2}"/>
+                <a16:creationId xmlns:a16="http://schemas.microsoft.com/office/drawing/2014/main" id="{A609B6B0-93D5-442D-90CE-7F146E03DD23}"/>
               </a:ext>
             </a:extLst>
           </p:cNvPr>
@@ -7471,7 +7471,7 @@
           <p:cNvPr id="8" name="">
             <a:extLst xmlns:a="http://schemas.openxmlformats.org/drawingml/2006/main">
               <a:ext uri="{FF2B5EF4-FFF2-40B4-BE49-F238E27FC236}">
-                <a16:creationId xmlns:a16="http://schemas.microsoft.com/office/drawing/2014/main" id="{237FB708-5706-45DC-9CF8-922AFC638780}"/>
+                <a16:creationId xmlns:a16="http://schemas.microsoft.com/office/drawing/2014/main" id="{B8C12CAC-18A1-44DF-AB30-8F3E0B39DB46}"/>
               </a:ext>
             </a:extLst>
           </p:cNvPr>
@@ -7502,7 +7502,7 @@
           <p:cNvPr id="7" name="">
             <a:extLst xmlns:a="http://schemas.openxmlformats.org/drawingml/2006/main">
               <a:ext uri="{FF2B5EF4-FFF2-40B4-BE49-F238E27FC236}">
-                <a16:creationId xmlns:a16="http://schemas.microsoft.com/office/drawing/2014/main" id="{E702FBFF-8303-4C7B-B3E9-F9375038060B}"/>
+                <a16:creationId xmlns:a16="http://schemas.microsoft.com/office/drawing/2014/main" id="{1894B4B5-A5B1-42DA-AC66-E967D4BAEA1C}"/>
               </a:ext>
             </a:extLst>
           </p:cNvPr>
@@ -7533,7 +7533,7 @@
           <p:cNvPr id="13" name="">
             <a:extLst xmlns:a="http://schemas.openxmlformats.org/drawingml/2006/main">
               <a:ext uri="{FF2B5EF4-FFF2-40B4-BE49-F238E27FC236}">
-                <a16:creationId xmlns:a16="http://schemas.microsoft.com/office/drawing/2014/main" id="{64C428E1-DB87-4106-A4DF-80298CE53B97}"/>
+                <a16:creationId xmlns:a16="http://schemas.microsoft.com/office/drawing/2014/main" id="{7E08D0D7-E3C3-4826-BFEC-2C7AA4495926}"/>
               </a:ext>
             </a:extLst>
           </p:cNvPr>
@@ -7689,7 +7689,7 @@
           <p:cNvPr id="2" name="">
             <a:extLst xmlns:a="http://schemas.openxmlformats.org/drawingml/2006/main">
               <a:ext uri="{FF2B5EF4-FFF2-40B4-BE49-F238E27FC236}">
-                <a16:creationId xmlns:a16="http://schemas.microsoft.com/office/drawing/2014/main" id="{0785CF0C-F446-43F7-ADEB-9A8537A0FDE9}"/>
+                <a16:creationId xmlns:a16="http://schemas.microsoft.com/office/drawing/2014/main" id="{45E9FBFA-CEA7-4608-9AF5-72EE3FAFBAF3}"/>
               </a:ext>
             </a:extLst>
           </p:cNvPr>
@@ -7845,7 +7845,7 @@
           <p:cNvPr id="3" name="">
             <a:extLst xmlns:a="http://schemas.openxmlformats.org/drawingml/2006/main">
               <a:ext uri="{FF2B5EF4-FFF2-40B4-BE49-F238E27FC236}">
-                <a16:creationId xmlns:a16="http://schemas.microsoft.com/office/drawing/2014/main" id="{A11FE112-7304-4873-B445-7CE75C441DC5}"/>
+                <a16:creationId xmlns:a16="http://schemas.microsoft.com/office/drawing/2014/main" id="{40F7E1F9-4A5F-4671-8971-6E4EC3DCF189}"/>
               </a:ext>
             </a:extLst>
           </p:cNvPr>
@@ -8028,7 +8028,7 @@
           <p:cNvPr id="4" name="">
             <a:extLst xmlns:a="http://schemas.openxmlformats.org/drawingml/2006/main">
               <a:ext uri="{FF2B5EF4-FFF2-40B4-BE49-F238E27FC236}">
-                <a16:creationId xmlns:a16="http://schemas.microsoft.com/office/drawing/2014/main" id="{1D317921-CF14-4D81-9741-6E34AFDBE393}"/>
+                <a16:creationId xmlns:a16="http://schemas.microsoft.com/office/drawing/2014/main" id="{37B1EFFF-2E04-4C40-AC8F-5E74D52CBC1D}"/>
               </a:ext>
             </a:extLst>
           </p:cNvPr>
@@ -8211,7 +8211,7 @@
           <p:cNvPr id="5" name="">
             <a:extLst xmlns:a="http://schemas.openxmlformats.org/drawingml/2006/main">
               <a:ext uri="{FF2B5EF4-FFF2-40B4-BE49-F238E27FC236}">
-                <a16:creationId xmlns:a16="http://schemas.microsoft.com/office/drawing/2014/main" id="{3BE02978-B1C6-4FDB-A410-5FF6B3CE8764}"/>
+                <a16:creationId xmlns:a16="http://schemas.microsoft.com/office/drawing/2014/main" id="{AA978F6F-721C-4297-BD24-6D4C2559CCE4}"/>
               </a:ext>
             </a:extLst>
           </p:cNvPr>
@@ -8394,7 +8394,7 @@
           <p:cNvPr id="6" name="">
             <a:extLst xmlns:a="http://schemas.openxmlformats.org/drawingml/2006/main">
               <a:ext uri="{FF2B5EF4-FFF2-40B4-BE49-F238E27FC236}">
-                <a16:creationId xmlns:a16="http://schemas.microsoft.com/office/drawing/2014/main" id="{FB84A66C-257D-49D9-9FCB-7FEF2AB8A3E5}"/>
+                <a16:creationId xmlns:a16="http://schemas.microsoft.com/office/drawing/2014/main" id="{0FAB8D3A-95E3-4538-8E00-BE11AE87DE0D}"/>
               </a:ext>
             </a:extLst>
           </p:cNvPr>
@@ -8577,7 +8577,7 @@
           <p:cNvPr id="10" name="">
             <a:extLst xmlns:a="http://schemas.openxmlformats.org/drawingml/2006/main">
               <a:ext uri="{FF2B5EF4-FFF2-40B4-BE49-F238E27FC236}">
-                <a16:creationId xmlns:a16="http://schemas.microsoft.com/office/drawing/2014/main" id="{46870B0C-9DB5-4969-B41D-539899F43D3F}"/>
+                <a16:creationId xmlns:a16="http://schemas.microsoft.com/office/drawing/2014/main" id="{72C3F72A-0089-4089-A189-E3ADDE1BD3FF}"/>
               </a:ext>
             </a:extLst>
           </p:cNvPr>
@@ -8733,7 +8733,7 @@
           <p:cNvPr id="11" name="">
             <a:extLst xmlns:a="http://schemas.openxmlformats.org/drawingml/2006/main">
               <a:ext uri="{FF2B5EF4-FFF2-40B4-BE49-F238E27FC236}">
-                <a16:creationId xmlns:a16="http://schemas.microsoft.com/office/drawing/2014/main" id="{6F9046BF-F5B0-4990-A4DE-24AFFB20411B}"/>
+                <a16:creationId xmlns:a16="http://schemas.microsoft.com/office/drawing/2014/main" id="{4ADC698A-0B6F-44E0-A5E2-8384206B06C8}"/>
               </a:ext>
             </a:extLst>
           </p:cNvPr>
@@ -8912,7 +8912,7 @@
           <p:cNvPr id="12" name="">
             <a:extLst xmlns:a="http://schemas.openxmlformats.org/drawingml/2006/main">
               <a:ext uri="{FF2B5EF4-FFF2-40B4-BE49-F238E27FC236}">
-                <a16:creationId xmlns:a16="http://schemas.microsoft.com/office/drawing/2014/main" id="{BE71811F-4D86-4B62-B8F1-C7EF1A9CD706}"/>
+                <a16:creationId xmlns:a16="http://schemas.microsoft.com/office/drawing/2014/main" id="{D8A05EB5-74B6-4EB3-A626-786B99045B81}"/>
               </a:ext>
             </a:extLst>
           </p:cNvPr>
@@ -9066,7 +9066,7 @@
     </p:spTree>
     <p:extLst>
       <p:ext uri="{BB962C8B-B14F-4D97-AF65-F5344CB8AC3E}">
-        <p14:creationId xmlns:p14="http://schemas.microsoft.com/office/powerpoint/2010/main" val="637506815"/>
+        <p14:creationId xmlns:p14="http://schemas.microsoft.com/office/powerpoint/2010/main" val="450805637"/>
       </p:ext>
     </p:extLst>
   </p:cSld>
@@ -9097,7 +9097,7 @@
           <p:cNvPr id="7" name="">
             <a:extLst xmlns:a="http://schemas.openxmlformats.org/drawingml/2006/main">
               <a:ext uri="{FF2B5EF4-FFF2-40B4-BE49-F238E27FC236}">
-                <a16:creationId xmlns:a16="http://schemas.microsoft.com/office/drawing/2014/main" id="{8B982600-FAE5-4A6C-B562-74FE9471ADB8}"/>
+                <a16:creationId xmlns:a16="http://schemas.microsoft.com/office/drawing/2014/main" id="{8F7AEBF7-7AAA-433A-A2DF-B9C8093A7428}"/>
               </a:ext>
             </a:extLst>
           </p:cNvPr>
@@ -9128,7 +9128,7 @@
           <p:cNvPr id="6" name="">
             <a:extLst xmlns:a="http://schemas.openxmlformats.org/drawingml/2006/main">
               <a:ext uri="{FF2B5EF4-FFF2-40B4-BE49-F238E27FC236}">
-                <a16:creationId xmlns:a16="http://schemas.microsoft.com/office/drawing/2014/main" id="{7AD41ACB-2400-4F67-A175-95FFFE29EEF0}"/>
+                <a16:creationId xmlns:a16="http://schemas.microsoft.com/office/drawing/2014/main" id="{0FC5D604-FE09-4D92-A558-94CD71E62BC2}"/>
               </a:ext>
             </a:extLst>
           </p:cNvPr>
@@ -9159,7 +9159,7 @@
           <p:cNvPr id="11" name="">
             <a:extLst xmlns:a="http://schemas.openxmlformats.org/drawingml/2006/main">
               <a:ext uri="{FF2B5EF4-FFF2-40B4-BE49-F238E27FC236}">
-                <a16:creationId xmlns:a16="http://schemas.microsoft.com/office/drawing/2014/main" id="{0A265B6A-F2BA-46DC-B2CB-242ED8E4342D}"/>
+                <a16:creationId xmlns:a16="http://schemas.microsoft.com/office/drawing/2014/main" id="{00E62483-6CC0-4686-9944-37B99722FE9C}"/>
               </a:ext>
             </a:extLst>
           </p:cNvPr>
@@ -9315,7 +9315,7 @@
           <p:cNvPr id="2" name="">
             <a:extLst xmlns:a="http://schemas.openxmlformats.org/drawingml/2006/main">
               <a:ext uri="{FF2B5EF4-FFF2-40B4-BE49-F238E27FC236}">
-                <a16:creationId xmlns:a16="http://schemas.microsoft.com/office/drawing/2014/main" id="{DE07F09B-060D-449C-8276-18F3D7D57440}"/>
+                <a16:creationId xmlns:a16="http://schemas.microsoft.com/office/drawing/2014/main" id="{498B2537-C5BC-40A7-9E68-E7CF41467530}"/>
               </a:ext>
             </a:extLst>
           </p:cNvPr>
@@ -9471,7 +9471,7 @@
           <p:cNvPr id="3" name="">
             <a:extLst xmlns:a="http://schemas.openxmlformats.org/drawingml/2006/main">
               <a:ext uri="{FF2B5EF4-FFF2-40B4-BE49-F238E27FC236}">
-                <a16:creationId xmlns:a16="http://schemas.microsoft.com/office/drawing/2014/main" id="{A7088010-761C-48AE-AA45-0FECD5499BA7}"/>
+                <a16:creationId xmlns:a16="http://schemas.microsoft.com/office/drawing/2014/main" id="{33285346-18C3-49C6-9068-47288E50226F}"/>
               </a:ext>
             </a:extLst>
           </p:cNvPr>
@@ -9654,7 +9654,7 @@
           <p:cNvPr id="4" name="">
             <a:extLst xmlns:a="http://schemas.openxmlformats.org/drawingml/2006/main">
               <a:ext uri="{FF2B5EF4-FFF2-40B4-BE49-F238E27FC236}">
-                <a16:creationId xmlns:a16="http://schemas.microsoft.com/office/drawing/2014/main" id="{6C3D1375-5E02-404B-AD2D-4F2EDD0E6171}"/>
+                <a16:creationId xmlns:a16="http://schemas.microsoft.com/office/drawing/2014/main" id="{E5551AC8-6A51-49C7-A875-0232556C49BA}"/>
               </a:ext>
             </a:extLst>
           </p:cNvPr>
@@ -9837,7 +9837,7 @@
           <p:cNvPr id="5" name="">
             <a:extLst xmlns:a="http://schemas.openxmlformats.org/drawingml/2006/main">
               <a:ext uri="{FF2B5EF4-FFF2-40B4-BE49-F238E27FC236}">
-                <a16:creationId xmlns:a16="http://schemas.microsoft.com/office/drawing/2014/main" id="{0F1A6564-320A-4420-8832-CDD922A779DC}"/>
+                <a16:creationId xmlns:a16="http://schemas.microsoft.com/office/drawing/2014/main" id="{811AD367-F6C0-47F0-A1A2-0DB7E9EBF2EF}"/>
               </a:ext>
             </a:extLst>
           </p:cNvPr>
@@ -10020,7 +10020,7 @@
           <p:cNvPr id="8" name="">
             <a:extLst xmlns:a="http://schemas.openxmlformats.org/drawingml/2006/main">
               <a:ext uri="{FF2B5EF4-FFF2-40B4-BE49-F238E27FC236}">
-                <a16:creationId xmlns:a16="http://schemas.microsoft.com/office/drawing/2014/main" id="{C7B71D96-7820-4976-9FB0-95AB9B3D2936}"/>
+                <a16:creationId xmlns:a16="http://schemas.microsoft.com/office/drawing/2014/main" id="{0B1A78DF-C280-4CB5-B990-1BDF2A69D8C6}"/>
               </a:ext>
             </a:extLst>
           </p:cNvPr>
@@ -10176,7 +10176,7 @@
           <p:cNvPr id="9" name="">
             <a:extLst xmlns:a="http://schemas.openxmlformats.org/drawingml/2006/main">
               <a:ext uri="{FF2B5EF4-FFF2-40B4-BE49-F238E27FC236}">
-                <a16:creationId xmlns:a16="http://schemas.microsoft.com/office/drawing/2014/main" id="{FD6A95A1-9634-471E-8DFF-37493AE481EC}"/>
+                <a16:creationId xmlns:a16="http://schemas.microsoft.com/office/drawing/2014/main" id="{75E38AD0-63D9-4E58-B36A-CB1AD46AA5F6}"/>
               </a:ext>
             </a:extLst>
           </p:cNvPr>
@@ -10186,7 +10186,7 @@
           <p:nvPr/>
         </p:nvPicPr>
         <p:blipFill>
-          <a:blip xmlns:r="http://schemas.openxmlformats.org/officeDocument/2006/relationships" xmlns:a="http://schemas.openxmlformats.org/drawingml/2006/main" r:embed="R2422c5c017df46a9"/>
+          <a:blip xmlns:r="http://schemas.openxmlformats.org/officeDocument/2006/relationships" xmlns:a="http://schemas.openxmlformats.org/drawingml/2006/main" r:embed="R5132b62a408f4156"/>
           <a:stretch xmlns:a="http://schemas.openxmlformats.org/drawingml/2006/main"/>
         </p:blipFill>
         <p:spPr>
@@ -10204,7 +10204,7 @@
           <p:cNvPr id="10" name="">
             <a:extLst xmlns:a="http://schemas.openxmlformats.org/drawingml/2006/main">
               <a:ext uri="{FF2B5EF4-FFF2-40B4-BE49-F238E27FC236}">
-                <a16:creationId xmlns:a16="http://schemas.microsoft.com/office/drawing/2014/main" id="{B41BED29-2250-448C-A1D2-F8DEC1DC9796}"/>
+                <a16:creationId xmlns:a16="http://schemas.microsoft.com/office/drawing/2014/main" id="{3286C97A-C0FB-4F96-A04B-F2CCA185E0A4}"/>
               </a:ext>
             </a:extLst>
           </p:cNvPr>
@@ -10381,7 +10381,7 @@
     </p:spTree>
     <p:extLst>
       <p:ext uri="{BB962C8B-B14F-4D97-AF65-F5344CB8AC3E}">
-        <p14:creationId xmlns:p14="http://schemas.microsoft.com/office/powerpoint/2010/main" val="42406266"/>
+        <p14:creationId xmlns:p14="http://schemas.microsoft.com/office/powerpoint/2010/main" val="933519793"/>
       </p:ext>
     </p:extLst>
   </p:cSld>
@@ -10412,7 +10412,7 @@
           <p:cNvPr id="8" name="">
             <a:extLst xmlns:a="http://schemas.openxmlformats.org/drawingml/2006/main">
               <a:ext uri="{FF2B5EF4-FFF2-40B4-BE49-F238E27FC236}">
-                <a16:creationId xmlns:a16="http://schemas.microsoft.com/office/drawing/2014/main" id="{9EB00F14-CEAE-4E2B-84DF-5A41A7674069}"/>
+                <a16:creationId xmlns:a16="http://schemas.microsoft.com/office/drawing/2014/main" id="{2F6BAF05-C047-4E5D-9844-781B03DD1B5B}"/>
               </a:ext>
             </a:extLst>
           </p:cNvPr>
@@ -10568,7 +10568,7 @@
           <p:cNvPr id="2" name="">
             <a:extLst xmlns:a="http://schemas.openxmlformats.org/drawingml/2006/main">
               <a:ext uri="{FF2B5EF4-FFF2-40B4-BE49-F238E27FC236}">
-                <a16:creationId xmlns:a16="http://schemas.microsoft.com/office/drawing/2014/main" id="{003C3113-86C4-4DFC-ACA2-74141EA39F24}"/>
+                <a16:creationId xmlns:a16="http://schemas.microsoft.com/office/drawing/2014/main" id="{D7818911-C37D-4DE1-BCCE-ACFC35837D2F}"/>
               </a:ext>
             </a:extLst>
           </p:cNvPr>
@@ -10724,7 +10724,7 @@
           <p:cNvPr id="3" name="">
             <a:extLst xmlns:a="http://schemas.openxmlformats.org/drawingml/2006/main">
               <a:ext uri="{FF2B5EF4-FFF2-40B4-BE49-F238E27FC236}">
-                <a16:creationId xmlns:a16="http://schemas.microsoft.com/office/drawing/2014/main" id="{45FE67E6-66A5-4F04-8C4D-C31E88E6CECF}"/>
+                <a16:creationId xmlns:a16="http://schemas.microsoft.com/office/drawing/2014/main" id="{8D3E9F74-C32A-4A1F-B1EF-11DD1E27821D}"/>
               </a:ext>
             </a:extLst>
           </p:cNvPr>
@@ -10880,7 +10880,7 @@
           <p:cNvPr id="4" name="">
             <a:extLst xmlns:a="http://schemas.openxmlformats.org/drawingml/2006/main">
               <a:ext uri="{FF2B5EF4-FFF2-40B4-BE49-F238E27FC236}">
-                <a16:creationId xmlns:a16="http://schemas.microsoft.com/office/drawing/2014/main" id="{17B5F1C8-AF56-414F-8136-7604F7A02EED}"/>
+                <a16:creationId xmlns:a16="http://schemas.microsoft.com/office/drawing/2014/main" id="{50703E00-2EF7-4627-879E-3AD019C3538B}"/>
               </a:ext>
             </a:extLst>
           </p:cNvPr>
@@ -11082,7 +11082,7 @@
           <p:cNvPr id="5" name="">
             <a:extLst xmlns:a="http://schemas.openxmlformats.org/drawingml/2006/main">
               <a:ext uri="{FF2B5EF4-FFF2-40B4-BE49-F238E27FC236}">
-                <a16:creationId xmlns:a16="http://schemas.microsoft.com/office/drawing/2014/main" id="{50889E30-63CF-4CE9-B687-E790EF216489}"/>
+                <a16:creationId xmlns:a16="http://schemas.microsoft.com/office/drawing/2014/main" id="{5FCBA8B8-881D-47CE-8903-D65FFB499414}"/>
               </a:ext>
             </a:extLst>
           </p:cNvPr>
@@ -11261,7 +11261,7 @@
           <p:cNvPr id="6" name="">
             <a:extLst xmlns:a="http://schemas.openxmlformats.org/drawingml/2006/main">
               <a:ext uri="{FF2B5EF4-FFF2-40B4-BE49-F238E27FC236}">
-                <a16:creationId xmlns:a16="http://schemas.microsoft.com/office/drawing/2014/main" id="{A73B03F6-2A0A-4236-BE7E-0C922700D827}"/>
+                <a16:creationId xmlns:a16="http://schemas.microsoft.com/office/drawing/2014/main" id="{08621206-AFFB-4797-B0A3-8698CD09DACC}"/>
               </a:ext>
             </a:extLst>
           </p:cNvPr>
@@ -11417,7 +11417,7 @@
           <p:cNvPr id="7" name="">
             <a:extLst xmlns:a="http://schemas.openxmlformats.org/drawingml/2006/main">
               <a:ext uri="{FF2B5EF4-FFF2-40B4-BE49-F238E27FC236}">
-                <a16:creationId xmlns:a16="http://schemas.microsoft.com/office/drawing/2014/main" id="{2B0A4DF3-9234-4143-9929-A62AF9715A6B}"/>
+                <a16:creationId xmlns:a16="http://schemas.microsoft.com/office/drawing/2014/main" id="{395B46D3-FA0E-4421-B184-2E9287B6FDEB}"/>
               </a:ext>
             </a:extLst>
           </p:cNvPr>
@@ -11427,7 +11427,7 @@
           <p:nvPr/>
         </p:nvPicPr>
         <p:blipFill>
-          <a:blip xmlns:r="http://schemas.openxmlformats.org/officeDocument/2006/relationships" xmlns:a="http://schemas.openxmlformats.org/drawingml/2006/main" r:embed="R4e99b5a157984303"/>
+          <a:blip xmlns:r="http://schemas.openxmlformats.org/officeDocument/2006/relationships" xmlns:a="http://schemas.openxmlformats.org/drawingml/2006/main" r:embed="Raee92d6c94a147ee"/>
           <a:stretch xmlns:a="http://schemas.openxmlformats.org/drawingml/2006/main"/>
         </p:blipFill>
         <p:spPr>
@@ -11443,7 +11443,7 @@
     </p:spTree>
     <p:extLst>
       <p:ext uri="{BB962C8B-B14F-4D97-AF65-F5344CB8AC3E}">
-        <p14:creationId xmlns:p14="http://schemas.microsoft.com/office/powerpoint/2010/main" val="1739246720"/>
+        <p14:creationId xmlns:p14="http://schemas.microsoft.com/office/powerpoint/2010/main" val="151351368"/>
       </p:ext>
     </p:extLst>
   </p:cSld>
@@ -11474,7 +11474,7 @@
           <p:cNvPr id="9" name="">
             <a:extLst xmlns:a="http://schemas.openxmlformats.org/drawingml/2006/main">
               <a:ext uri="{FF2B5EF4-FFF2-40B4-BE49-F238E27FC236}">
-                <a16:creationId xmlns:a16="http://schemas.microsoft.com/office/drawing/2014/main" id="{74F0F8FF-C644-458D-9162-988610ECE142}"/>
+                <a16:creationId xmlns:a16="http://schemas.microsoft.com/office/drawing/2014/main" id="{A4CD0E8F-5F89-42D8-AE99-5E9F48CD4607}"/>
               </a:ext>
             </a:extLst>
           </p:cNvPr>
@@ -11630,7 +11630,7 @@
           <p:cNvPr id="2" name="">
             <a:extLst xmlns:a="http://schemas.openxmlformats.org/drawingml/2006/main">
               <a:ext uri="{FF2B5EF4-FFF2-40B4-BE49-F238E27FC236}">
-                <a16:creationId xmlns:a16="http://schemas.microsoft.com/office/drawing/2014/main" id="{33FB5DEF-F375-4123-BB65-FDE034C5B481}"/>
+                <a16:creationId xmlns:a16="http://schemas.microsoft.com/office/drawing/2014/main" id="{61E8DA8E-3705-4423-BC8E-3AF0DFFD6E68}"/>
               </a:ext>
             </a:extLst>
           </p:cNvPr>
@@ -11786,7 +11786,7 @@
           <p:cNvPr id="3" name="">
             <a:extLst xmlns:a="http://schemas.openxmlformats.org/drawingml/2006/main">
               <a:ext uri="{FF2B5EF4-FFF2-40B4-BE49-F238E27FC236}">
-                <a16:creationId xmlns:a16="http://schemas.microsoft.com/office/drawing/2014/main" id="{63E4CE35-5CB3-42EA-8B07-F5891C3A81F6}"/>
+                <a16:creationId xmlns:a16="http://schemas.microsoft.com/office/drawing/2014/main" id="{A9E077AF-3B32-4BC7-A74D-AFE2306A1C3F}"/>
               </a:ext>
             </a:extLst>
           </p:cNvPr>
@@ -11796,7 +11796,7 @@
           <p:nvPr/>
         </p:nvPicPr>
         <p:blipFill>
-          <a:blip xmlns:r="http://schemas.openxmlformats.org/officeDocument/2006/relationships" xmlns:a="http://schemas.openxmlformats.org/drawingml/2006/main" r:embed="Rf3cdc32f5ceb4a8a"/>
+          <a:blip xmlns:r="http://schemas.openxmlformats.org/officeDocument/2006/relationships" xmlns:a="http://schemas.openxmlformats.org/drawingml/2006/main" r:embed="R06dd88108567469d"/>
           <a:stretch xmlns:a="http://schemas.openxmlformats.org/drawingml/2006/main"/>
         </p:blipFill>
         <p:spPr>
@@ -11814,7 +11814,7 @@
           <p:cNvPr id="4" name="">
             <a:extLst xmlns:a="http://schemas.openxmlformats.org/drawingml/2006/main">
               <a:ext uri="{FF2B5EF4-FFF2-40B4-BE49-F238E27FC236}">
-                <a16:creationId xmlns:a16="http://schemas.microsoft.com/office/drawing/2014/main" id="{E5864590-1CC8-4921-99D1-AF22904F3D90}"/>
+                <a16:creationId xmlns:a16="http://schemas.microsoft.com/office/drawing/2014/main" id="{E97048F7-22C3-45B5-B9D3-AD9A56F3C73E}"/>
               </a:ext>
             </a:extLst>
           </p:cNvPr>
@@ -11970,7 +11970,7 @@
           <p:cNvPr id="5" name="">
             <a:extLst xmlns:a="http://schemas.openxmlformats.org/drawingml/2006/main">
               <a:ext uri="{FF2B5EF4-FFF2-40B4-BE49-F238E27FC236}">
-                <a16:creationId xmlns:a16="http://schemas.microsoft.com/office/drawing/2014/main" id="{C3534301-F204-4A3D-AF14-9C6C462C58F0}"/>
+                <a16:creationId xmlns:a16="http://schemas.microsoft.com/office/drawing/2014/main" id="{7353025B-334C-4D9D-8592-EB82F7C35834}"/>
               </a:ext>
             </a:extLst>
           </p:cNvPr>
@@ -12149,7 +12149,7 @@
           <p:cNvPr id="6" name="">
             <a:extLst xmlns:a="http://schemas.openxmlformats.org/drawingml/2006/main">
               <a:ext uri="{FF2B5EF4-FFF2-40B4-BE49-F238E27FC236}">
-                <a16:creationId xmlns:a16="http://schemas.microsoft.com/office/drawing/2014/main" id="{8B01973A-29D8-464D-BC0F-3FCFC543DF2E}"/>
+                <a16:creationId xmlns:a16="http://schemas.microsoft.com/office/drawing/2014/main" id="{3DDF89E2-1AAE-43B9-B69E-69DDCBA382BA}"/>
               </a:ext>
             </a:extLst>
           </p:cNvPr>
@@ -12305,7 +12305,7 @@
           <p:cNvPr id="7" name="">
             <a:extLst xmlns:a="http://schemas.openxmlformats.org/drawingml/2006/main">
               <a:ext uri="{FF2B5EF4-FFF2-40B4-BE49-F238E27FC236}">
-                <a16:creationId xmlns:a16="http://schemas.microsoft.com/office/drawing/2014/main" id="{2D544B39-11FC-4D22-8028-A0642E936DCD}"/>
+                <a16:creationId xmlns:a16="http://schemas.microsoft.com/office/drawing/2014/main" id="{727EF2D0-3B57-40E5-AB32-01F6F3F439C9}"/>
               </a:ext>
             </a:extLst>
           </p:cNvPr>
@@ -12507,7 +12507,7 @@
           <p:cNvPr id="8" name="">
             <a:extLst xmlns:a="http://schemas.openxmlformats.org/drawingml/2006/main">
               <a:ext uri="{FF2B5EF4-FFF2-40B4-BE49-F238E27FC236}">
-                <a16:creationId xmlns:a16="http://schemas.microsoft.com/office/drawing/2014/main" id="{460758A4-9456-4885-B33A-0E3DAE48E749}"/>
+                <a16:creationId xmlns:a16="http://schemas.microsoft.com/office/drawing/2014/main" id="{CD2E988B-1A6C-4788-A481-BB962231234F}"/>
               </a:ext>
             </a:extLst>
           </p:cNvPr>
@@ -12661,7 +12661,7 @@
     </p:spTree>
     <p:extLst>
       <p:ext uri="{BB962C8B-B14F-4D97-AF65-F5344CB8AC3E}">
-        <p14:creationId xmlns:p14="http://schemas.microsoft.com/office/powerpoint/2010/main" val="1773309976"/>
+        <p14:creationId xmlns:p14="http://schemas.microsoft.com/office/powerpoint/2010/main" val="2043276685"/>
       </p:ext>
     </p:extLst>
   </p:cSld>
@@ -12692,7 +12692,7 @@
           <p:cNvPr id="7" name="">
             <a:extLst xmlns:a="http://schemas.openxmlformats.org/drawingml/2006/main">
               <a:ext uri="{FF2B5EF4-FFF2-40B4-BE49-F238E27FC236}">
-                <a16:creationId xmlns:a16="http://schemas.microsoft.com/office/drawing/2014/main" id="{B7F8BC6C-8868-40EB-B2BD-311E281AF8E2}"/>
+                <a16:creationId xmlns:a16="http://schemas.microsoft.com/office/drawing/2014/main" id="{70F7AEC3-0DC6-4D79-BAA2-C081CDFF4C8C}"/>
               </a:ext>
             </a:extLst>
           </p:cNvPr>
@@ -12848,7 +12848,7 @@
           <p:cNvPr id="2" name="">
             <a:extLst xmlns:a="http://schemas.openxmlformats.org/drawingml/2006/main">
               <a:ext uri="{FF2B5EF4-FFF2-40B4-BE49-F238E27FC236}">
-                <a16:creationId xmlns:a16="http://schemas.microsoft.com/office/drawing/2014/main" id="{12C18490-D17F-41AE-8A5B-D46D487CE38D}"/>
+                <a16:creationId xmlns:a16="http://schemas.microsoft.com/office/drawing/2014/main" id="{6EC18D76-9F19-4502-90F2-D7FE90F89654}"/>
               </a:ext>
             </a:extLst>
           </p:cNvPr>
@@ -13004,7 +13004,7 @@
           <p:cNvPr id="3" name="">
             <a:extLst xmlns:a="http://schemas.openxmlformats.org/drawingml/2006/main">
               <a:ext uri="{FF2B5EF4-FFF2-40B4-BE49-F238E27FC236}">
-                <a16:creationId xmlns:a16="http://schemas.microsoft.com/office/drawing/2014/main" id="{D8EBB7A1-55DD-4E0A-9A3C-204D515176F2}"/>
+                <a16:creationId xmlns:a16="http://schemas.microsoft.com/office/drawing/2014/main" id="{FB11728F-D638-478A-92C7-783D73D43F34}"/>
               </a:ext>
             </a:extLst>
           </p:cNvPr>
@@ -13014,7 +13014,7 @@
           <p:nvPr/>
         </p:nvPicPr>
         <p:blipFill>
-          <a:blip xmlns:r="http://schemas.openxmlformats.org/officeDocument/2006/relationships" xmlns:a="http://schemas.openxmlformats.org/drawingml/2006/main" r:embed="Ra890ff16f95b4201"/>
+          <a:blip xmlns:r="http://schemas.openxmlformats.org/officeDocument/2006/relationships" xmlns:a="http://schemas.openxmlformats.org/drawingml/2006/main" r:embed="R2bb58eaf2a4d4086"/>
           <a:stretch xmlns:a="http://schemas.openxmlformats.org/drawingml/2006/main"/>
         </p:blipFill>
         <p:spPr>
@@ -13032,7 +13032,7 @@
           <p:cNvPr id="4" name="">
             <a:extLst xmlns:a="http://schemas.openxmlformats.org/drawingml/2006/main">
               <a:ext uri="{FF2B5EF4-FFF2-40B4-BE49-F238E27FC236}">
-                <a16:creationId xmlns:a16="http://schemas.microsoft.com/office/drawing/2014/main" id="{4AE36465-7FAE-484D-B039-D3C099B1837E}"/>
+                <a16:creationId xmlns:a16="http://schemas.microsoft.com/office/drawing/2014/main" id="{F360FD90-A8B6-462B-A9EA-9F37EB53D9EB}"/>
               </a:ext>
             </a:extLst>
           </p:cNvPr>
@@ -13188,7 +13188,7 @@
           <p:cNvPr id="5" name="">
             <a:extLst xmlns:a="http://schemas.openxmlformats.org/drawingml/2006/main">
               <a:ext uri="{FF2B5EF4-FFF2-40B4-BE49-F238E27FC236}">
-                <a16:creationId xmlns:a16="http://schemas.microsoft.com/office/drawing/2014/main" id="{37E42981-700F-409F-8BF5-F0F41A110CDF}"/>
+                <a16:creationId xmlns:a16="http://schemas.microsoft.com/office/drawing/2014/main" id="{68E1CE07-E1C0-4318-AC47-4CC29F484592}"/>
               </a:ext>
             </a:extLst>
           </p:cNvPr>
@@ -13390,7 +13390,7 @@
           <p:cNvPr id="6" name="">
             <a:extLst xmlns:a="http://schemas.openxmlformats.org/drawingml/2006/main">
               <a:ext uri="{FF2B5EF4-FFF2-40B4-BE49-F238E27FC236}">
-                <a16:creationId xmlns:a16="http://schemas.microsoft.com/office/drawing/2014/main" id="{E93A5353-F0D5-4E04-BA29-F7BB2E4C3996}"/>
+                <a16:creationId xmlns:a16="http://schemas.microsoft.com/office/drawing/2014/main" id="{0CCCD929-976D-4CA8-8380-008987364383}"/>
               </a:ext>
             </a:extLst>
           </p:cNvPr>
@@ -13544,7 +13544,7 @@
     </p:spTree>
     <p:extLst>
       <p:ext uri="{BB962C8B-B14F-4D97-AF65-F5344CB8AC3E}">
-        <p14:creationId xmlns:p14="http://schemas.microsoft.com/office/powerpoint/2010/main" val="116706833"/>
+        <p14:creationId xmlns:p14="http://schemas.microsoft.com/office/powerpoint/2010/main" val="1136594022"/>
       </p:ext>
     </p:extLst>
   </p:cSld>
@@ -13575,7 +13575,7 @@
           <p:cNvPr id="6" name="">
             <a:extLst xmlns:a="http://schemas.openxmlformats.org/drawingml/2006/main">
               <a:ext uri="{FF2B5EF4-FFF2-40B4-BE49-F238E27FC236}">
-                <a16:creationId xmlns:a16="http://schemas.microsoft.com/office/drawing/2014/main" id="{81A878B6-8C78-4634-A16C-3A9B846F5273}"/>
+                <a16:creationId xmlns:a16="http://schemas.microsoft.com/office/drawing/2014/main" id="{D3BB5621-418E-40AF-882B-5B2BE4D985B3}"/>
               </a:ext>
             </a:extLst>
           </p:cNvPr>
@@ -13731,7 +13731,7 @@
           <p:cNvPr id="2" name="">
             <a:extLst xmlns:a="http://schemas.openxmlformats.org/drawingml/2006/main">
               <a:ext uri="{FF2B5EF4-FFF2-40B4-BE49-F238E27FC236}">
-                <a16:creationId xmlns:a16="http://schemas.microsoft.com/office/drawing/2014/main" id="{2F45FA41-D1C9-4CC1-ACBB-2D4FBDB8B902}"/>
+                <a16:creationId xmlns:a16="http://schemas.microsoft.com/office/drawing/2014/main" id="{2F1CC503-60FC-4483-9578-941F4CA606FA}"/>
               </a:ext>
             </a:extLst>
           </p:cNvPr>
@@ -13887,7 +13887,7 @@
           <p:cNvPr id="3" name="">
             <a:extLst xmlns:a="http://schemas.openxmlformats.org/drawingml/2006/main">
               <a:ext uri="{FF2B5EF4-FFF2-40B4-BE49-F238E27FC236}">
-                <a16:creationId xmlns:a16="http://schemas.microsoft.com/office/drawing/2014/main" id="{4EC41522-3DC6-4019-80F1-E395BF48E16D}"/>
+                <a16:creationId xmlns:a16="http://schemas.microsoft.com/office/drawing/2014/main" id="{2D5939CB-6185-4BC9-B560-CCC9D6E4FCFE}"/>
               </a:ext>
             </a:extLst>
           </p:cNvPr>
@@ -14407,7 +14407,7 @@
           <p:cNvPr id="4" name="">
             <a:extLst xmlns:a="http://schemas.openxmlformats.org/drawingml/2006/main">
               <a:ext uri="{FF2B5EF4-FFF2-40B4-BE49-F238E27FC236}">
-                <a16:creationId xmlns:a16="http://schemas.microsoft.com/office/drawing/2014/main" id="{61BF3AEF-BBF3-4232-B0AC-3E315CCE6C8F}"/>
+                <a16:creationId xmlns:a16="http://schemas.microsoft.com/office/drawing/2014/main" id="{58898982-D4B9-4B34-85CE-727F0AF21234}"/>
               </a:ext>
             </a:extLst>
           </p:cNvPr>
@@ -14609,7 +14609,7 @@
           <p:cNvPr id="5" name="">
             <a:extLst xmlns:a="http://schemas.openxmlformats.org/drawingml/2006/main">
               <a:ext uri="{FF2B5EF4-FFF2-40B4-BE49-F238E27FC236}">
-                <a16:creationId xmlns:a16="http://schemas.microsoft.com/office/drawing/2014/main" id="{0D235ED3-3B20-40D6-94C5-48138F4DCFA7}"/>
+                <a16:creationId xmlns:a16="http://schemas.microsoft.com/office/drawing/2014/main" id="{EE016BE0-13EC-4A8B-879A-EBFF71153817}"/>
               </a:ext>
             </a:extLst>
           </p:cNvPr>
@@ -14763,7 +14763,7 @@
     </p:spTree>
     <p:extLst>
       <p:ext uri="{BB962C8B-B14F-4D97-AF65-F5344CB8AC3E}">
-        <p14:creationId xmlns:p14="http://schemas.microsoft.com/office/powerpoint/2010/main" val="1871474688"/>
+        <p14:creationId xmlns:p14="http://schemas.microsoft.com/office/powerpoint/2010/main" val="399222619"/>
       </p:ext>
     </p:extLst>
   </p:cSld>
@@ -14794,7 +14794,7 @@
           <p:cNvPr id="6" name="">
             <a:extLst xmlns:a="http://schemas.openxmlformats.org/drawingml/2006/main">
               <a:ext uri="{FF2B5EF4-FFF2-40B4-BE49-F238E27FC236}">
-                <a16:creationId xmlns:a16="http://schemas.microsoft.com/office/drawing/2014/main" id="{CBF9A265-8D4C-4BB6-A2A6-940E8C85C410}"/>
+                <a16:creationId xmlns:a16="http://schemas.microsoft.com/office/drawing/2014/main" id="{31A1EF71-5BBC-4210-817D-7FF574776E93}"/>
               </a:ext>
             </a:extLst>
           </p:cNvPr>
@@ -14950,7 +14950,7 @@
           <p:cNvPr id="2" name="">
             <a:extLst xmlns:a="http://schemas.openxmlformats.org/drawingml/2006/main">
               <a:ext uri="{FF2B5EF4-FFF2-40B4-BE49-F238E27FC236}">
-                <a16:creationId xmlns:a16="http://schemas.microsoft.com/office/drawing/2014/main" id="{C4474E7B-F070-4656-A70C-583346784D09}"/>
+                <a16:creationId xmlns:a16="http://schemas.microsoft.com/office/drawing/2014/main" id="{7A97F38C-B846-4697-A157-1333FA907DFC}"/>
               </a:ext>
             </a:extLst>
           </p:cNvPr>
@@ -15106,7 +15106,7 @@
           <p:cNvPr id="3" name="">
             <a:extLst xmlns:a="http://schemas.openxmlformats.org/drawingml/2006/main">
               <a:ext uri="{FF2B5EF4-FFF2-40B4-BE49-F238E27FC236}">
-                <a16:creationId xmlns:a16="http://schemas.microsoft.com/office/drawing/2014/main" id="{79DEA0FF-F13B-45A7-80FB-776C233B9E9C}"/>
+                <a16:creationId xmlns:a16="http://schemas.microsoft.com/office/drawing/2014/main" id="{22D2850A-9998-472E-B1A8-5C549DCAF66F}"/>
               </a:ext>
             </a:extLst>
           </p:cNvPr>
@@ -15317,7 +15317,7 @@
                           <a:ea typeface="Arial"/>
                           <a:cs typeface="Arial"/>
                         </a:rPr>
-                        <a:t>630.4</a:t>
+                        <a:t>1068.3</a:t>
                       </a:r>
                     </a:p>
                   </a:txBody>
@@ -15353,7 +15353,7 @@
                           <a:ea typeface="Arial"/>
                           <a:cs typeface="Arial"/>
                         </a:rPr>
-                        <a:t>4.39 ms</a:t>
+                        <a:t>1.32 ms</a:t>
                       </a:r>
                     </a:p>
                   </a:txBody>
@@ -15433,7 +15433,7 @@
                           <a:ea typeface="Arial"/>
                           <a:cs typeface="Arial"/>
                         </a:rPr>
-                        <a:t>757.6</a:t>
+                        <a:t>699.0</a:t>
                       </a:r>
                     </a:p>
                   </a:txBody>
@@ -15469,7 +15469,7 @@
                           <a:ea typeface="Arial"/>
                           <a:cs typeface="Arial"/>
                         </a:rPr>
-                        <a:t>3.36 ms</a:t>
+                        <a:t>2.44 ms</a:t>
                       </a:r>
                     </a:p>
                   </a:txBody>
@@ -15549,7 +15549,7 @@
                           <a:ea typeface="Arial"/>
                           <a:cs typeface="Arial"/>
                         </a:rPr>
-                        <a:t>1008.8</a:t>
+                        <a:t>929.9</a:t>
                       </a:r>
                     </a:p>
                   </a:txBody>
@@ -15585,7 +15585,7 @@
                           <a:ea typeface="Arial"/>
                           <a:cs typeface="Arial"/>
                         </a:rPr>
-                        <a:t>2.89 ms</a:t>
+                        <a:t>1.76 ms</a:t>
                       </a:r>
                     </a:p>
                   </a:txBody>
@@ -15617,7 +15617,7 @@
           <p:cNvPr id="4" name="">
             <a:extLst xmlns:a="http://schemas.openxmlformats.org/drawingml/2006/main">
               <a:ext uri="{FF2B5EF4-FFF2-40B4-BE49-F238E27FC236}">
-                <a16:creationId xmlns:a16="http://schemas.microsoft.com/office/drawing/2014/main" id="{4F079040-C390-4266-8B04-351E5672EF4D}"/>
+                <a16:creationId xmlns:a16="http://schemas.microsoft.com/office/drawing/2014/main" id="{739953BC-A573-4810-B85E-C3B7238852B6}"/>
               </a:ext>
             </a:extLst>
           </p:cNvPr>
@@ -15796,7 +15796,7 @@
           <p:cNvPr id="5" name="">
             <a:extLst xmlns:a="http://schemas.openxmlformats.org/drawingml/2006/main">
               <a:ext uri="{FF2B5EF4-FFF2-40B4-BE49-F238E27FC236}">
-                <a16:creationId xmlns:a16="http://schemas.microsoft.com/office/drawing/2014/main" id="{A7E0061B-F5DF-4F90-982A-69B28DB323D8}"/>
+                <a16:creationId xmlns:a16="http://schemas.microsoft.com/office/drawing/2014/main" id="{3B54F80D-C8B1-49DC-B3DA-04F84E20A927}"/>
               </a:ext>
             </a:extLst>
           </p:cNvPr>
@@ -15950,7 +15950,7 @@
     </p:spTree>
     <p:extLst>
       <p:ext uri="{BB962C8B-B14F-4D97-AF65-F5344CB8AC3E}">
-        <p14:creationId xmlns:p14="http://schemas.microsoft.com/office/powerpoint/2010/main" val="1434682745"/>
+        <p14:creationId xmlns:p14="http://schemas.microsoft.com/office/powerpoint/2010/main" val="1161758498"/>
       </p:ext>
     </p:extLst>
   </p:cSld>

--- a/output/Baikonur_Presentation.pptx
+++ b/output/Baikonur_Presentation.pptx
@@ -2,22 +2,22 @@
 <file path=ppt/presentation.xml><?xml version="1.0" encoding="utf-8"?>
 <p:presentation xmlns:p="http://schemas.openxmlformats.org/presentationml/2006/main">
   <p:sldMasterIdLst>
-    <p:sldMasterId xmlns:r="http://schemas.openxmlformats.org/officeDocument/2006/relationships" id="2147483648" r:id="Rc8a4e3a562644c46"/>
+    <p:sldMasterId xmlns:r="http://schemas.openxmlformats.org/officeDocument/2006/relationships" id="2147483648" r:id="R994134b0b41c4c3f"/>
   </p:sldMasterIdLst>
   <p:notesMasterIdLst>
-    <p:notesMasterId xmlns:r="http://schemas.openxmlformats.org/officeDocument/2006/relationships" r:id="Rbc83ee10efcb47f2"/>
+    <p:notesMasterId xmlns:r="http://schemas.openxmlformats.org/officeDocument/2006/relationships" r:id="Rffc2dc4dd7f14bdc"/>
   </p:notesMasterIdLst>
   <p:sldIdLst>
-    <p:sldId xmlns:r="http://schemas.openxmlformats.org/officeDocument/2006/relationships" id="256" r:id="R57c89145b6b547e7"/>
-    <p:sldId xmlns:r="http://schemas.openxmlformats.org/officeDocument/2006/relationships" id="257" r:id="R4db8a6633c294fb1"/>
-    <p:sldId xmlns:r="http://schemas.openxmlformats.org/officeDocument/2006/relationships" id="258" r:id="R0cab8e2da56e47c7"/>
-    <p:sldId xmlns:r="http://schemas.openxmlformats.org/officeDocument/2006/relationships" id="259" r:id="Rb36880a5394642cc"/>
-    <p:sldId xmlns:r="http://schemas.openxmlformats.org/officeDocument/2006/relationships" id="260" r:id="Rb7cf2302578c43c8"/>
-    <p:sldId xmlns:r="http://schemas.openxmlformats.org/officeDocument/2006/relationships" id="261" r:id="Re81f8cf0c50f493f"/>
-    <p:sldId xmlns:r="http://schemas.openxmlformats.org/officeDocument/2006/relationships" id="262" r:id="Re4e51b9d10b04063"/>
-    <p:sldId xmlns:r="http://schemas.openxmlformats.org/officeDocument/2006/relationships" id="263" r:id="R4d6cd408cee148c7"/>
-    <p:sldId xmlns:r="http://schemas.openxmlformats.org/officeDocument/2006/relationships" id="264" r:id="R4b24af1f045d489f"/>
-    <p:sldId xmlns:r="http://schemas.openxmlformats.org/officeDocument/2006/relationships" id="265" r:id="R165d1726ebf44d19"/>
+    <p:sldId xmlns:r="http://schemas.openxmlformats.org/officeDocument/2006/relationships" id="256" r:id="R6b3fefe0ec8b49b3"/>
+    <p:sldId xmlns:r="http://schemas.openxmlformats.org/officeDocument/2006/relationships" id="257" r:id="R5f291ce9021e462a"/>
+    <p:sldId xmlns:r="http://schemas.openxmlformats.org/officeDocument/2006/relationships" id="258" r:id="R228af0ba4e9c48a6"/>
+    <p:sldId xmlns:r="http://schemas.openxmlformats.org/officeDocument/2006/relationships" id="259" r:id="Ra8630004514a45bb"/>
+    <p:sldId xmlns:r="http://schemas.openxmlformats.org/officeDocument/2006/relationships" id="260" r:id="R06220f27ead2479b"/>
+    <p:sldId xmlns:r="http://schemas.openxmlformats.org/officeDocument/2006/relationships" id="261" r:id="R78d79552c2384093"/>
+    <p:sldId xmlns:r="http://schemas.openxmlformats.org/officeDocument/2006/relationships" id="262" r:id="R5e5bef959db64d77"/>
+    <p:sldId xmlns:r="http://schemas.openxmlformats.org/officeDocument/2006/relationships" id="263" r:id="Re3395632d3a4446c"/>
+    <p:sldId xmlns:r="http://schemas.openxmlformats.org/officeDocument/2006/relationships" id="264" r:id="R8ed59548c50f466a"/>
+    <p:sldId xmlns:r="http://schemas.openxmlformats.org/officeDocument/2006/relationships" id="265" r:id="Re7b26a80b2de41be"/>
   </p:sldIdLst>
   <p:sldSz cx="12192000" cy="6858000"/>
   <p:notesSz cx="6858000" cy="9144000"/>
@@ -521,7 +521,7 @@
           <a:lstStyle xmlns:a="http://schemas.openxmlformats.org/drawingml/2006/main"/>
           <a:p xmlns:a="http://schemas.openxmlformats.org/drawingml/2006/main">
             <a:r>
-              <a:t>Suggested presenter: Talant. Target: 45 seconds. State the limits honestly: visual rocket timing, flat terrain, no collision solver, no shadow mapping and no physical combustion. Future graphics work should be profiled incrementally. Explicitly acknowledge substantial OpenAI Codex assistance in code and writing, recorded in README and report. Team members must confirm actual contributions, make genuine review commits and understand the code. End by introducing the 3 minute 20 second video. Sources: report Sections 7 and 9; comparison with curl-noise [10] and atmosphere [12]-[14].</a:t>
+              <a:t>Suggested presenter: Talant. Target: 45 seconds. State the limits honestly: visual rocket timing, a simplified Kazakhstan boundary with a flat terrain top, no collision solver, no shadow mapping and no physical combustion. Future graphics work should be profiled incrementally. Explicitly acknowledge substantial OpenAI Codex assistance in code and writing, recorded in README and report. Team members must confirm actual contributions, make genuine review commits and understand the code. End by introducing the 3 minute 20 second video. Sources: report Sections 7 and 9; comparison with curl-noise [10] and atmosphere [12]-[14].</a:t>
             </a:r>
           </a:p>
         </p:txBody>
@@ -592,6 +592,11 @@
           <a:p xmlns:a="http://schemas.openxmlformats.org/drawingml/2006/main">
             <a:r>
               <a:t>Suggested presenter: Akbope. Target: 50 seconds. Explain the problem: coordinate several graphics systems while preserving a responsive scene. There are more than five distinct object types, including pad, rocket, gantry, buildings, tanks and radome. R1–R8 guide the implementation. All three topic stretch features are present. The source and libraries are bundled. R7 performance on the TA machine and R8 exact course-setup compatibility still require team verification. Source: supplied final brief and topics; screenshot docs/evidence/day.png.</a:t>
+            </a:r>
+          </a:p>
+          <a:p xmlns:a="http://schemas.openxmlformats.org/drawingml/2006/main">
+            <a:r>
+              <a:t>Current terrain uses the public-domain Natural Earth Kazakhstan boundary, projected around Baikonur and ear-clipped into a solid mesh. The site adds a hangar, pipework, railway, vehicles and steppe detail. Sources: src/Kazakhstan.cpp, src/Environment.cpp, tools/generate_kazakhstan.py and CREDITS.md.</a:t>
             </a:r>
           </a:p>
         </p:txBody>
@@ -1084,6 +1089,11 @@
               <a:t>Suggested presenter: Talant. Target: 60 seconds. Explain measurement conditions before quoting values. Mean FPS is measured frame-loop throughput, not a GPU timer. p95 is the 95th percentile of frame duration, so lower is better. Raw CSVs accompany the submission. A ready-scene frame outlier occurred during the local run; report does not claim a strict all-frame minimum. Tests check timing, reset, pause, frame-rate consistency and detachment continuity. Local OpenGL checks reported zero errors. Repeat the test on the actual TA machine. Source: docs/evidence/metrics.json and raw CSV/log files.</a:t>
             </a:r>
           </a:p>
+          <a:p xmlns:a="http://schemas.openxmlformats.org/drawingml/2006/main">
+            <a:r>
+              <a:t>Updated measurements include the Kazakhstan terrain and detailed scenery. Two CTest targets now pass: mission invariants and terrain topology. Linux/macOS/Windows CI checks compilation and numerical tests; graphics performance still needs the TA machine.</a:t>
+            </a:r>
+          </a:p>
         </p:txBody>
       </p:sp>
       <p:sp>
@@ -3524,12 +3534,12 @@
   </p:cSld>
   <p:clrMap bg1="lt1" tx1="dk1" bg2="lt2" tx2="dk2" accent1="accent1" accent2="accent2" accent3="accent3" accent4="accent4" accent5="accent5" accent6="accent6" hlink="hlink" folHlink="folHlink"/>
   <p:sldLayoutIdLst>
-    <p:sldLayoutId xmlns:r="http://schemas.openxmlformats.org/officeDocument/2006/relationships" id="2147483649" r:id="R770a0b6d5e554bd3"/>
-    <p:sldLayoutId xmlns:r="http://schemas.openxmlformats.org/officeDocument/2006/relationships" id="2147483650" r:id="R3c3520526f924b43"/>
-    <p:sldLayoutId xmlns:r="http://schemas.openxmlformats.org/officeDocument/2006/relationships" id="2147483651" r:id="Rde9603947b7e4035"/>
-    <p:sldLayoutId xmlns:r="http://schemas.openxmlformats.org/officeDocument/2006/relationships" id="2147483652" r:id="Rf929463a5f1746dd"/>
-    <p:sldLayoutId xmlns:r="http://schemas.openxmlformats.org/officeDocument/2006/relationships" id="2147483653" r:id="R0fa37f43999243dd"/>
-    <p:sldLayoutId xmlns:r="http://schemas.openxmlformats.org/officeDocument/2006/relationships" id="2147483654" r:id="R751fb2dfa0e447e2"/>
+    <p:sldLayoutId xmlns:r="http://schemas.openxmlformats.org/officeDocument/2006/relationships" id="2147483649" r:id="R1d7b49bc7d3c4a8e"/>
+    <p:sldLayoutId xmlns:r="http://schemas.openxmlformats.org/officeDocument/2006/relationships" id="2147483650" r:id="R38f1c717894749e0"/>
+    <p:sldLayoutId xmlns:r="http://schemas.openxmlformats.org/officeDocument/2006/relationships" id="2147483651" r:id="Rbe36c1a9063b4f49"/>
+    <p:sldLayoutId xmlns:r="http://schemas.openxmlformats.org/officeDocument/2006/relationships" id="2147483652" r:id="R69ce12562bf94096"/>
+    <p:sldLayoutId xmlns:r="http://schemas.openxmlformats.org/officeDocument/2006/relationships" id="2147483653" r:id="R5bc8d271cd014686"/>
+    <p:sldLayoutId xmlns:r="http://schemas.openxmlformats.org/officeDocument/2006/relationships" id="2147483654" r:id="R61f89d95af8349bb"/>
   </p:sldLayoutIdLst>
   <p:txStyles>
     <p:titleStyle>
@@ -4116,6 +4126,7 @@
               </a:defRPr>
             </a:defPPr>
             <a:lvl1pPr>
+              <a:buNone/>
               <a:defRPr sz="4350" b="1">
                 <a:solidFill>
                   <a:srgbClr val="E8F0ED"/>
@@ -4126,6 +4137,7 @@
               </a:defRPr>
             </a:lvl1pPr>
             <a:lvl2pPr>
+              <a:buNone/>
               <a:defRPr sz="4350" b="1">
                 <a:solidFill>
                   <a:srgbClr val="E8F0ED"/>
@@ -4136,6 +4148,7 @@
               </a:defRPr>
             </a:lvl2pPr>
             <a:lvl3pPr>
+              <a:buNone/>
               <a:defRPr sz="4350" b="1">
                 <a:solidFill>
                   <a:srgbClr val="E8F0ED"/>
@@ -4146,6 +4159,7 @@
               </a:defRPr>
             </a:lvl3pPr>
             <a:lvl4pPr>
+              <a:buNone/>
               <a:defRPr sz="4350" b="1">
                 <a:solidFill>
                   <a:srgbClr val="E8F0ED"/>
@@ -4156,6 +4170,7 @@
               </a:defRPr>
             </a:lvl4pPr>
             <a:lvl5pPr>
+              <a:buNone/>
               <a:defRPr sz="4350" b="1">
                 <a:solidFill>
                   <a:srgbClr val="E8F0ED"/>
@@ -4166,6 +4181,7 @@
               </a:defRPr>
             </a:lvl5pPr>
             <a:lvl6pPr>
+              <a:buNone/>
               <a:defRPr sz="4350" b="1">
                 <a:solidFill>
                   <a:srgbClr val="E8F0ED"/>
@@ -4176,6 +4192,7 @@
               </a:defRPr>
             </a:lvl6pPr>
             <a:lvl7pPr>
+              <a:buNone/>
               <a:defRPr sz="4350" b="1">
                 <a:solidFill>
                   <a:srgbClr val="E8F0ED"/>
@@ -4186,6 +4203,7 @@
               </a:defRPr>
             </a:lvl7pPr>
             <a:lvl8pPr>
+              <a:buNone/>
               <a:defRPr sz="4350" b="1">
                 <a:solidFill>
                   <a:srgbClr val="E8F0ED"/>
@@ -4196,6 +4214,7 @@
               </a:defRPr>
             </a:lvl8pPr>
             <a:lvl9pPr>
+              <a:buNone/>
               <a:defRPr sz="4350" b="1">
                 <a:solidFill>
                   <a:srgbClr val="E8F0ED"/>
@@ -4208,6 +4227,7 @@
           </a:lstStyle>
           <a:p xmlns:a="http://schemas.openxmlformats.org/drawingml/2006/main">
             <a:pPr>
+              <a:buNone/>
               <a:defRPr sz="4350" b="1">
                 <a:solidFill>
                   <a:srgbClr val="E8F0ED"/>
@@ -4272,6 +4292,7 @@
               </a:defRPr>
             </a:defPPr>
             <a:lvl1pPr>
+              <a:buNone/>
               <a:defRPr sz="1350" b="0">
                 <a:solidFill>
                   <a:srgbClr val="A4B8BE"/>
@@ -4282,6 +4303,7 @@
               </a:defRPr>
             </a:lvl1pPr>
             <a:lvl2pPr>
+              <a:buNone/>
               <a:defRPr sz="1350" b="0">
                 <a:solidFill>
                   <a:srgbClr val="A4B8BE"/>
@@ -4292,6 +4314,7 @@
               </a:defRPr>
             </a:lvl2pPr>
             <a:lvl3pPr>
+              <a:buNone/>
               <a:defRPr sz="1350" b="0">
                 <a:solidFill>
                   <a:srgbClr val="A4B8BE"/>
@@ -4302,6 +4325,7 @@
               </a:defRPr>
             </a:lvl3pPr>
             <a:lvl4pPr>
+              <a:buNone/>
               <a:defRPr sz="1350" b="0">
                 <a:solidFill>
                   <a:srgbClr val="A4B8BE"/>
@@ -4312,6 +4336,7 @@
               </a:defRPr>
             </a:lvl4pPr>
             <a:lvl5pPr>
+              <a:buNone/>
               <a:defRPr sz="1350" b="0">
                 <a:solidFill>
                   <a:srgbClr val="A4B8BE"/>
@@ -4322,6 +4347,7 @@
               </a:defRPr>
             </a:lvl5pPr>
             <a:lvl6pPr>
+              <a:buNone/>
               <a:defRPr sz="1350" b="0">
                 <a:solidFill>
                   <a:srgbClr val="A4B8BE"/>
@@ -4332,6 +4358,7 @@
               </a:defRPr>
             </a:lvl6pPr>
             <a:lvl7pPr>
+              <a:buNone/>
               <a:defRPr sz="1350" b="0">
                 <a:solidFill>
                   <a:srgbClr val="A4B8BE"/>
@@ -4342,6 +4369,7 @@
               </a:defRPr>
             </a:lvl7pPr>
             <a:lvl8pPr>
+              <a:buNone/>
               <a:defRPr sz="1350" b="0">
                 <a:solidFill>
                   <a:srgbClr val="A4B8BE"/>
@@ -4352,6 +4380,7 @@
               </a:defRPr>
             </a:lvl8pPr>
             <a:lvl9pPr>
+              <a:buNone/>
               <a:defRPr sz="1350" b="0">
                 <a:solidFill>
                   <a:srgbClr val="A4B8BE"/>
@@ -4364,6 +4393,7 @@
           </a:lstStyle>
           <a:p xmlns:a="http://schemas.openxmlformats.org/drawingml/2006/main">
             <a:pPr>
+              <a:buNone/>
               <a:defRPr sz="1350" b="0">
                 <a:solidFill>
                   <a:srgbClr val="A4B8BE"/>
@@ -4428,6 +4458,7 @@
               </a:defRPr>
             </a:defPPr>
             <a:lvl1pPr>
+              <a:buNone/>
               <a:defRPr sz="2175" b="0">
                 <a:solidFill>
                   <a:srgbClr val="67D1BE"/>
@@ -4438,6 +4469,7 @@
               </a:defRPr>
             </a:lvl1pPr>
             <a:lvl2pPr>
+              <a:buNone/>
               <a:defRPr sz="2175" b="0">
                 <a:solidFill>
                   <a:srgbClr val="67D1BE"/>
@@ -4448,6 +4480,7 @@
               </a:defRPr>
             </a:lvl2pPr>
             <a:lvl3pPr>
+              <a:buNone/>
               <a:defRPr sz="2175" b="0">
                 <a:solidFill>
                   <a:srgbClr val="67D1BE"/>
@@ -4458,6 +4491,7 @@
               </a:defRPr>
             </a:lvl3pPr>
             <a:lvl4pPr>
+              <a:buNone/>
               <a:defRPr sz="2175" b="0">
                 <a:solidFill>
                   <a:srgbClr val="67D1BE"/>
@@ -4468,6 +4502,7 @@
               </a:defRPr>
             </a:lvl4pPr>
             <a:lvl5pPr>
+              <a:buNone/>
               <a:defRPr sz="2175" b="0">
                 <a:solidFill>
                   <a:srgbClr val="67D1BE"/>
@@ -4478,6 +4513,7 @@
               </a:defRPr>
             </a:lvl5pPr>
             <a:lvl6pPr>
+              <a:buNone/>
               <a:defRPr sz="2175" b="0">
                 <a:solidFill>
                   <a:srgbClr val="67D1BE"/>
@@ -4488,6 +4524,7 @@
               </a:defRPr>
             </a:lvl6pPr>
             <a:lvl7pPr>
+              <a:buNone/>
               <a:defRPr sz="2175" b="0">
                 <a:solidFill>
                   <a:srgbClr val="67D1BE"/>
@@ -4498,6 +4535,7 @@
               </a:defRPr>
             </a:lvl7pPr>
             <a:lvl8pPr>
+              <a:buNone/>
               <a:defRPr sz="2175" b="0">
                 <a:solidFill>
                   <a:srgbClr val="67D1BE"/>
@@ -4508,6 +4546,7 @@
               </a:defRPr>
             </a:lvl8pPr>
             <a:lvl9pPr>
+              <a:buNone/>
               <a:defRPr sz="2175" b="0">
                 <a:solidFill>
                   <a:srgbClr val="67D1BE"/>
@@ -4520,6 +4559,7 @@
           </a:lstStyle>
           <a:p xmlns:a="http://schemas.openxmlformats.org/drawingml/2006/main">
             <a:pPr>
+              <a:buNone/>
               <a:defRPr sz="2175" b="0">
                 <a:solidFill>
                   <a:srgbClr val="67D1BE"/>
@@ -4548,7 +4588,7 @@
           <p:cNvPr id="4" name="">
             <a:extLst xmlns:a="http://schemas.openxmlformats.org/drawingml/2006/main">
               <a:ext uri="{FF2B5EF4-FFF2-40B4-BE49-F238E27FC236}">
-                <a16:creationId xmlns:a16="http://schemas.microsoft.com/office/drawing/2014/main" id="{89931DDA-5BCF-4636-86B0-7DCD02022D1E}"/>
+                <a16:creationId xmlns:a16="http://schemas.microsoft.com/office/drawing/2014/main" id="{838D6CE3-0A3B-4387-990F-870C2E3B6A94}"/>
               </a:ext>
             </a:extLst>
           </p:cNvPr>
@@ -4558,7 +4598,7 @@
           <p:nvPr/>
         </p:nvPicPr>
         <p:blipFill>
-          <a:blip xmlns:r="http://schemas.openxmlformats.org/officeDocument/2006/relationships" xmlns:a="http://schemas.openxmlformats.org/drawingml/2006/main" r:embed="Rdf37e5ed3ff840a7"/>
+          <a:blip xmlns:r="http://schemas.openxmlformats.org/officeDocument/2006/relationships" xmlns:a="http://schemas.openxmlformats.org/drawingml/2006/main" r:embed="R3d9f4050803a430e"/>
           <a:stretch xmlns:a="http://schemas.openxmlformats.org/drawingml/2006/main"/>
         </p:blipFill>
         <p:spPr>
@@ -4612,6 +4652,7 @@
               </a:defRPr>
             </a:defPPr>
             <a:lvl1pPr>
+              <a:buNone/>
               <a:defRPr sz="1950" b="0">
                 <a:solidFill>
                   <a:srgbClr val="E8F0ED"/>
@@ -4622,6 +4663,7 @@
               </a:defRPr>
             </a:lvl1pPr>
             <a:lvl2pPr>
+              <a:buNone/>
               <a:defRPr sz="1950" b="0">
                 <a:solidFill>
                   <a:srgbClr val="E8F0ED"/>
@@ -4632,6 +4674,7 @@
               </a:defRPr>
             </a:lvl2pPr>
             <a:lvl3pPr>
+              <a:buNone/>
               <a:defRPr sz="1950" b="0">
                 <a:solidFill>
                   <a:srgbClr val="E8F0ED"/>
@@ -4642,6 +4685,7 @@
               </a:defRPr>
             </a:lvl3pPr>
             <a:lvl4pPr>
+              <a:buNone/>
               <a:defRPr sz="1950" b="0">
                 <a:solidFill>
                   <a:srgbClr val="E8F0ED"/>
@@ -4652,6 +4696,7 @@
               </a:defRPr>
             </a:lvl4pPr>
             <a:lvl5pPr>
+              <a:buNone/>
               <a:defRPr sz="1950" b="0">
                 <a:solidFill>
                   <a:srgbClr val="E8F0ED"/>
@@ -4662,6 +4707,7 @@
               </a:defRPr>
             </a:lvl5pPr>
             <a:lvl6pPr>
+              <a:buNone/>
               <a:defRPr sz="1950" b="0">
                 <a:solidFill>
                   <a:srgbClr val="E8F0ED"/>
@@ -4672,6 +4718,7 @@
               </a:defRPr>
             </a:lvl6pPr>
             <a:lvl7pPr>
+              <a:buNone/>
               <a:defRPr sz="1950" b="0">
                 <a:solidFill>
                   <a:srgbClr val="E8F0ED"/>
@@ -4682,6 +4729,7 @@
               </a:defRPr>
             </a:lvl7pPr>
             <a:lvl8pPr>
+              <a:buNone/>
               <a:defRPr sz="1950" b="0">
                 <a:solidFill>
                   <a:srgbClr val="E8F0ED"/>
@@ -4692,6 +4740,7 @@
               </a:defRPr>
             </a:lvl8pPr>
             <a:lvl9pPr>
+              <a:buNone/>
               <a:defRPr sz="1950" b="0">
                 <a:solidFill>
                   <a:srgbClr val="E8F0ED"/>
@@ -4704,6 +4753,7 @@
           </a:lstStyle>
           <a:p xmlns:a="http://schemas.openxmlformats.org/drawingml/2006/main">
             <a:pPr>
+              <a:buNone/>
               <a:defRPr sz="1950" b="0">
                 <a:solidFill>
                   <a:srgbClr val="E8F0ED"/>
@@ -4727,6 +4777,7 @@
           </a:p>
           <a:p xmlns:a="http://schemas.openxmlformats.org/drawingml/2006/main">
             <a:pPr>
+              <a:buNone/>
               <a:defRPr sz="1950" b="0">
                 <a:solidFill>
                   <a:srgbClr val="E8F0ED"/>
@@ -4750,6 +4801,7 @@
           </a:p>
           <a:p xmlns:a="http://schemas.openxmlformats.org/drawingml/2006/main">
             <a:pPr>
+              <a:buNone/>
               <a:defRPr sz="1950" b="0">
                 <a:solidFill>
                   <a:srgbClr val="E8F0ED"/>
@@ -4773,6 +4825,7 @@
           </a:p>
           <a:p xmlns:a="http://schemas.openxmlformats.org/drawingml/2006/main">
             <a:pPr>
+              <a:buNone/>
               <a:defRPr sz="1950" b="0">
                 <a:solidFill>
                   <a:srgbClr val="E8F0ED"/>
@@ -4837,6 +4890,7 @@
               </a:defRPr>
             </a:defPPr>
             <a:lvl1pPr>
+              <a:buNone/>
               <a:defRPr sz="1725" b="0">
                 <a:solidFill>
                   <a:srgbClr val="A4B8BE"/>
@@ -4847,6 +4901,7 @@
               </a:defRPr>
             </a:lvl1pPr>
             <a:lvl2pPr>
+              <a:buNone/>
               <a:defRPr sz="1725" b="0">
                 <a:solidFill>
                   <a:srgbClr val="A4B8BE"/>
@@ -4857,6 +4912,7 @@
               </a:defRPr>
             </a:lvl2pPr>
             <a:lvl3pPr>
+              <a:buNone/>
               <a:defRPr sz="1725" b="0">
                 <a:solidFill>
                   <a:srgbClr val="A4B8BE"/>
@@ -4867,6 +4923,7 @@
               </a:defRPr>
             </a:lvl3pPr>
             <a:lvl4pPr>
+              <a:buNone/>
               <a:defRPr sz="1725" b="0">
                 <a:solidFill>
                   <a:srgbClr val="A4B8BE"/>
@@ -4877,6 +4934,7 @@
               </a:defRPr>
             </a:lvl4pPr>
             <a:lvl5pPr>
+              <a:buNone/>
               <a:defRPr sz="1725" b="0">
                 <a:solidFill>
                   <a:srgbClr val="A4B8BE"/>
@@ -4887,6 +4945,7 @@
               </a:defRPr>
             </a:lvl5pPr>
             <a:lvl6pPr>
+              <a:buNone/>
               <a:defRPr sz="1725" b="0">
                 <a:solidFill>
                   <a:srgbClr val="A4B8BE"/>
@@ -4897,6 +4956,7 @@
               </a:defRPr>
             </a:lvl6pPr>
             <a:lvl7pPr>
+              <a:buNone/>
               <a:defRPr sz="1725" b="0">
                 <a:solidFill>
                   <a:srgbClr val="A4B8BE"/>
@@ -4907,6 +4967,7 @@
               </a:defRPr>
             </a:lvl7pPr>
             <a:lvl8pPr>
+              <a:buNone/>
               <a:defRPr sz="1725" b="0">
                 <a:solidFill>
                   <a:srgbClr val="A4B8BE"/>
@@ -4917,6 +4978,7 @@
               </a:defRPr>
             </a:lvl8pPr>
             <a:lvl9pPr>
+              <a:buNone/>
               <a:defRPr sz="1725" b="0">
                 <a:solidFill>
                   <a:srgbClr val="A4B8BE"/>
@@ -4929,6 +4991,7 @@
           </a:lstStyle>
           <a:p xmlns:a="http://schemas.openxmlformats.org/drawingml/2006/main">
             <a:pPr>
+              <a:buNone/>
               <a:defRPr sz="1725" b="0">
                 <a:solidFill>
                   <a:srgbClr val="A4B8BE"/>
@@ -4952,6 +5015,7 @@
           </a:p>
           <a:p xmlns:a="http://schemas.openxmlformats.org/drawingml/2006/main">
             <a:pPr>
+              <a:buNone/>
               <a:defRPr sz="1725" b="0">
                 <a:solidFill>
                   <a:srgbClr val="A4B8BE"/>
@@ -5045,6 +5109,7 @@
               </a:defRPr>
             </a:defPPr>
             <a:lvl1pPr>
+              <a:buNone/>
               <a:defRPr sz="3450" b="1">
                 <a:solidFill>
                   <a:srgbClr val="E8F0ED"/>
@@ -5055,6 +5120,7 @@
               </a:defRPr>
             </a:lvl1pPr>
             <a:lvl2pPr>
+              <a:buNone/>
               <a:defRPr sz="3450" b="1">
                 <a:solidFill>
                   <a:srgbClr val="E8F0ED"/>
@@ -5065,6 +5131,7 @@
               </a:defRPr>
             </a:lvl2pPr>
             <a:lvl3pPr>
+              <a:buNone/>
               <a:defRPr sz="3450" b="1">
                 <a:solidFill>
                   <a:srgbClr val="E8F0ED"/>
@@ -5075,6 +5142,7 @@
               </a:defRPr>
             </a:lvl3pPr>
             <a:lvl4pPr>
+              <a:buNone/>
               <a:defRPr sz="3450" b="1">
                 <a:solidFill>
                   <a:srgbClr val="E8F0ED"/>
@@ -5085,6 +5153,7 @@
               </a:defRPr>
             </a:lvl4pPr>
             <a:lvl5pPr>
+              <a:buNone/>
               <a:defRPr sz="3450" b="1">
                 <a:solidFill>
                   <a:srgbClr val="E8F0ED"/>
@@ -5095,6 +5164,7 @@
               </a:defRPr>
             </a:lvl5pPr>
             <a:lvl6pPr>
+              <a:buNone/>
               <a:defRPr sz="3450" b="1">
                 <a:solidFill>
                   <a:srgbClr val="E8F0ED"/>
@@ -5105,6 +5175,7 @@
               </a:defRPr>
             </a:lvl6pPr>
             <a:lvl7pPr>
+              <a:buNone/>
               <a:defRPr sz="3450" b="1">
                 <a:solidFill>
                   <a:srgbClr val="E8F0ED"/>
@@ -5115,6 +5186,7 @@
               </a:defRPr>
             </a:lvl7pPr>
             <a:lvl8pPr>
+              <a:buNone/>
               <a:defRPr sz="3450" b="1">
                 <a:solidFill>
                   <a:srgbClr val="E8F0ED"/>
@@ -5125,6 +5197,7 @@
               </a:defRPr>
             </a:lvl8pPr>
             <a:lvl9pPr>
+              <a:buNone/>
               <a:defRPr sz="3450" b="1">
                 <a:solidFill>
                   <a:srgbClr val="E8F0ED"/>
@@ -5137,6 +5210,7 @@
           </a:lstStyle>
           <a:p xmlns:a="http://schemas.openxmlformats.org/drawingml/2006/main">
             <a:pPr>
+              <a:buNone/>
               <a:defRPr sz="3450" b="1">
                 <a:solidFill>
                   <a:srgbClr val="E8F0ED"/>
@@ -5201,6 +5275,7 @@
               </a:defRPr>
             </a:defPPr>
             <a:lvl1pPr>
+              <a:buNone/>
               <a:defRPr sz="1350" b="0">
                 <a:solidFill>
                   <a:srgbClr val="A4B8BE"/>
@@ -5211,6 +5286,7 @@
               </a:defRPr>
             </a:lvl1pPr>
             <a:lvl2pPr>
+              <a:buNone/>
               <a:defRPr sz="1350" b="0">
                 <a:solidFill>
                   <a:srgbClr val="A4B8BE"/>
@@ -5221,6 +5297,7 @@
               </a:defRPr>
             </a:lvl2pPr>
             <a:lvl3pPr>
+              <a:buNone/>
               <a:defRPr sz="1350" b="0">
                 <a:solidFill>
                   <a:srgbClr val="A4B8BE"/>
@@ -5231,6 +5308,7 @@
               </a:defRPr>
             </a:lvl3pPr>
             <a:lvl4pPr>
+              <a:buNone/>
               <a:defRPr sz="1350" b="0">
                 <a:solidFill>
                   <a:srgbClr val="A4B8BE"/>
@@ -5241,6 +5319,7 @@
               </a:defRPr>
             </a:lvl4pPr>
             <a:lvl5pPr>
+              <a:buNone/>
               <a:defRPr sz="1350" b="0">
                 <a:solidFill>
                   <a:srgbClr val="A4B8BE"/>
@@ -5251,6 +5330,7 @@
               </a:defRPr>
             </a:lvl5pPr>
             <a:lvl6pPr>
+              <a:buNone/>
               <a:defRPr sz="1350" b="0">
                 <a:solidFill>
                   <a:srgbClr val="A4B8BE"/>
@@ -5261,6 +5341,7 @@
               </a:defRPr>
             </a:lvl6pPr>
             <a:lvl7pPr>
+              <a:buNone/>
               <a:defRPr sz="1350" b="0">
                 <a:solidFill>
                   <a:srgbClr val="A4B8BE"/>
@@ -5271,6 +5352,7 @@
               </a:defRPr>
             </a:lvl7pPr>
             <a:lvl8pPr>
+              <a:buNone/>
               <a:defRPr sz="1350" b="0">
                 <a:solidFill>
                   <a:srgbClr val="A4B8BE"/>
@@ -5281,6 +5363,7 @@
               </a:defRPr>
             </a:lvl8pPr>
             <a:lvl9pPr>
+              <a:buNone/>
               <a:defRPr sz="1350" b="0">
                 <a:solidFill>
                   <a:srgbClr val="A4B8BE"/>
@@ -5293,6 +5376,7 @@
           </a:lstStyle>
           <a:p xmlns:a="http://schemas.openxmlformats.org/drawingml/2006/main">
             <a:pPr>
+              <a:buNone/>
               <a:defRPr sz="1350" b="0">
                 <a:solidFill>
                   <a:srgbClr val="A4B8BE"/>
@@ -5357,6 +5441,7 @@
               </a:defRPr>
             </a:defPPr>
             <a:lvl1pPr>
+              <a:buNone/>
               <a:defRPr sz="2700" b="1">
                 <a:solidFill>
                   <a:srgbClr val="67D1BE"/>
@@ -5367,6 +5452,7 @@
               </a:defRPr>
             </a:lvl1pPr>
             <a:lvl2pPr>
+              <a:buNone/>
               <a:defRPr sz="2700" b="1">
                 <a:solidFill>
                   <a:srgbClr val="67D1BE"/>
@@ -5377,6 +5463,7 @@
               </a:defRPr>
             </a:lvl2pPr>
             <a:lvl3pPr>
+              <a:buNone/>
               <a:defRPr sz="2700" b="1">
                 <a:solidFill>
                   <a:srgbClr val="67D1BE"/>
@@ -5387,6 +5474,7 @@
               </a:defRPr>
             </a:lvl3pPr>
             <a:lvl4pPr>
+              <a:buNone/>
               <a:defRPr sz="2700" b="1">
                 <a:solidFill>
                   <a:srgbClr val="67D1BE"/>
@@ -5397,6 +5485,7 @@
               </a:defRPr>
             </a:lvl4pPr>
             <a:lvl5pPr>
+              <a:buNone/>
               <a:defRPr sz="2700" b="1">
                 <a:solidFill>
                   <a:srgbClr val="67D1BE"/>
@@ -5407,6 +5496,7 @@
               </a:defRPr>
             </a:lvl5pPr>
             <a:lvl6pPr>
+              <a:buNone/>
               <a:defRPr sz="2700" b="1">
                 <a:solidFill>
                   <a:srgbClr val="67D1BE"/>
@@ -5417,6 +5507,7 @@
               </a:defRPr>
             </a:lvl6pPr>
             <a:lvl7pPr>
+              <a:buNone/>
               <a:defRPr sz="2700" b="1">
                 <a:solidFill>
                   <a:srgbClr val="67D1BE"/>
@@ -5427,6 +5518,7 @@
               </a:defRPr>
             </a:lvl7pPr>
             <a:lvl8pPr>
+              <a:buNone/>
               <a:defRPr sz="2700" b="1">
                 <a:solidFill>
                   <a:srgbClr val="67D1BE"/>
@@ -5437,6 +5529,7 @@
               </a:defRPr>
             </a:lvl8pPr>
             <a:lvl9pPr>
+              <a:buNone/>
               <a:defRPr sz="2700" b="1">
                 <a:solidFill>
                   <a:srgbClr val="67D1BE"/>
@@ -5449,6 +5542,7 @@
           </a:lstStyle>
           <a:p xmlns:a="http://schemas.openxmlformats.org/drawingml/2006/main">
             <a:pPr>
+              <a:buNone/>
               <a:defRPr sz="2700" b="1">
                 <a:solidFill>
                   <a:srgbClr val="67D1BE"/>
@@ -5513,6 +5607,7 @@
               </a:defRPr>
             </a:defPPr>
             <a:lvl1pPr>
+              <a:buNone/>
               <a:defRPr sz="2250" b="0">
                 <a:solidFill>
                   <a:srgbClr val="E8F0ED"/>
@@ -5523,6 +5618,7 @@
               </a:defRPr>
             </a:lvl1pPr>
             <a:lvl2pPr>
+              <a:buNone/>
               <a:defRPr sz="2250" b="0">
                 <a:solidFill>
                   <a:srgbClr val="E8F0ED"/>
@@ -5533,6 +5629,7 @@
               </a:defRPr>
             </a:lvl2pPr>
             <a:lvl3pPr>
+              <a:buNone/>
               <a:defRPr sz="2250" b="0">
                 <a:solidFill>
                   <a:srgbClr val="E8F0ED"/>
@@ -5543,6 +5640,7 @@
               </a:defRPr>
             </a:lvl3pPr>
             <a:lvl4pPr>
+              <a:buNone/>
               <a:defRPr sz="2250" b="0">
                 <a:solidFill>
                   <a:srgbClr val="E8F0ED"/>
@@ -5553,6 +5651,7 @@
               </a:defRPr>
             </a:lvl4pPr>
             <a:lvl5pPr>
+              <a:buNone/>
               <a:defRPr sz="2250" b="0">
                 <a:solidFill>
                   <a:srgbClr val="E8F0ED"/>
@@ -5563,6 +5662,7 @@
               </a:defRPr>
             </a:lvl5pPr>
             <a:lvl6pPr>
+              <a:buNone/>
               <a:defRPr sz="2250" b="0">
                 <a:solidFill>
                   <a:srgbClr val="E8F0ED"/>
@@ -5573,6 +5673,7 @@
               </a:defRPr>
             </a:lvl6pPr>
             <a:lvl7pPr>
+              <a:buNone/>
               <a:defRPr sz="2250" b="0">
                 <a:solidFill>
                   <a:srgbClr val="E8F0ED"/>
@@ -5583,6 +5684,7 @@
               </a:defRPr>
             </a:lvl7pPr>
             <a:lvl8pPr>
+              <a:buNone/>
               <a:defRPr sz="2250" b="0">
                 <a:solidFill>
                   <a:srgbClr val="E8F0ED"/>
@@ -5593,6 +5695,7 @@
               </a:defRPr>
             </a:lvl8pPr>
             <a:lvl9pPr>
+              <a:buNone/>
               <a:defRPr sz="2250" b="0">
                 <a:solidFill>
                   <a:srgbClr val="E8F0ED"/>
@@ -5605,6 +5708,7 @@
           </a:lstStyle>
           <a:p xmlns:a="http://schemas.openxmlformats.org/drawingml/2006/main">
             <a:pPr>
+              <a:buNone/>
               <a:defRPr sz="2250" b="0">
                 <a:solidFill>
                   <a:srgbClr val="E8F0ED"/>
@@ -5628,6 +5732,7 @@
           </a:p>
           <a:p xmlns:a="http://schemas.openxmlformats.org/drawingml/2006/main">
             <a:pPr>
+              <a:buNone/>
               <a:defRPr sz="2250" b="0">
                 <a:solidFill>
                   <a:srgbClr val="E8F0ED"/>
@@ -5692,6 +5797,7 @@
               </a:defRPr>
             </a:defPPr>
             <a:lvl1pPr>
+              <a:buNone/>
               <a:defRPr sz="2325" b="1">
                 <a:solidFill>
                   <a:srgbClr val="E7A063"/>
@@ -5702,6 +5808,7 @@
               </a:defRPr>
             </a:lvl1pPr>
             <a:lvl2pPr>
+              <a:buNone/>
               <a:defRPr sz="2325" b="1">
                 <a:solidFill>
                   <a:srgbClr val="E7A063"/>
@@ -5712,6 +5819,7 @@
               </a:defRPr>
             </a:lvl2pPr>
             <a:lvl3pPr>
+              <a:buNone/>
               <a:defRPr sz="2325" b="1">
                 <a:solidFill>
                   <a:srgbClr val="E7A063"/>
@@ -5722,6 +5830,7 @@
               </a:defRPr>
             </a:lvl3pPr>
             <a:lvl4pPr>
+              <a:buNone/>
               <a:defRPr sz="2325" b="1">
                 <a:solidFill>
                   <a:srgbClr val="E7A063"/>
@@ -5732,6 +5841,7 @@
               </a:defRPr>
             </a:lvl4pPr>
             <a:lvl5pPr>
+              <a:buNone/>
               <a:defRPr sz="2325" b="1">
                 <a:solidFill>
                   <a:srgbClr val="E7A063"/>
@@ -5742,6 +5852,7 @@
               </a:defRPr>
             </a:lvl5pPr>
             <a:lvl6pPr>
+              <a:buNone/>
               <a:defRPr sz="2325" b="1">
                 <a:solidFill>
                   <a:srgbClr val="E7A063"/>
@@ -5752,6 +5863,7 @@
               </a:defRPr>
             </a:lvl6pPr>
             <a:lvl7pPr>
+              <a:buNone/>
               <a:defRPr sz="2325" b="1">
                 <a:solidFill>
                   <a:srgbClr val="E7A063"/>
@@ -5762,6 +5874,7 @@
               </a:defRPr>
             </a:lvl7pPr>
             <a:lvl8pPr>
+              <a:buNone/>
               <a:defRPr sz="2325" b="1">
                 <a:solidFill>
                   <a:srgbClr val="E7A063"/>
@@ -5772,6 +5885,7 @@
               </a:defRPr>
             </a:lvl8pPr>
             <a:lvl9pPr>
+              <a:buNone/>
               <a:defRPr sz="2325" b="1">
                 <a:solidFill>
                   <a:srgbClr val="E7A063"/>
@@ -5784,6 +5898,7 @@
           </a:lstStyle>
           <a:p xmlns:a="http://schemas.openxmlformats.org/drawingml/2006/main">
             <a:pPr>
+              <a:buNone/>
               <a:defRPr sz="2325" b="1">
                 <a:solidFill>
                   <a:srgbClr val="E7A063"/>
@@ -5848,6 +5963,7 @@
               </a:defRPr>
             </a:defPPr>
             <a:lvl1pPr>
+              <a:buNone/>
               <a:defRPr sz="2175" b="0">
                 <a:solidFill>
                   <a:srgbClr val="E8F0ED"/>
@@ -5858,6 +5974,7 @@
               </a:defRPr>
             </a:lvl1pPr>
             <a:lvl2pPr>
+              <a:buNone/>
               <a:defRPr sz="2175" b="0">
                 <a:solidFill>
                   <a:srgbClr val="E8F0ED"/>
@@ -5868,6 +5985,7 @@
               </a:defRPr>
             </a:lvl2pPr>
             <a:lvl3pPr>
+              <a:buNone/>
               <a:defRPr sz="2175" b="0">
                 <a:solidFill>
                   <a:srgbClr val="E8F0ED"/>
@@ -5878,6 +5996,7 @@
               </a:defRPr>
             </a:lvl3pPr>
             <a:lvl4pPr>
+              <a:buNone/>
               <a:defRPr sz="2175" b="0">
                 <a:solidFill>
                   <a:srgbClr val="E8F0ED"/>
@@ -5888,6 +6007,7 @@
               </a:defRPr>
             </a:lvl4pPr>
             <a:lvl5pPr>
+              <a:buNone/>
               <a:defRPr sz="2175" b="0">
                 <a:solidFill>
                   <a:srgbClr val="E8F0ED"/>
@@ -5898,6 +6018,7 @@
               </a:defRPr>
             </a:lvl5pPr>
             <a:lvl6pPr>
+              <a:buNone/>
               <a:defRPr sz="2175" b="0">
                 <a:solidFill>
                   <a:srgbClr val="E8F0ED"/>
@@ -5908,6 +6029,7 @@
               </a:defRPr>
             </a:lvl6pPr>
             <a:lvl7pPr>
+              <a:buNone/>
               <a:defRPr sz="2175" b="0">
                 <a:solidFill>
                   <a:srgbClr val="E8F0ED"/>
@@ -5918,6 +6040,7 @@
               </a:defRPr>
             </a:lvl7pPr>
             <a:lvl8pPr>
+              <a:buNone/>
               <a:defRPr sz="2175" b="0">
                 <a:solidFill>
                   <a:srgbClr val="E8F0ED"/>
@@ -5928,6 +6051,7 @@
               </a:defRPr>
             </a:lvl8pPr>
             <a:lvl9pPr>
+              <a:buNone/>
               <a:defRPr sz="2175" b="0">
                 <a:solidFill>
                   <a:srgbClr val="E8F0ED"/>
@@ -5940,6 +6064,7 @@
           </a:lstStyle>
           <a:p xmlns:a="http://schemas.openxmlformats.org/drawingml/2006/main">
             <a:pPr>
+              <a:buNone/>
               <a:defRPr sz="2175" b="0">
                 <a:solidFill>
                   <a:srgbClr val="E8F0ED"/>
@@ -5963,6 +6088,7 @@
           </a:p>
           <a:p xmlns:a="http://schemas.openxmlformats.org/drawingml/2006/main">
             <a:pPr>
+              <a:buNone/>
               <a:defRPr sz="2175" b="0">
                 <a:solidFill>
                   <a:srgbClr val="E8F0ED"/>
@@ -6027,6 +6153,7 @@
               </a:defRPr>
             </a:defPPr>
             <a:lvl1pPr>
+              <a:buNone/>
               <a:defRPr sz="2325" b="1">
                 <a:solidFill>
                   <a:srgbClr val="E7A063"/>
@@ -6037,6 +6164,7 @@
               </a:defRPr>
             </a:lvl1pPr>
             <a:lvl2pPr>
+              <a:buNone/>
               <a:defRPr sz="2325" b="1">
                 <a:solidFill>
                   <a:srgbClr val="E7A063"/>
@@ -6047,6 +6175,7 @@
               </a:defRPr>
             </a:lvl2pPr>
             <a:lvl3pPr>
+              <a:buNone/>
               <a:defRPr sz="2325" b="1">
                 <a:solidFill>
                   <a:srgbClr val="E7A063"/>
@@ -6057,6 +6186,7 @@
               </a:defRPr>
             </a:lvl3pPr>
             <a:lvl4pPr>
+              <a:buNone/>
               <a:defRPr sz="2325" b="1">
                 <a:solidFill>
                   <a:srgbClr val="E7A063"/>
@@ -6067,6 +6197,7 @@
               </a:defRPr>
             </a:lvl4pPr>
             <a:lvl5pPr>
+              <a:buNone/>
               <a:defRPr sz="2325" b="1">
                 <a:solidFill>
                   <a:srgbClr val="E7A063"/>
@@ -6077,6 +6208,7 @@
               </a:defRPr>
             </a:lvl5pPr>
             <a:lvl6pPr>
+              <a:buNone/>
               <a:defRPr sz="2325" b="1">
                 <a:solidFill>
                   <a:srgbClr val="E7A063"/>
@@ -6087,6 +6219,7 @@
               </a:defRPr>
             </a:lvl6pPr>
             <a:lvl7pPr>
+              <a:buNone/>
               <a:defRPr sz="2325" b="1">
                 <a:solidFill>
                   <a:srgbClr val="E7A063"/>
@@ -6097,6 +6230,7 @@
               </a:defRPr>
             </a:lvl7pPr>
             <a:lvl8pPr>
+              <a:buNone/>
               <a:defRPr sz="2325" b="1">
                 <a:solidFill>
                   <a:srgbClr val="E7A063"/>
@@ -6107,6 +6241,7 @@
               </a:defRPr>
             </a:lvl8pPr>
             <a:lvl9pPr>
+              <a:buNone/>
               <a:defRPr sz="2325" b="1">
                 <a:solidFill>
                   <a:srgbClr val="E7A063"/>
@@ -6119,6 +6254,7 @@
           </a:lstStyle>
           <a:p xmlns:a="http://schemas.openxmlformats.org/drawingml/2006/main">
             <a:pPr>
+              <a:buNone/>
               <a:defRPr sz="2325" b="1">
                 <a:solidFill>
                   <a:srgbClr val="E7A063"/>
@@ -6183,6 +6319,7 @@
               </a:defRPr>
             </a:defPPr>
             <a:lvl1pPr>
+              <a:buNone/>
               <a:defRPr sz="2025" b="0">
                 <a:solidFill>
                   <a:srgbClr val="E8F0ED"/>
@@ -6193,6 +6330,7 @@
               </a:defRPr>
             </a:lvl1pPr>
             <a:lvl2pPr>
+              <a:buNone/>
               <a:defRPr sz="2025" b="0">
                 <a:solidFill>
                   <a:srgbClr val="E8F0ED"/>
@@ -6203,6 +6341,7 @@
               </a:defRPr>
             </a:lvl2pPr>
             <a:lvl3pPr>
+              <a:buNone/>
               <a:defRPr sz="2025" b="0">
                 <a:solidFill>
                   <a:srgbClr val="E8F0ED"/>
@@ -6213,6 +6352,7 @@
               </a:defRPr>
             </a:lvl3pPr>
             <a:lvl4pPr>
+              <a:buNone/>
               <a:defRPr sz="2025" b="0">
                 <a:solidFill>
                   <a:srgbClr val="E8F0ED"/>
@@ -6223,6 +6363,7 @@
               </a:defRPr>
             </a:lvl4pPr>
             <a:lvl5pPr>
+              <a:buNone/>
               <a:defRPr sz="2025" b="0">
                 <a:solidFill>
                   <a:srgbClr val="E8F0ED"/>
@@ -6233,6 +6374,7 @@
               </a:defRPr>
             </a:lvl5pPr>
             <a:lvl6pPr>
+              <a:buNone/>
               <a:defRPr sz="2025" b="0">
                 <a:solidFill>
                   <a:srgbClr val="E8F0ED"/>
@@ -6243,6 +6385,7 @@
               </a:defRPr>
             </a:lvl6pPr>
             <a:lvl7pPr>
+              <a:buNone/>
               <a:defRPr sz="2025" b="0">
                 <a:solidFill>
                   <a:srgbClr val="E8F0ED"/>
@@ -6253,6 +6396,7 @@
               </a:defRPr>
             </a:lvl7pPr>
             <a:lvl8pPr>
+              <a:buNone/>
               <a:defRPr sz="2025" b="0">
                 <a:solidFill>
                   <a:srgbClr val="E8F0ED"/>
@@ -6263,6 +6407,7 @@
               </a:defRPr>
             </a:lvl8pPr>
             <a:lvl9pPr>
+              <a:buNone/>
               <a:defRPr sz="2025" b="0">
                 <a:solidFill>
                   <a:srgbClr val="E8F0ED"/>
@@ -6275,6 +6420,7 @@
           </a:lstStyle>
           <a:p xmlns:a="http://schemas.openxmlformats.org/drawingml/2006/main">
             <a:pPr>
+              <a:buNone/>
               <a:defRPr sz="2025" b="0">
                 <a:solidFill>
                   <a:srgbClr val="E8F0ED"/>
@@ -6298,6 +6444,7 @@
           </a:p>
           <a:p xmlns:a="http://schemas.openxmlformats.org/drawingml/2006/main">
             <a:pPr>
+              <a:buNone/>
               <a:defRPr sz="2025" b="0">
                 <a:solidFill>
                   <a:srgbClr val="E8F0ED"/>
@@ -6391,6 +6538,7 @@
               </a:defRPr>
             </a:defPPr>
             <a:lvl1pPr>
+              <a:buNone/>
               <a:defRPr sz="3450" b="1">
                 <a:solidFill>
                   <a:srgbClr val="E8F0ED"/>
@@ -6401,6 +6549,7 @@
               </a:defRPr>
             </a:lvl1pPr>
             <a:lvl2pPr>
+              <a:buNone/>
               <a:defRPr sz="3450" b="1">
                 <a:solidFill>
                   <a:srgbClr val="E8F0ED"/>
@@ -6411,6 +6560,7 @@
               </a:defRPr>
             </a:lvl2pPr>
             <a:lvl3pPr>
+              <a:buNone/>
               <a:defRPr sz="3450" b="1">
                 <a:solidFill>
                   <a:srgbClr val="E8F0ED"/>
@@ -6421,6 +6571,7 @@
               </a:defRPr>
             </a:lvl3pPr>
             <a:lvl4pPr>
+              <a:buNone/>
               <a:defRPr sz="3450" b="1">
                 <a:solidFill>
                   <a:srgbClr val="E8F0ED"/>
@@ -6431,6 +6582,7 @@
               </a:defRPr>
             </a:lvl4pPr>
             <a:lvl5pPr>
+              <a:buNone/>
               <a:defRPr sz="3450" b="1">
                 <a:solidFill>
                   <a:srgbClr val="E8F0ED"/>
@@ -6441,6 +6593,7 @@
               </a:defRPr>
             </a:lvl5pPr>
             <a:lvl6pPr>
+              <a:buNone/>
               <a:defRPr sz="3450" b="1">
                 <a:solidFill>
                   <a:srgbClr val="E8F0ED"/>
@@ -6451,6 +6604,7 @@
               </a:defRPr>
             </a:lvl6pPr>
             <a:lvl7pPr>
+              <a:buNone/>
               <a:defRPr sz="3450" b="1">
                 <a:solidFill>
                   <a:srgbClr val="E8F0ED"/>
@@ -6461,6 +6615,7 @@
               </a:defRPr>
             </a:lvl7pPr>
             <a:lvl8pPr>
+              <a:buNone/>
               <a:defRPr sz="3450" b="1">
                 <a:solidFill>
                   <a:srgbClr val="E8F0ED"/>
@@ -6471,6 +6626,7 @@
               </a:defRPr>
             </a:lvl8pPr>
             <a:lvl9pPr>
+              <a:buNone/>
               <a:defRPr sz="3450" b="1">
                 <a:solidFill>
                   <a:srgbClr val="E8F0ED"/>
@@ -6483,6 +6639,7 @@
           </a:lstStyle>
           <a:p xmlns:a="http://schemas.openxmlformats.org/drawingml/2006/main">
             <a:pPr>
+              <a:buNone/>
               <a:defRPr sz="3450" b="1">
                 <a:solidFill>
                   <a:srgbClr val="E8F0ED"/>
@@ -6547,6 +6704,7 @@
               </a:defRPr>
             </a:defPPr>
             <a:lvl1pPr>
+              <a:buNone/>
               <a:defRPr sz="1350" b="0">
                 <a:solidFill>
                   <a:srgbClr val="A4B8BE"/>
@@ -6557,6 +6715,7 @@
               </a:defRPr>
             </a:lvl1pPr>
             <a:lvl2pPr>
+              <a:buNone/>
               <a:defRPr sz="1350" b="0">
                 <a:solidFill>
                   <a:srgbClr val="A4B8BE"/>
@@ -6567,6 +6726,7 @@
               </a:defRPr>
             </a:lvl2pPr>
             <a:lvl3pPr>
+              <a:buNone/>
               <a:defRPr sz="1350" b="0">
                 <a:solidFill>
                   <a:srgbClr val="A4B8BE"/>
@@ -6577,6 +6737,7 @@
               </a:defRPr>
             </a:lvl3pPr>
             <a:lvl4pPr>
+              <a:buNone/>
               <a:defRPr sz="1350" b="0">
                 <a:solidFill>
                   <a:srgbClr val="A4B8BE"/>
@@ -6587,6 +6748,7 @@
               </a:defRPr>
             </a:lvl4pPr>
             <a:lvl5pPr>
+              <a:buNone/>
               <a:defRPr sz="1350" b="0">
                 <a:solidFill>
                   <a:srgbClr val="A4B8BE"/>
@@ -6597,6 +6759,7 @@
               </a:defRPr>
             </a:lvl5pPr>
             <a:lvl6pPr>
+              <a:buNone/>
               <a:defRPr sz="1350" b="0">
                 <a:solidFill>
                   <a:srgbClr val="A4B8BE"/>
@@ -6607,6 +6770,7 @@
               </a:defRPr>
             </a:lvl6pPr>
             <a:lvl7pPr>
+              <a:buNone/>
               <a:defRPr sz="1350" b="0">
                 <a:solidFill>
                   <a:srgbClr val="A4B8BE"/>
@@ -6617,6 +6781,7 @@
               </a:defRPr>
             </a:lvl7pPr>
             <a:lvl8pPr>
+              <a:buNone/>
               <a:defRPr sz="1350" b="0">
                 <a:solidFill>
                   <a:srgbClr val="A4B8BE"/>
@@ -6627,6 +6792,7 @@
               </a:defRPr>
             </a:lvl8pPr>
             <a:lvl9pPr>
+              <a:buNone/>
               <a:defRPr sz="1350" b="0">
                 <a:solidFill>
                   <a:srgbClr val="A4B8BE"/>
@@ -6639,6 +6805,7 @@
           </a:lstStyle>
           <a:p xmlns:a="http://schemas.openxmlformats.org/drawingml/2006/main">
             <a:pPr>
+              <a:buNone/>
               <a:defRPr sz="1350" b="0">
                 <a:solidFill>
                   <a:srgbClr val="A4B8BE"/>
@@ -6667,7 +6834,7 @@
           <p:cNvPr id="3" name="">
             <a:extLst xmlns:a="http://schemas.openxmlformats.org/drawingml/2006/main">
               <a:ext uri="{FF2B5EF4-FFF2-40B4-BE49-F238E27FC236}">
-                <a16:creationId xmlns:a16="http://schemas.microsoft.com/office/drawing/2014/main" id="{DE552B8A-2D89-4264-AEC0-4CA5563F0C06}"/>
+                <a16:creationId xmlns:a16="http://schemas.microsoft.com/office/drawing/2014/main" id="{249E75D2-B1F1-4A6F-9691-4BA6A0C09C22}"/>
               </a:ext>
             </a:extLst>
           </p:cNvPr>
@@ -6677,7 +6844,7 @@
           <p:nvPr/>
         </p:nvPicPr>
         <p:blipFill>
-          <a:blip xmlns:r="http://schemas.openxmlformats.org/officeDocument/2006/relationships" xmlns:a="http://schemas.openxmlformats.org/drawingml/2006/main" r:embed="R60a26e52b1fc4190"/>
+          <a:blip xmlns:r="http://schemas.openxmlformats.org/officeDocument/2006/relationships" xmlns:a="http://schemas.openxmlformats.org/drawingml/2006/main" r:embed="R580bce3e70b54891"/>
           <a:stretch xmlns:a="http://schemas.openxmlformats.org/drawingml/2006/main"/>
         </p:blipFill>
         <p:spPr>
@@ -6731,6 +6898,7 @@
               </a:defRPr>
             </a:defPPr>
             <a:lvl1pPr>
+              <a:buNone/>
               <a:defRPr sz="2325" b="1">
                 <a:solidFill>
                   <a:srgbClr val="67D1BE"/>
@@ -6741,6 +6909,7 @@
               </a:defRPr>
             </a:lvl1pPr>
             <a:lvl2pPr>
+              <a:buNone/>
               <a:defRPr sz="2325" b="1">
                 <a:solidFill>
                   <a:srgbClr val="67D1BE"/>
@@ -6751,6 +6920,7 @@
               </a:defRPr>
             </a:lvl2pPr>
             <a:lvl3pPr>
+              <a:buNone/>
               <a:defRPr sz="2325" b="1">
                 <a:solidFill>
                   <a:srgbClr val="67D1BE"/>
@@ -6761,6 +6931,7 @@
               </a:defRPr>
             </a:lvl3pPr>
             <a:lvl4pPr>
+              <a:buNone/>
               <a:defRPr sz="2325" b="1">
                 <a:solidFill>
                   <a:srgbClr val="67D1BE"/>
@@ -6771,6 +6942,7 @@
               </a:defRPr>
             </a:lvl4pPr>
             <a:lvl5pPr>
+              <a:buNone/>
               <a:defRPr sz="2325" b="1">
                 <a:solidFill>
                   <a:srgbClr val="67D1BE"/>
@@ -6781,6 +6953,7 @@
               </a:defRPr>
             </a:lvl5pPr>
             <a:lvl6pPr>
+              <a:buNone/>
               <a:defRPr sz="2325" b="1">
                 <a:solidFill>
                   <a:srgbClr val="67D1BE"/>
@@ -6791,6 +6964,7 @@
               </a:defRPr>
             </a:lvl6pPr>
             <a:lvl7pPr>
+              <a:buNone/>
               <a:defRPr sz="2325" b="1">
                 <a:solidFill>
                   <a:srgbClr val="67D1BE"/>
@@ -6801,6 +6975,7 @@
               </a:defRPr>
             </a:lvl7pPr>
             <a:lvl8pPr>
+              <a:buNone/>
               <a:defRPr sz="2325" b="1">
                 <a:solidFill>
                   <a:srgbClr val="67D1BE"/>
@@ -6811,6 +6986,7 @@
               </a:defRPr>
             </a:lvl8pPr>
             <a:lvl9pPr>
+              <a:buNone/>
               <a:defRPr sz="2325" b="1">
                 <a:solidFill>
                   <a:srgbClr val="67D1BE"/>
@@ -6823,6 +6999,7 @@
           </a:lstStyle>
           <a:p xmlns:a="http://schemas.openxmlformats.org/drawingml/2006/main">
             <a:pPr>
+              <a:buNone/>
               <a:defRPr sz="2325" b="1">
                 <a:solidFill>
                   <a:srgbClr val="67D1BE"/>
@@ -6887,6 +7064,7 @@
               </a:defRPr>
             </a:defPPr>
             <a:lvl1pPr>
+              <a:buNone/>
               <a:defRPr sz="2175" b="0">
                 <a:solidFill>
                   <a:srgbClr val="E8F0ED"/>
@@ -6897,6 +7075,7 @@
               </a:defRPr>
             </a:lvl1pPr>
             <a:lvl2pPr>
+              <a:buNone/>
               <a:defRPr sz="2175" b="0">
                 <a:solidFill>
                   <a:srgbClr val="E8F0ED"/>
@@ -6907,6 +7086,7 @@
               </a:defRPr>
             </a:lvl2pPr>
             <a:lvl3pPr>
+              <a:buNone/>
               <a:defRPr sz="2175" b="0">
                 <a:solidFill>
                   <a:srgbClr val="E8F0ED"/>
@@ -6917,6 +7097,7 @@
               </a:defRPr>
             </a:lvl3pPr>
             <a:lvl4pPr>
+              <a:buNone/>
               <a:defRPr sz="2175" b="0">
                 <a:solidFill>
                   <a:srgbClr val="E8F0ED"/>
@@ -6927,6 +7108,7 @@
               </a:defRPr>
             </a:lvl4pPr>
             <a:lvl5pPr>
+              <a:buNone/>
               <a:defRPr sz="2175" b="0">
                 <a:solidFill>
                   <a:srgbClr val="E8F0ED"/>
@@ -6937,6 +7119,7 @@
               </a:defRPr>
             </a:lvl5pPr>
             <a:lvl6pPr>
+              <a:buNone/>
               <a:defRPr sz="2175" b="0">
                 <a:solidFill>
                   <a:srgbClr val="E8F0ED"/>
@@ -6947,6 +7130,7 @@
               </a:defRPr>
             </a:lvl6pPr>
             <a:lvl7pPr>
+              <a:buNone/>
               <a:defRPr sz="2175" b="0">
                 <a:solidFill>
                   <a:srgbClr val="E8F0ED"/>
@@ -6957,6 +7141,7 @@
               </a:defRPr>
             </a:lvl7pPr>
             <a:lvl8pPr>
+              <a:buNone/>
               <a:defRPr sz="2175" b="0">
                 <a:solidFill>
                   <a:srgbClr val="E8F0ED"/>
@@ -6967,6 +7152,7 @@
               </a:defRPr>
             </a:lvl8pPr>
             <a:lvl9pPr>
+              <a:buNone/>
               <a:defRPr sz="2175" b="0">
                 <a:solidFill>
                   <a:srgbClr val="E8F0ED"/>
@@ -6979,6 +7165,7 @@
           </a:lstStyle>
           <a:p xmlns:a="http://schemas.openxmlformats.org/drawingml/2006/main">
             <a:pPr>
+              <a:buNone/>
               <a:defRPr sz="2175" b="0">
                 <a:solidFill>
                   <a:srgbClr val="E8F0ED"/>
@@ -7002,6 +7189,7 @@
           </a:p>
           <a:p xmlns:a="http://schemas.openxmlformats.org/drawingml/2006/main">
             <a:pPr>
+              <a:buNone/>
               <a:defRPr sz="2175" b="0">
                 <a:solidFill>
                   <a:srgbClr val="E8F0ED"/>
@@ -7025,6 +7213,7 @@
           </a:p>
           <a:p xmlns:a="http://schemas.openxmlformats.org/drawingml/2006/main">
             <a:pPr>
+              <a:buNone/>
               <a:defRPr sz="2175" b="0">
                 <a:solidFill>
                   <a:srgbClr val="E8F0ED"/>
@@ -7089,6 +7278,7 @@
               </a:defRPr>
             </a:defPPr>
             <a:lvl1pPr>
+              <a:buNone/>
               <a:defRPr sz="1950" b="0">
                 <a:solidFill>
                   <a:srgbClr val="A4B8BE"/>
@@ -7099,6 +7289,7 @@
               </a:defRPr>
             </a:lvl1pPr>
             <a:lvl2pPr>
+              <a:buNone/>
               <a:defRPr sz="1950" b="0">
                 <a:solidFill>
                   <a:srgbClr val="A4B8BE"/>
@@ -7109,6 +7300,7 @@
               </a:defRPr>
             </a:lvl2pPr>
             <a:lvl3pPr>
+              <a:buNone/>
               <a:defRPr sz="1950" b="0">
                 <a:solidFill>
                   <a:srgbClr val="A4B8BE"/>
@@ -7119,6 +7311,7 @@
               </a:defRPr>
             </a:lvl3pPr>
             <a:lvl4pPr>
+              <a:buNone/>
               <a:defRPr sz="1950" b="0">
                 <a:solidFill>
                   <a:srgbClr val="A4B8BE"/>
@@ -7129,6 +7322,7 @@
               </a:defRPr>
             </a:lvl4pPr>
             <a:lvl5pPr>
+              <a:buNone/>
               <a:defRPr sz="1950" b="0">
                 <a:solidFill>
                   <a:srgbClr val="A4B8BE"/>
@@ -7139,6 +7333,7 @@
               </a:defRPr>
             </a:lvl5pPr>
             <a:lvl6pPr>
+              <a:buNone/>
               <a:defRPr sz="1950" b="0">
                 <a:solidFill>
                   <a:srgbClr val="A4B8BE"/>
@@ -7149,6 +7344,7 @@
               </a:defRPr>
             </a:lvl6pPr>
             <a:lvl7pPr>
+              <a:buNone/>
               <a:defRPr sz="1950" b="0">
                 <a:solidFill>
                   <a:srgbClr val="A4B8BE"/>
@@ -7159,6 +7355,7 @@
               </a:defRPr>
             </a:lvl7pPr>
             <a:lvl8pPr>
+              <a:buNone/>
               <a:defRPr sz="1950" b="0">
                 <a:solidFill>
                   <a:srgbClr val="A4B8BE"/>
@@ -7169,6 +7366,7 @@
               </a:defRPr>
             </a:lvl8pPr>
             <a:lvl9pPr>
+              <a:buNone/>
               <a:defRPr sz="1950" b="0">
                 <a:solidFill>
                   <a:srgbClr val="A4B8BE"/>
@@ -7181,6 +7379,7 @@
           </a:lstStyle>
           <a:p xmlns:a="http://schemas.openxmlformats.org/drawingml/2006/main">
             <a:pPr>
+              <a:buNone/>
               <a:defRPr sz="1950" b="0">
                 <a:solidFill>
                   <a:srgbClr val="A4B8BE"/>
@@ -7204,6 +7403,7 @@
           </a:p>
           <a:p xmlns:a="http://schemas.openxmlformats.org/drawingml/2006/main">
             <a:pPr>
+              <a:buNone/>
               <a:defRPr sz="1950" b="0">
                 <a:solidFill>
                   <a:srgbClr val="A4B8BE"/>
@@ -7227,6 +7427,7 @@
           </a:p>
           <a:p xmlns:a="http://schemas.openxmlformats.org/drawingml/2006/main">
             <a:pPr>
+              <a:buNone/>
               <a:defRPr sz="1950" b="0">
                 <a:solidFill>
                   <a:srgbClr val="A4B8BE"/>
@@ -7291,6 +7492,7 @@
               </a:defRPr>
             </a:defPPr>
             <a:lvl1pPr>
+              <a:buNone/>
               <a:defRPr sz="1800" b="0">
                 <a:solidFill>
                   <a:srgbClr val="E7A063"/>
@@ -7301,6 +7503,7 @@
               </a:defRPr>
             </a:lvl1pPr>
             <a:lvl2pPr>
+              <a:buNone/>
               <a:defRPr sz="1800" b="0">
                 <a:solidFill>
                   <a:srgbClr val="E7A063"/>
@@ -7311,6 +7514,7 @@
               </a:defRPr>
             </a:lvl2pPr>
             <a:lvl3pPr>
+              <a:buNone/>
               <a:defRPr sz="1800" b="0">
                 <a:solidFill>
                   <a:srgbClr val="E7A063"/>
@@ -7321,6 +7525,7 @@
               </a:defRPr>
             </a:lvl3pPr>
             <a:lvl4pPr>
+              <a:buNone/>
               <a:defRPr sz="1800" b="0">
                 <a:solidFill>
                   <a:srgbClr val="E7A063"/>
@@ -7331,6 +7536,7 @@
               </a:defRPr>
             </a:lvl4pPr>
             <a:lvl5pPr>
+              <a:buNone/>
               <a:defRPr sz="1800" b="0">
                 <a:solidFill>
                   <a:srgbClr val="E7A063"/>
@@ -7341,6 +7547,7 @@
               </a:defRPr>
             </a:lvl5pPr>
             <a:lvl6pPr>
+              <a:buNone/>
               <a:defRPr sz="1800" b="0">
                 <a:solidFill>
                   <a:srgbClr val="E7A063"/>
@@ -7351,6 +7558,7 @@
               </a:defRPr>
             </a:lvl6pPr>
             <a:lvl7pPr>
+              <a:buNone/>
               <a:defRPr sz="1800" b="0">
                 <a:solidFill>
                   <a:srgbClr val="E7A063"/>
@@ -7361,6 +7569,7 @@
               </a:defRPr>
             </a:lvl7pPr>
             <a:lvl8pPr>
+              <a:buNone/>
               <a:defRPr sz="1800" b="0">
                 <a:solidFill>
                   <a:srgbClr val="E7A063"/>
@@ -7371,6 +7580,7 @@
               </a:defRPr>
             </a:lvl8pPr>
             <a:lvl9pPr>
+              <a:buNone/>
               <a:defRPr sz="1800" b="0">
                 <a:solidFill>
                   <a:srgbClr val="E7A063"/>
@@ -7383,6 +7593,7 @@
           </a:lstStyle>
           <a:p xmlns:a="http://schemas.openxmlformats.org/drawingml/2006/main">
             <a:pPr>
+              <a:buNone/>
               <a:defRPr sz="1800" b="0">
                 <a:solidFill>
                   <a:srgbClr val="E7A063"/>
@@ -7401,7 +7612,7 @@
                 <a:ea typeface="Arial"/>
                 <a:cs typeface="Arial"/>
               </a:rPr>
-              <a:t>Visual flight timing and stylized geometry</a:t>
+              <a:t>Kazakhstan terrain and a detailed launch site</a:t>
             </a:r>
           </a:p>
         </p:txBody>
@@ -7440,7 +7651,7 @@
           <p:cNvPr id="9" name="">
             <a:extLst xmlns:a="http://schemas.openxmlformats.org/drawingml/2006/main">
               <a:ext uri="{FF2B5EF4-FFF2-40B4-BE49-F238E27FC236}">
-                <a16:creationId xmlns:a16="http://schemas.microsoft.com/office/drawing/2014/main" id="{A609B6B0-93D5-442D-90CE-7F146E03DD23}"/>
+                <a16:creationId xmlns:a16="http://schemas.microsoft.com/office/drawing/2014/main" id="{2B9F7B12-7C74-4565-8764-3303647FCF6F}"/>
               </a:ext>
             </a:extLst>
           </p:cNvPr>
@@ -7471,7 +7682,7 @@
           <p:cNvPr id="8" name="">
             <a:extLst xmlns:a="http://schemas.openxmlformats.org/drawingml/2006/main">
               <a:ext uri="{FF2B5EF4-FFF2-40B4-BE49-F238E27FC236}">
-                <a16:creationId xmlns:a16="http://schemas.microsoft.com/office/drawing/2014/main" id="{B8C12CAC-18A1-44DF-AB30-8F3E0B39DB46}"/>
+                <a16:creationId xmlns:a16="http://schemas.microsoft.com/office/drawing/2014/main" id="{11DCE83A-4B3D-4109-BA30-A4FA0B935F0E}"/>
               </a:ext>
             </a:extLst>
           </p:cNvPr>
@@ -7502,7 +7713,7 @@
           <p:cNvPr id="7" name="">
             <a:extLst xmlns:a="http://schemas.openxmlformats.org/drawingml/2006/main">
               <a:ext uri="{FF2B5EF4-FFF2-40B4-BE49-F238E27FC236}">
-                <a16:creationId xmlns:a16="http://schemas.microsoft.com/office/drawing/2014/main" id="{1894B4B5-A5B1-42DA-AC66-E967D4BAEA1C}"/>
+                <a16:creationId xmlns:a16="http://schemas.microsoft.com/office/drawing/2014/main" id="{9795B7D3-B4B6-49B4-BE99-E86DBA734BD8}"/>
               </a:ext>
             </a:extLst>
           </p:cNvPr>
@@ -7569,6 +7780,7 @@
               </a:defRPr>
             </a:defPPr>
             <a:lvl1pPr>
+              <a:buNone/>
               <a:defRPr sz="3450" b="1">
                 <a:solidFill>
                   <a:srgbClr val="E8F0ED"/>
@@ -7579,6 +7791,7 @@
               </a:defRPr>
             </a:lvl1pPr>
             <a:lvl2pPr>
+              <a:buNone/>
               <a:defRPr sz="3450" b="1">
                 <a:solidFill>
                   <a:srgbClr val="E8F0ED"/>
@@ -7589,6 +7802,7 @@
               </a:defRPr>
             </a:lvl2pPr>
             <a:lvl3pPr>
+              <a:buNone/>
               <a:defRPr sz="3450" b="1">
                 <a:solidFill>
                   <a:srgbClr val="E8F0ED"/>
@@ -7599,6 +7813,7 @@
               </a:defRPr>
             </a:lvl3pPr>
             <a:lvl4pPr>
+              <a:buNone/>
               <a:defRPr sz="3450" b="1">
                 <a:solidFill>
                   <a:srgbClr val="E8F0ED"/>
@@ -7609,6 +7824,7 @@
               </a:defRPr>
             </a:lvl4pPr>
             <a:lvl5pPr>
+              <a:buNone/>
               <a:defRPr sz="3450" b="1">
                 <a:solidFill>
                   <a:srgbClr val="E8F0ED"/>
@@ -7619,6 +7835,7 @@
               </a:defRPr>
             </a:lvl5pPr>
             <a:lvl6pPr>
+              <a:buNone/>
               <a:defRPr sz="3450" b="1">
                 <a:solidFill>
                   <a:srgbClr val="E8F0ED"/>
@@ -7629,6 +7846,7 @@
               </a:defRPr>
             </a:lvl6pPr>
             <a:lvl7pPr>
+              <a:buNone/>
               <a:defRPr sz="3450" b="1">
                 <a:solidFill>
                   <a:srgbClr val="E8F0ED"/>
@@ -7639,6 +7857,7 @@
               </a:defRPr>
             </a:lvl7pPr>
             <a:lvl8pPr>
+              <a:buNone/>
               <a:defRPr sz="3450" b="1">
                 <a:solidFill>
                   <a:srgbClr val="E8F0ED"/>
@@ -7649,6 +7868,7 @@
               </a:defRPr>
             </a:lvl8pPr>
             <a:lvl9pPr>
+              <a:buNone/>
               <a:defRPr sz="3450" b="1">
                 <a:solidFill>
                   <a:srgbClr val="E8F0ED"/>
@@ -7661,6 +7881,7 @@
           </a:lstStyle>
           <a:p xmlns:a="http://schemas.openxmlformats.org/drawingml/2006/main">
             <a:pPr>
+              <a:buNone/>
               <a:defRPr sz="3450" b="1">
                 <a:solidFill>
                   <a:srgbClr val="E8F0ED"/>
@@ -7725,6 +7946,7 @@
               </a:defRPr>
             </a:defPPr>
             <a:lvl1pPr>
+              <a:buNone/>
               <a:defRPr sz="1350" b="0">
                 <a:solidFill>
                   <a:srgbClr val="A4B8BE"/>
@@ -7735,6 +7957,7 @@
               </a:defRPr>
             </a:lvl1pPr>
             <a:lvl2pPr>
+              <a:buNone/>
               <a:defRPr sz="1350" b="0">
                 <a:solidFill>
                   <a:srgbClr val="A4B8BE"/>
@@ -7745,6 +7968,7 @@
               </a:defRPr>
             </a:lvl2pPr>
             <a:lvl3pPr>
+              <a:buNone/>
               <a:defRPr sz="1350" b="0">
                 <a:solidFill>
                   <a:srgbClr val="A4B8BE"/>
@@ -7755,6 +7979,7 @@
               </a:defRPr>
             </a:lvl3pPr>
             <a:lvl4pPr>
+              <a:buNone/>
               <a:defRPr sz="1350" b="0">
                 <a:solidFill>
                   <a:srgbClr val="A4B8BE"/>
@@ -7765,6 +7990,7 @@
               </a:defRPr>
             </a:lvl4pPr>
             <a:lvl5pPr>
+              <a:buNone/>
               <a:defRPr sz="1350" b="0">
                 <a:solidFill>
                   <a:srgbClr val="A4B8BE"/>
@@ -7775,6 +8001,7 @@
               </a:defRPr>
             </a:lvl5pPr>
             <a:lvl6pPr>
+              <a:buNone/>
               <a:defRPr sz="1350" b="0">
                 <a:solidFill>
                   <a:srgbClr val="A4B8BE"/>
@@ -7785,6 +8012,7 @@
               </a:defRPr>
             </a:lvl6pPr>
             <a:lvl7pPr>
+              <a:buNone/>
               <a:defRPr sz="1350" b="0">
                 <a:solidFill>
                   <a:srgbClr val="A4B8BE"/>
@@ -7795,6 +8023,7 @@
               </a:defRPr>
             </a:lvl7pPr>
             <a:lvl8pPr>
+              <a:buNone/>
               <a:defRPr sz="1350" b="0">
                 <a:solidFill>
                   <a:srgbClr val="A4B8BE"/>
@@ -7805,6 +8034,7 @@
               </a:defRPr>
             </a:lvl8pPr>
             <a:lvl9pPr>
+              <a:buNone/>
               <a:defRPr sz="1350" b="0">
                 <a:solidFill>
                   <a:srgbClr val="A4B8BE"/>
@@ -7817,6 +8047,7 @@
           </a:lstStyle>
           <a:p xmlns:a="http://schemas.openxmlformats.org/drawingml/2006/main">
             <a:pPr>
+              <a:buNone/>
               <a:defRPr sz="1350" b="0">
                 <a:solidFill>
                   <a:srgbClr val="A4B8BE"/>
@@ -7885,6 +8116,7 @@
               </a:defRPr>
             </a:defPPr>
             <a:lvl1pPr>
+              <a:buNone/>
               <a:defRPr sz="1875">
                 <a:solidFill>
                   <a:srgbClr val="E8F0ED"/>
@@ -7895,6 +8127,7 @@
               </a:defRPr>
             </a:lvl1pPr>
             <a:lvl2pPr>
+              <a:buNone/>
               <a:defRPr sz="1875">
                 <a:solidFill>
                   <a:srgbClr val="E8F0ED"/>
@@ -7905,6 +8138,7 @@
               </a:defRPr>
             </a:lvl2pPr>
             <a:lvl3pPr>
+              <a:buNone/>
               <a:defRPr sz="1875">
                 <a:solidFill>
                   <a:srgbClr val="E8F0ED"/>
@@ -7915,6 +8149,7 @@
               </a:defRPr>
             </a:lvl3pPr>
             <a:lvl4pPr>
+              <a:buNone/>
               <a:defRPr sz="1875">
                 <a:solidFill>
                   <a:srgbClr val="E8F0ED"/>
@@ -7925,6 +8160,7 @@
               </a:defRPr>
             </a:lvl4pPr>
             <a:lvl5pPr>
+              <a:buNone/>
               <a:defRPr sz="1875">
                 <a:solidFill>
                   <a:srgbClr val="E8F0ED"/>
@@ -7935,6 +8171,7 @@
               </a:defRPr>
             </a:lvl5pPr>
             <a:lvl6pPr>
+              <a:buNone/>
               <a:defRPr sz="1875">
                 <a:solidFill>
                   <a:srgbClr val="E8F0ED"/>
@@ -7945,6 +8182,7 @@
               </a:defRPr>
             </a:lvl6pPr>
             <a:lvl7pPr>
+              <a:buNone/>
               <a:defRPr sz="1875">
                 <a:solidFill>
                   <a:srgbClr val="E8F0ED"/>
@@ -7955,6 +8193,7 @@
               </a:defRPr>
             </a:lvl7pPr>
             <a:lvl8pPr>
+              <a:buNone/>
               <a:defRPr sz="1875">
                 <a:solidFill>
                   <a:srgbClr val="E8F0ED"/>
@@ -7965,6 +8204,7 @@
               </a:defRPr>
             </a:lvl8pPr>
             <a:lvl9pPr>
+              <a:buNone/>
               <a:defRPr sz="1875">
                 <a:solidFill>
                   <a:srgbClr val="E8F0ED"/>
@@ -7977,6 +8217,7 @@
           </a:lstStyle>
           <a:p xmlns:a="http://schemas.openxmlformats.org/drawingml/2006/main">
             <a:pPr>
+              <a:buNone/>
               <a:defRPr sz="1875">
                 <a:solidFill>
                   <a:srgbClr val="E8F0ED"/>
@@ -8000,6 +8241,7 @@
           </a:p>
           <a:p xmlns:a="http://schemas.openxmlformats.org/drawingml/2006/main">
             <a:pPr>
+              <a:buNone/>
               <a:defRPr sz="1875">
                 <a:solidFill>
                   <a:srgbClr val="E8F0ED"/>
@@ -8068,6 +8310,7 @@
               </a:defRPr>
             </a:defPPr>
             <a:lvl1pPr>
+              <a:buNone/>
               <a:defRPr sz="1875">
                 <a:solidFill>
                   <a:srgbClr val="E8F0ED"/>
@@ -8078,6 +8321,7 @@
               </a:defRPr>
             </a:lvl1pPr>
             <a:lvl2pPr>
+              <a:buNone/>
               <a:defRPr sz="1875">
                 <a:solidFill>
                   <a:srgbClr val="E8F0ED"/>
@@ -8088,6 +8332,7 @@
               </a:defRPr>
             </a:lvl2pPr>
             <a:lvl3pPr>
+              <a:buNone/>
               <a:defRPr sz="1875">
                 <a:solidFill>
                   <a:srgbClr val="E8F0ED"/>
@@ -8098,6 +8343,7 @@
               </a:defRPr>
             </a:lvl3pPr>
             <a:lvl4pPr>
+              <a:buNone/>
               <a:defRPr sz="1875">
                 <a:solidFill>
                   <a:srgbClr val="E8F0ED"/>
@@ -8108,6 +8354,7 @@
               </a:defRPr>
             </a:lvl4pPr>
             <a:lvl5pPr>
+              <a:buNone/>
               <a:defRPr sz="1875">
                 <a:solidFill>
                   <a:srgbClr val="E8F0ED"/>
@@ -8118,6 +8365,7 @@
               </a:defRPr>
             </a:lvl5pPr>
             <a:lvl6pPr>
+              <a:buNone/>
               <a:defRPr sz="1875">
                 <a:solidFill>
                   <a:srgbClr val="E8F0ED"/>
@@ -8128,6 +8376,7 @@
               </a:defRPr>
             </a:lvl6pPr>
             <a:lvl7pPr>
+              <a:buNone/>
               <a:defRPr sz="1875">
                 <a:solidFill>
                   <a:srgbClr val="E8F0ED"/>
@@ -8138,6 +8387,7 @@
               </a:defRPr>
             </a:lvl7pPr>
             <a:lvl8pPr>
+              <a:buNone/>
               <a:defRPr sz="1875">
                 <a:solidFill>
                   <a:srgbClr val="E8F0ED"/>
@@ -8148,6 +8398,7 @@
               </a:defRPr>
             </a:lvl8pPr>
             <a:lvl9pPr>
+              <a:buNone/>
               <a:defRPr sz="1875">
                 <a:solidFill>
                   <a:srgbClr val="E8F0ED"/>
@@ -8160,6 +8411,7 @@
           </a:lstStyle>
           <a:p xmlns:a="http://schemas.openxmlformats.org/drawingml/2006/main">
             <a:pPr>
+              <a:buNone/>
               <a:defRPr sz="1875">
                 <a:solidFill>
                   <a:srgbClr val="E8F0ED"/>
@@ -8183,6 +8435,7 @@
           </a:p>
           <a:p xmlns:a="http://schemas.openxmlformats.org/drawingml/2006/main">
             <a:pPr>
+              <a:buNone/>
               <a:defRPr sz="1875">
                 <a:solidFill>
                   <a:srgbClr val="E8F0ED"/>
@@ -8251,6 +8504,7 @@
               </a:defRPr>
             </a:defPPr>
             <a:lvl1pPr>
+              <a:buNone/>
               <a:defRPr sz="1875">
                 <a:solidFill>
                   <a:srgbClr val="E8F0ED"/>
@@ -8261,6 +8515,7 @@
               </a:defRPr>
             </a:lvl1pPr>
             <a:lvl2pPr>
+              <a:buNone/>
               <a:defRPr sz="1875">
                 <a:solidFill>
                   <a:srgbClr val="E8F0ED"/>
@@ -8271,6 +8526,7 @@
               </a:defRPr>
             </a:lvl2pPr>
             <a:lvl3pPr>
+              <a:buNone/>
               <a:defRPr sz="1875">
                 <a:solidFill>
                   <a:srgbClr val="E8F0ED"/>
@@ -8281,6 +8537,7 @@
               </a:defRPr>
             </a:lvl3pPr>
             <a:lvl4pPr>
+              <a:buNone/>
               <a:defRPr sz="1875">
                 <a:solidFill>
                   <a:srgbClr val="E8F0ED"/>
@@ -8291,6 +8548,7 @@
               </a:defRPr>
             </a:lvl4pPr>
             <a:lvl5pPr>
+              <a:buNone/>
               <a:defRPr sz="1875">
                 <a:solidFill>
                   <a:srgbClr val="E8F0ED"/>
@@ -8301,6 +8559,7 @@
               </a:defRPr>
             </a:lvl5pPr>
             <a:lvl6pPr>
+              <a:buNone/>
               <a:defRPr sz="1875">
                 <a:solidFill>
                   <a:srgbClr val="E8F0ED"/>
@@ -8311,6 +8570,7 @@
               </a:defRPr>
             </a:lvl6pPr>
             <a:lvl7pPr>
+              <a:buNone/>
               <a:defRPr sz="1875">
                 <a:solidFill>
                   <a:srgbClr val="E8F0ED"/>
@@ -8321,6 +8581,7 @@
               </a:defRPr>
             </a:lvl7pPr>
             <a:lvl8pPr>
+              <a:buNone/>
               <a:defRPr sz="1875">
                 <a:solidFill>
                   <a:srgbClr val="E8F0ED"/>
@@ -8331,6 +8592,7 @@
               </a:defRPr>
             </a:lvl8pPr>
             <a:lvl9pPr>
+              <a:buNone/>
               <a:defRPr sz="1875">
                 <a:solidFill>
                   <a:srgbClr val="E8F0ED"/>
@@ -8343,6 +8605,7 @@
           </a:lstStyle>
           <a:p xmlns:a="http://schemas.openxmlformats.org/drawingml/2006/main">
             <a:pPr>
+              <a:buNone/>
               <a:defRPr sz="1875">
                 <a:solidFill>
                   <a:srgbClr val="E8F0ED"/>
@@ -8366,6 +8629,7 @@
           </a:p>
           <a:p xmlns:a="http://schemas.openxmlformats.org/drawingml/2006/main">
             <a:pPr>
+              <a:buNone/>
               <a:defRPr sz="1875">
                 <a:solidFill>
                   <a:srgbClr val="E8F0ED"/>
@@ -8434,6 +8698,7 @@
               </a:defRPr>
             </a:defPPr>
             <a:lvl1pPr>
+              <a:buNone/>
               <a:defRPr sz="1875">
                 <a:solidFill>
                   <a:srgbClr val="E8F0ED"/>
@@ -8444,6 +8709,7 @@
               </a:defRPr>
             </a:lvl1pPr>
             <a:lvl2pPr>
+              <a:buNone/>
               <a:defRPr sz="1875">
                 <a:solidFill>
                   <a:srgbClr val="E8F0ED"/>
@@ -8454,6 +8720,7 @@
               </a:defRPr>
             </a:lvl2pPr>
             <a:lvl3pPr>
+              <a:buNone/>
               <a:defRPr sz="1875">
                 <a:solidFill>
                   <a:srgbClr val="E8F0ED"/>
@@ -8464,6 +8731,7 @@
               </a:defRPr>
             </a:lvl3pPr>
             <a:lvl4pPr>
+              <a:buNone/>
               <a:defRPr sz="1875">
                 <a:solidFill>
                   <a:srgbClr val="E8F0ED"/>
@@ -8474,6 +8742,7 @@
               </a:defRPr>
             </a:lvl4pPr>
             <a:lvl5pPr>
+              <a:buNone/>
               <a:defRPr sz="1875">
                 <a:solidFill>
                   <a:srgbClr val="E8F0ED"/>
@@ -8484,6 +8753,7 @@
               </a:defRPr>
             </a:lvl5pPr>
             <a:lvl6pPr>
+              <a:buNone/>
               <a:defRPr sz="1875">
                 <a:solidFill>
                   <a:srgbClr val="E8F0ED"/>
@@ -8494,6 +8764,7 @@
               </a:defRPr>
             </a:lvl6pPr>
             <a:lvl7pPr>
+              <a:buNone/>
               <a:defRPr sz="1875">
                 <a:solidFill>
                   <a:srgbClr val="E8F0ED"/>
@@ -8504,6 +8775,7 @@
               </a:defRPr>
             </a:lvl7pPr>
             <a:lvl8pPr>
+              <a:buNone/>
               <a:defRPr sz="1875">
                 <a:solidFill>
                   <a:srgbClr val="E8F0ED"/>
@@ -8514,6 +8786,7 @@
               </a:defRPr>
             </a:lvl8pPr>
             <a:lvl9pPr>
+              <a:buNone/>
               <a:defRPr sz="1875">
                 <a:solidFill>
                   <a:srgbClr val="E8F0ED"/>
@@ -8526,6 +8799,7 @@
           </a:lstStyle>
           <a:p xmlns:a="http://schemas.openxmlformats.org/drawingml/2006/main">
             <a:pPr>
+              <a:buNone/>
               <a:defRPr sz="1875">
                 <a:solidFill>
                   <a:srgbClr val="E8F0ED"/>
@@ -8549,6 +8823,7 @@
           </a:p>
           <a:p xmlns:a="http://schemas.openxmlformats.org/drawingml/2006/main">
             <a:pPr>
+              <a:buNone/>
               <a:defRPr sz="1875">
                 <a:solidFill>
                   <a:srgbClr val="E8F0ED"/>
@@ -8613,6 +8888,7 @@
               </a:defRPr>
             </a:defPPr>
             <a:lvl1pPr>
+              <a:buNone/>
               <a:defRPr sz="2700" b="0">
                 <a:solidFill>
                   <a:srgbClr val="67D1BE"/>
@@ -8623,6 +8899,7 @@
               </a:defRPr>
             </a:lvl1pPr>
             <a:lvl2pPr>
+              <a:buNone/>
               <a:defRPr sz="2700" b="0">
                 <a:solidFill>
                   <a:srgbClr val="67D1BE"/>
@@ -8633,6 +8910,7 @@
               </a:defRPr>
             </a:lvl2pPr>
             <a:lvl3pPr>
+              <a:buNone/>
               <a:defRPr sz="2700" b="0">
                 <a:solidFill>
                   <a:srgbClr val="67D1BE"/>
@@ -8643,6 +8921,7 @@
               </a:defRPr>
             </a:lvl3pPr>
             <a:lvl4pPr>
+              <a:buNone/>
               <a:defRPr sz="2700" b="0">
                 <a:solidFill>
                   <a:srgbClr val="67D1BE"/>
@@ -8653,6 +8932,7 @@
               </a:defRPr>
             </a:lvl4pPr>
             <a:lvl5pPr>
+              <a:buNone/>
               <a:defRPr sz="2700" b="0">
                 <a:solidFill>
                   <a:srgbClr val="67D1BE"/>
@@ -8663,6 +8943,7 @@
               </a:defRPr>
             </a:lvl5pPr>
             <a:lvl6pPr>
+              <a:buNone/>
               <a:defRPr sz="2700" b="0">
                 <a:solidFill>
                   <a:srgbClr val="67D1BE"/>
@@ -8673,6 +8954,7 @@
               </a:defRPr>
             </a:lvl6pPr>
             <a:lvl7pPr>
+              <a:buNone/>
               <a:defRPr sz="2700" b="0">
                 <a:solidFill>
                   <a:srgbClr val="67D1BE"/>
@@ -8683,6 +8965,7 @@
               </a:defRPr>
             </a:lvl7pPr>
             <a:lvl8pPr>
+              <a:buNone/>
               <a:defRPr sz="2700" b="0">
                 <a:solidFill>
                   <a:srgbClr val="67D1BE"/>
@@ -8693,6 +8976,7 @@
               </a:defRPr>
             </a:lvl8pPr>
             <a:lvl9pPr>
+              <a:buNone/>
               <a:defRPr sz="2700" b="0">
                 <a:solidFill>
                   <a:srgbClr val="67D1BE"/>
@@ -8705,6 +8989,7 @@
           </a:lstStyle>
           <a:p xmlns:a="http://schemas.openxmlformats.org/drawingml/2006/main">
             <a:pPr>
+              <a:buNone/>
               <a:defRPr sz="2700" b="0">
                 <a:solidFill>
                   <a:srgbClr val="67D1BE"/>
@@ -8769,6 +9054,7 @@
               </a:defRPr>
             </a:defPPr>
             <a:lvl1pPr>
+              <a:buNone/>
               <a:defRPr sz="2250" b="0">
                 <a:solidFill>
                   <a:srgbClr val="E8F0ED"/>
@@ -8779,6 +9065,7 @@
               </a:defRPr>
             </a:lvl1pPr>
             <a:lvl2pPr>
+              <a:buNone/>
               <a:defRPr sz="2250" b="0">
                 <a:solidFill>
                   <a:srgbClr val="E8F0ED"/>
@@ -8789,6 +9076,7 @@
               </a:defRPr>
             </a:lvl2pPr>
             <a:lvl3pPr>
+              <a:buNone/>
               <a:defRPr sz="2250" b="0">
                 <a:solidFill>
                   <a:srgbClr val="E8F0ED"/>
@@ -8799,6 +9087,7 @@
               </a:defRPr>
             </a:lvl3pPr>
             <a:lvl4pPr>
+              <a:buNone/>
               <a:defRPr sz="2250" b="0">
                 <a:solidFill>
                   <a:srgbClr val="E8F0ED"/>
@@ -8809,6 +9098,7 @@
               </a:defRPr>
             </a:lvl4pPr>
             <a:lvl5pPr>
+              <a:buNone/>
               <a:defRPr sz="2250" b="0">
                 <a:solidFill>
                   <a:srgbClr val="E8F0ED"/>
@@ -8819,6 +9109,7 @@
               </a:defRPr>
             </a:lvl5pPr>
             <a:lvl6pPr>
+              <a:buNone/>
               <a:defRPr sz="2250" b="0">
                 <a:solidFill>
                   <a:srgbClr val="E8F0ED"/>
@@ -8829,6 +9120,7 @@
               </a:defRPr>
             </a:lvl6pPr>
             <a:lvl7pPr>
+              <a:buNone/>
               <a:defRPr sz="2250" b="0">
                 <a:solidFill>
                   <a:srgbClr val="E8F0ED"/>
@@ -8839,6 +9131,7 @@
               </a:defRPr>
             </a:lvl7pPr>
             <a:lvl8pPr>
+              <a:buNone/>
               <a:defRPr sz="2250" b="0">
                 <a:solidFill>
                   <a:srgbClr val="E8F0ED"/>
@@ -8849,6 +9142,7 @@
               </a:defRPr>
             </a:lvl8pPr>
             <a:lvl9pPr>
+              <a:buNone/>
               <a:defRPr sz="2250" b="0">
                 <a:solidFill>
                   <a:srgbClr val="E8F0ED"/>
@@ -8861,6 +9155,7 @@
           </a:lstStyle>
           <a:p xmlns:a="http://schemas.openxmlformats.org/drawingml/2006/main">
             <a:pPr>
+              <a:buNone/>
               <a:defRPr sz="2250" b="0">
                 <a:solidFill>
                   <a:srgbClr val="E8F0ED"/>
@@ -8884,6 +9179,7 @@
           </a:p>
           <a:p xmlns:a="http://schemas.openxmlformats.org/drawingml/2006/main">
             <a:pPr>
+              <a:buNone/>
               <a:defRPr sz="2250" b="0">
                 <a:solidFill>
                   <a:srgbClr val="E8F0ED"/>
@@ -8948,6 +9244,7 @@
               </a:defRPr>
             </a:defPPr>
             <a:lvl1pPr>
+              <a:buNone/>
               <a:defRPr sz="1875" b="0">
                 <a:solidFill>
                   <a:srgbClr val="A4B8BE"/>
@@ -8958,6 +9255,7 @@
               </a:defRPr>
             </a:lvl1pPr>
             <a:lvl2pPr>
+              <a:buNone/>
               <a:defRPr sz="1875" b="0">
                 <a:solidFill>
                   <a:srgbClr val="A4B8BE"/>
@@ -8968,6 +9266,7 @@
               </a:defRPr>
             </a:lvl2pPr>
             <a:lvl3pPr>
+              <a:buNone/>
               <a:defRPr sz="1875" b="0">
                 <a:solidFill>
                   <a:srgbClr val="A4B8BE"/>
@@ -8978,6 +9277,7 @@
               </a:defRPr>
             </a:lvl3pPr>
             <a:lvl4pPr>
+              <a:buNone/>
               <a:defRPr sz="1875" b="0">
                 <a:solidFill>
                   <a:srgbClr val="A4B8BE"/>
@@ -8988,6 +9288,7 @@
               </a:defRPr>
             </a:lvl4pPr>
             <a:lvl5pPr>
+              <a:buNone/>
               <a:defRPr sz="1875" b="0">
                 <a:solidFill>
                   <a:srgbClr val="A4B8BE"/>
@@ -8998,6 +9299,7 @@
               </a:defRPr>
             </a:lvl5pPr>
             <a:lvl6pPr>
+              <a:buNone/>
               <a:defRPr sz="1875" b="0">
                 <a:solidFill>
                   <a:srgbClr val="A4B8BE"/>
@@ -9008,6 +9310,7 @@
               </a:defRPr>
             </a:lvl6pPr>
             <a:lvl7pPr>
+              <a:buNone/>
               <a:defRPr sz="1875" b="0">
                 <a:solidFill>
                   <a:srgbClr val="A4B8BE"/>
@@ -9018,6 +9321,7 @@
               </a:defRPr>
             </a:lvl7pPr>
             <a:lvl8pPr>
+              <a:buNone/>
               <a:defRPr sz="1875" b="0">
                 <a:solidFill>
                   <a:srgbClr val="A4B8BE"/>
@@ -9028,6 +9332,7 @@
               </a:defRPr>
             </a:lvl8pPr>
             <a:lvl9pPr>
+              <a:buNone/>
               <a:defRPr sz="1875" b="0">
                 <a:solidFill>
                   <a:srgbClr val="A4B8BE"/>
@@ -9040,6 +9345,7 @@
           </a:lstStyle>
           <a:p xmlns:a="http://schemas.openxmlformats.org/drawingml/2006/main">
             <a:pPr>
+              <a:buNone/>
               <a:defRPr sz="1875" b="0">
                 <a:solidFill>
                   <a:srgbClr val="A4B8BE"/>
@@ -9097,7 +9403,7 @@
           <p:cNvPr id="7" name="">
             <a:extLst xmlns:a="http://schemas.openxmlformats.org/drawingml/2006/main">
               <a:ext uri="{FF2B5EF4-FFF2-40B4-BE49-F238E27FC236}">
-                <a16:creationId xmlns:a16="http://schemas.microsoft.com/office/drawing/2014/main" id="{8F7AEBF7-7AAA-433A-A2DF-B9C8093A7428}"/>
+                <a16:creationId xmlns:a16="http://schemas.microsoft.com/office/drawing/2014/main" id="{4453490F-6E21-4C5E-A5B6-9ADB11765869}"/>
               </a:ext>
             </a:extLst>
           </p:cNvPr>
@@ -9128,7 +9434,7 @@
           <p:cNvPr id="6" name="">
             <a:extLst xmlns:a="http://schemas.openxmlformats.org/drawingml/2006/main">
               <a:ext uri="{FF2B5EF4-FFF2-40B4-BE49-F238E27FC236}">
-                <a16:creationId xmlns:a16="http://schemas.microsoft.com/office/drawing/2014/main" id="{0FC5D604-FE09-4D92-A558-94CD71E62BC2}"/>
+                <a16:creationId xmlns:a16="http://schemas.microsoft.com/office/drawing/2014/main" id="{05F8566F-5E42-470D-B943-58FCB47E61B9}"/>
               </a:ext>
             </a:extLst>
           </p:cNvPr>
@@ -9195,6 +9501,7 @@
               </a:defRPr>
             </a:defPPr>
             <a:lvl1pPr>
+              <a:buNone/>
               <a:defRPr sz="3450" b="1">
                 <a:solidFill>
                   <a:srgbClr val="E8F0ED"/>
@@ -9205,6 +9512,7 @@
               </a:defRPr>
             </a:lvl1pPr>
             <a:lvl2pPr>
+              <a:buNone/>
               <a:defRPr sz="3450" b="1">
                 <a:solidFill>
                   <a:srgbClr val="E8F0ED"/>
@@ -9215,6 +9523,7 @@
               </a:defRPr>
             </a:lvl2pPr>
             <a:lvl3pPr>
+              <a:buNone/>
               <a:defRPr sz="3450" b="1">
                 <a:solidFill>
                   <a:srgbClr val="E8F0ED"/>
@@ -9225,6 +9534,7 @@
               </a:defRPr>
             </a:lvl3pPr>
             <a:lvl4pPr>
+              <a:buNone/>
               <a:defRPr sz="3450" b="1">
                 <a:solidFill>
                   <a:srgbClr val="E8F0ED"/>
@@ -9235,6 +9545,7 @@
               </a:defRPr>
             </a:lvl4pPr>
             <a:lvl5pPr>
+              <a:buNone/>
               <a:defRPr sz="3450" b="1">
                 <a:solidFill>
                   <a:srgbClr val="E8F0ED"/>
@@ -9245,6 +9556,7 @@
               </a:defRPr>
             </a:lvl5pPr>
             <a:lvl6pPr>
+              <a:buNone/>
               <a:defRPr sz="3450" b="1">
                 <a:solidFill>
                   <a:srgbClr val="E8F0ED"/>
@@ -9255,6 +9567,7 @@
               </a:defRPr>
             </a:lvl6pPr>
             <a:lvl7pPr>
+              <a:buNone/>
               <a:defRPr sz="3450" b="1">
                 <a:solidFill>
                   <a:srgbClr val="E8F0ED"/>
@@ -9265,6 +9578,7 @@
               </a:defRPr>
             </a:lvl7pPr>
             <a:lvl8pPr>
+              <a:buNone/>
               <a:defRPr sz="3450" b="1">
                 <a:solidFill>
                   <a:srgbClr val="E8F0ED"/>
@@ -9275,6 +9589,7 @@
               </a:defRPr>
             </a:lvl8pPr>
             <a:lvl9pPr>
+              <a:buNone/>
               <a:defRPr sz="3450" b="1">
                 <a:solidFill>
                   <a:srgbClr val="E8F0ED"/>
@@ -9287,6 +9602,7 @@
           </a:lstStyle>
           <a:p xmlns:a="http://schemas.openxmlformats.org/drawingml/2006/main">
             <a:pPr>
+              <a:buNone/>
               <a:defRPr sz="3450" b="1">
                 <a:solidFill>
                   <a:srgbClr val="E8F0ED"/>
@@ -9351,6 +9667,7 @@
               </a:defRPr>
             </a:defPPr>
             <a:lvl1pPr>
+              <a:buNone/>
               <a:defRPr sz="1350" b="0">
                 <a:solidFill>
                   <a:srgbClr val="A4B8BE"/>
@@ -9361,6 +9678,7 @@
               </a:defRPr>
             </a:lvl1pPr>
             <a:lvl2pPr>
+              <a:buNone/>
               <a:defRPr sz="1350" b="0">
                 <a:solidFill>
                   <a:srgbClr val="A4B8BE"/>
@@ -9371,6 +9689,7 @@
               </a:defRPr>
             </a:lvl2pPr>
             <a:lvl3pPr>
+              <a:buNone/>
               <a:defRPr sz="1350" b="0">
                 <a:solidFill>
                   <a:srgbClr val="A4B8BE"/>
@@ -9381,6 +9700,7 @@
               </a:defRPr>
             </a:lvl3pPr>
             <a:lvl4pPr>
+              <a:buNone/>
               <a:defRPr sz="1350" b="0">
                 <a:solidFill>
                   <a:srgbClr val="A4B8BE"/>
@@ -9391,6 +9711,7 @@
               </a:defRPr>
             </a:lvl4pPr>
             <a:lvl5pPr>
+              <a:buNone/>
               <a:defRPr sz="1350" b="0">
                 <a:solidFill>
                   <a:srgbClr val="A4B8BE"/>
@@ -9401,6 +9722,7 @@
               </a:defRPr>
             </a:lvl5pPr>
             <a:lvl6pPr>
+              <a:buNone/>
               <a:defRPr sz="1350" b="0">
                 <a:solidFill>
                   <a:srgbClr val="A4B8BE"/>
@@ -9411,6 +9733,7 @@
               </a:defRPr>
             </a:lvl6pPr>
             <a:lvl7pPr>
+              <a:buNone/>
               <a:defRPr sz="1350" b="0">
                 <a:solidFill>
                   <a:srgbClr val="A4B8BE"/>
@@ -9421,6 +9744,7 @@
               </a:defRPr>
             </a:lvl7pPr>
             <a:lvl8pPr>
+              <a:buNone/>
               <a:defRPr sz="1350" b="0">
                 <a:solidFill>
                   <a:srgbClr val="A4B8BE"/>
@@ -9431,6 +9755,7 @@
               </a:defRPr>
             </a:lvl8pPr>
             <a:lvl9pPr>
+              <a:buNone/>
               <a:defRPr sz="1350" b="0">
                 <a:solidFill>
                   <a:srgbClr val="A4B8BE"/>
@@ -9443,6 +9768,7 @@
           </a:lstStyle>
           <a:p xmlns:a="http://schemas.openxmlformats.org/drawingml/2006/main">
             <a:pPr>
+              <a:buNone/>
               <a:defRPr sz="1350" b="0">
                 <a:solidFill>
                   <a:srgbClr val="A4B8BE"/>
@@ -9511,6 +9837,7 @@
               </a:defRPr>
             </a:defPPr>
             <a:lvl1pPr>
+              <a:buNone/>
               <a:defRPr sz="1875">
                 <a:solidFill>
                   <a:srgbClr val="E8F0ED"/>
@@ -9521,6 +9848,7 @@
               </a:defRPr>
             </a:lvl1pPr>
             <a:lvl2pPr>
+              <a:buNone/>
               <a:defRPr sz="1875">
                 <a:solidFill>
                   <a:srgbClr val="E8F0ED"/>
@@ -9531,6 +9859,7 @@
               </a:defRPr>
             </a:lvl2pPr>
             <a:lvl3pPr>
+              <a:buNone/>
               <a:defRPr sz="1875">
                 <a:solidFill>
                   <a:srgbClr val="E8F0ED"/>
@@ -9541,6 +9870,7 @@
               </a:defRPr>
             </a:lvl3pPr>
             <a:lvl4pPr>
+              <a:buNone/>
               <a:defRPr sz="1875">
                 <a:solidFill>
                   <a:srgbClr val="E8F0ED"/>
@@ -9551,6 +9881,7 @@
               </a:defRPr>
             </a:lvl4pPr>
             <a:lvl5pPr>
+              <a:buNone/>
               <a:defRPr sz="1875">
                 <a:solidFill>
                   <a:srgbClr val="E8F0ED"/>
@@ -9561,6 +9892,7 @@
               </a:defRPr>
             </a:lvl5pPr>
             <a:lvl6pPr>
+              <a:buNone/>
               <a:defRPr sz="1875">
                 <a:solidFill>
                   <a:srgbClr val="E8F0ED"/>
@@ -9571,6 +9903,7 @@
               </a:defRPr>
             </a:lvl6pPr>
             <a:lvl7pPr>
+              <a:buNone/>
               <a:defRPr sz="1875">
                 <a:solidFill>
                   <a:srgbClr val="E8F0ED"/>
@@ -9581,6 +9914,7 @@
               </a:defRPr>
             </a:lvl7pPr>
             <a:lvl8pPr>
+              <a:buNone/>
               <a:defRPr sz="1875">
                 <a:solidFill>
                   <a:srgbClr val="E8F0ED"/>
@@ -9591,6 +9925,7 @@
               </a:defRPr>
             </a:lvl8pPr>
             <a:lvl9pPr>
+              <a:buNone/>
               <a:defRPr sz="1875">
                 <a:solidFill>
                   <a:srgbClr val="E8F0ED"/>
@@ -9603,6 +9938,7 @@
           </a:lstStyle>
           <a:p xmlns:a="http://schemas.openxmlformats.org/drawingml/2006/main">
             <a:pPr>
+              <a:buNone/>
               <a:defRPr sz="1875">
                 <a:solidFill>
                   <a:srgbClr val="E8F0ED"/>
@@ -9626,6 +9962,7 @@
           </a:p>
           <a:p xmlns:a="http://schemas.openxmlformats.org/drawingml/2006/main">
             <a:pPr>
+              <a:buNone/>
               <a:defRPr sz="1875">
                 <a:solidFill>
                   <a:srgbClr val="E8F0ED"/>
@@ -9694,6 +10031,7 @@
               </a:defRPr>
             </a:defPPr>
             <a:lvl1pPr>
+              <a:buNone/>
               <a:defRPr sz="1875">
                 <a:solidFill>
                   <a:srgbClr val="E8F0ED"/>
@@ -9704,6 +10042,7 @@
               </a:defRPr>
             </a:lvl1pPr>
             <a:lvl2pPr>
+              <a:buNone/>
               <a:defRPr sz="1875">
                 <a:solidFill>
                   <a:srgbClr val="E8F0ED"/>
@@ -9714,6 +10053,7 @@
               </a:defRPr>
             </a:lvl2pPr>
             <a:lvl3pPr>
+              <a:buNone/>
               <a:defRPr sz="1875">
                 <a:solidFill>
                   <a:srgbClr val="E8F0ED"/>
@@ -9724,6 +10064,7 @@
               </a:defRPr>
             </a:lvl3pPr>
             <a:lvl4pPr>
+              <a:buNone/>
               <a:defRPr sz="1875">
                 <a:solidFill>
                   <a:srgbClr val="E8F0ED"/>
@@ -9734,6 +10075,7 @@
               </a:defRPr>
             </a:lvl4pPr>
             <a:lvl5pPr>
+              <a:buNone/>
               <a:defRPr sz="1875">
                 <a:solidFill>
                   <a:srgbClr val="E8F0ED"/>
@@ -9744,6 +10086,7 @@
               </a:defRPr>
             </a:lvl5pPr>
             <a:lvl6pPr>
+              <a:buNone/>
               <a:defRPr sz="1875">
                 <a:solidFill>
                   <a:srgbClr val="E8F0ED"/>
@@ -9754,6 +10097,7 @@
               </a:defRPr>
             </a:lvl6pPr>
             <a:lvl7pPr>
+              <a:buNone/>
               <a:defRPr sz="1875">
                 <a:solidFill>
                   <a:srgbClr val="E8F0ED"/>
@@ -9764,6 +10108,7 @@
               </a:defRPr>
             </a:lvl7pPr>
             <a:lvl8pPr>
+              <a:buNone/>
               <a:defRPr sz="1875">
                 <a:solidFill>
                   <a:srgbClr val="E8F0ED"/>
@@ -9774,6 +10119,7 @@
               </a:defRPr>
             </a:lvl8pPr>
             <a:lvl9pPr>
+              <a:buNone/>
               <a:defRPr sz="1875">
                 <a:solidFill>
                   <a:srgbClr val="E8F0ED"/>
@@ -9786,6 +10132,7 @@
           </a:lstStyle>
           <a:p xmlns:a="http://schemas.openxmlformats.org/drawingml/2006/main">
             <a:pPr>
+              <a:buNone/>
               <a:defRPr sz="1875">
                 <a:solidFill>
                   <a:srgbClr val="E8F0ED"/>
@@ -9809,6 +10156,7 @@
           </a:p>
           <a:p xmlns:a="http://schemas.openxmlformats.org/drawingml/2006/main">
             <a:pPr>
+              <a:buNone/>
               <a:defRPr sz="1875">
                 <a:solidFill>
                   <a:srgbClr val="E8F0ED"/>
@@ -9877,6 +10225,7 @@
               </a:defRPr>
             </a:defPPr>
             <a:lvl1pPr>
+              <a:buNone/>
               <a:defRPr sz="1875">
                 <a:solidFill>
                   <a:srgbClr val="E8F0ED"/>
@@ -9887,6 +10236,7 @@
               </a:defRPr>
             </a:lvl1pPr>
             <a:lvl2pPr>
+              <a:buNone/>
               <a:defRPr sz="1875">
                 <a:solidFill>
                   <a:srgbClr val="E8F0ED"/>
@@ -9897,6 +10247,7 @@
               </a:defRPr>
             </a:lvl2pPr>
             <a:lvl3pPr>
+              <a:buNone/>
               <a:defRPr sz="1875">
                 <a:solidFill>
                   <a:srgbClr val="E8F0ED"/>
@@ -9907,6 +10258,7 @@
               </a:defRPr>
             </a:lvl3pPr>
             <a:lvl4pPr>
+              <a:buNone/>
               <a:defRPr sz="1875">
                 <a:solidFill>
                   <a:srgbClr val="E8F0ED"/>
@@ -9917,6 +10269,7 @@
               </a:defRPr>
             </a:lvl4pPr>
             <a:lvl5pPr>
+              <a:buNone/>
               <a:defRPr sz="1875">
                 <a:solidFill>
                   <a:srgbClr val="E8F0ED"/>
@@ -9927,6 +10280,7 @@
               </a:defRPr>
             </a:lvl5pPr>
             <a:lvl6pPr>
+              <a:buNone/>
               <a:defRPr sz="1875">
                 <a:solidFill>
                   <a:srgbClr val="E8F0ED"/>
@@ -9937,6 +10291,7 @@
               </a:defRPr>
             </a:lvl6pPr>
             <a:lvl7pPr>
+              <a:buNone/>
               <a:defRPr sz="1875">
                 <a:solidFill>
                   <a:srgbClr val="E8F0ED"/>
@@ -9947,6 +10302,7 @@
               </a:defRPr>
             </a:lvl7pPr>
             <a:lvl8pPr>
+              <a:buNone/>
               <a:defRPr sz="1875">
                 <a:solidFill>
                   <a:srgbClr val="E8F0ED"/>
@@ -9957,6 +10313,7 @@
               </a:defRPr>
             </a:lvl8pPr>
             <a:lvl9pPr>
+              <a:buNone/>
               <a:defRPr sz="1875">
                 <a:solidFill>
                   <a:srgbClr val="E8F0ED"/>
@@ -9969,6 +10326,7 @@
           </a:lstStyle>
           <a:p xmlns:a="http://schemas.openxmlformats.org/drawingml/2006/main">
             <a:pPr>
+              <a:buNone/>
               <a:defRPr sz="1875">
                 <a:solidFill>
                   <a:srgbClr val="E8F0ED"/>
@@ -9992,6 +10350,7 @@
           </a:p>
           <a:p xmlns:a="http://schemas.openxmlformats.org/drawingml/2006/main">
             <a:pPr>
+              <a:buNone/>
               <a:defRPr sz="1875">
                 <a:solidFill>
                   <a:srgbClr val="E8F0ED"/>
@@ -10056,6 +10415,7 @@
               </a:defRPr>
             </a:defPPr>
             <a:lvl1pPr>
+              <a:buNone/>
               <a:defRPr sz="1800" b="0">
                 <a:solidFill>
                   <a:srgbClr val="A4B8BE"/>
@@ -10066,6 +10426,7 @@
               </a:defRPr>
             </a:lvl1pPr>
             <a:lvl2pPr>
+              <a:buNone/>
               <a:defRPr sz="1800" b="0">
                 <a:solidFill>
                   <a:srgbClr val="A4B8BE"/>
@@ -10076,6 +10437,7 @@
               </a:defRPr>
             </a:lvl2pPr>
             <a:lvl3pPr>
+              <a:buNone/>
               <a:defRPr sz="1800" b="0">
                 <a:solidFill>
                   <a:srgbClr val="A4B8BE"/>
@@ -10086,6 +10448,7 @@
               </a:defRPr>
             </a:lvl3pPr>
             <a:lvl4pPr>
+              <a:buNone/>
               <a:defRPr sz="1800" b="0">
                 <a:solidFill>
                   <a:srgbClr val="A4B8BE"/>
@@ -10096,6 +10459,7 @@
               </a:defRPr>
             </a:lvl4pPr>
             <a:lvl5pPr>
+              <a:buNone/>
               <a:defRPr sz="1800" b="0">
                 <a:solidFill>
                   <a:srgbClr val="A4B8BE"/>
@@ -10106,6 +10470,7 @@
               </a:defRPr>
             </a:lvl5pPr>
             <a:lvl6pPr>
+              <a:buNone/>
               <a:defRPr sz="1800" b="0">
                 <a:solidFill>
                   <a:srgbClr val="A4B8BE"/>
@@ -10116,6 +10481,7 @@
               </a:defRPr>
             </a:lvl6pPr>
             <a:lvl7pPr>
+              <a:buNone/>
               <a:defRPr sz="1800" b="0">
                 <a:solidFill>
                   <a:srgbClr val="A4B8BE"/>
@@ -10126,6 +10492,7 @@
               </a:defRPr>
             </a:lvl7pPr>
             <a:lvl8pPr>
+              <a:buNone/>
               <a:defRPr sz="1800" b="0">
                 <a:solidFill>
                   <a:srgbClr val="A4B8BE"/>
@@ -10136,6 +10503,7 @@
               </a:defRPr>
             </a:lvl8pPr>
             <a:lvl9pPr>
+              <a:buNone/>
               <a:defRPr sz="1800" b="0">
                 <a:solidFill>
                   <a:srgbClr val="A4B8BE"/>
@@ -10148,6 +10516,7 @@
           </a:lstStyle>
           <a:p xmlns:a="http://schemas.openxmlformats.org/drawingml/2006/main">
             <a:pPr>
+              <a:buNone/>
               <a:defRPr sz="1800" b="0">
                 <a:solidFill>
                   <a:srgbClr val="A4B8BE"/>
@@ -10176,7 +10545,7 @@
           <p:cNvPr id="9" name="">
             <a:extLst xmlns:a="http://schemas.openxmlformats.org/drawingml/2006/main">
               <a:ext uri="{FF2B5EF4-FFF2-40B4-BE49-F238E27FC236}">
-                <a16:creationId xmlns:a16="http://schemas.microsoft.com/office/drawing/2014/main" id="{75E38AD0-63D9-4E58-B36A-CB1AD46AA5F6}"/>
+                <a16:creationId xmlns:a16="http://schemas.microsoft.com/office/drawing/2014/main" id="{D6CA15E4-2C6A-4807-8150-8F439081DD08}"/>
               </a:ext>
             </a:extLst>
           </p:cNvPr>
@@ -10186,7 +10555,7 @@
           <p:nvPr/>
         </p:nvPicPr>
         <p:blipFill>
-          <a:blip xmlns:r="http://schemas.openxmlformats.org/officeDocument/2006/relationships" xmlns:a="http://schemas.openxmlformats.org/drawingml/2006/main" r:embed="R5132b62a408f4156"/>
+          <a:blip xmlns:r="http://schemas.openxmlformats.org/officeDocument/2006/relationships" xmlns:a="http://schemas.openxmlformats.org/drawingml/2006/main" r:embed="Rf8f98838541f49a8"/>
           <a:stretch xmlns:a="http://schemas.openxmlformats.org/drawingml/2006/main"/>
         </p:blipFill>
         <p:spPr>
@@ -10240,6 +10609,7 @@
               </a:defRPr>
             </a:defPPr>
             <a:lvl1pPr>
+              <a:buNone/>
               <a:defRPr sz="2025" b="0">
                 <a:solidFill>
                   <a:srgbClr val="67D1BE"/>
@@ -10250,6 +10620,7 @@
               </a:defRPr>
             </a:lvl1pPr>
             <a:lvl2pPr>
+              <a:buNone/>
               <a:defRPr sz="2025" b="0">
                 <a:solidFill>
                   <a:srgbClr val="67D1BE"/>
@@ -10260,6 +10631,7 @@
               </a:defRPr>
             </a:lvl2pPr>
             <a:lvl3pPr>
+              <a:buNone/>
               <a:defRPr sz="2025" b="0">
                 <a:solidFill>
                   <a:srgbClr val="67D1BE"/>
@@ -10270,6 +10642,7 @@
               </a:defRPr>
             </a:lvl3pPr>
             <a:lvl4pPr>
+              <a:buNone/>
               <a:defRPr sz="2025" b="0">
                 <a:solidFill>
                   <a:srgbClr val="67D1BE"/>
@@ -10280,6 +10653,7 @@
               </a:defRPr>
             </a:lvl4pPr>
             <a:lvl5pPr>
+              <a:buNone/>
               <a:defRPr sz="2025" b="0">
                 <a:solidFill>
                   <a:srgbClr val="67D1BE"/>
@@ -10290,6 +10664,7 @@
               </a:defRPr>
             </a:lvl5pPr>
             <a:lvl6pPr>
+              <a:buNone/>
               <a:defRPr sz="2025" b="0">
                 <a:solidFill>
                   <a:srgbClr val="67D1BE"/>
@@ -10300,6 +10675,7 @@
               </a:defRPr>
             </a:lvl6pPr>
             <a:lvl7pPr>
+              <a:buNone/>
               <a:defRPr sz="2025" b="0">
                 <a:solidFill>
                   <a:srgbClr val="67D1BE"/>
@@ -10310,6 +10686,7 @@
               </a:defRPr>
             </a:lvl7pPr>
             <a:lvl8pPr>
+              <a:buNone/>
               <a:defRPr sz="2025" b="0">
                 <a:solidFill>
                   <a:srgbClr val="67D1BE"/>
@@ -10320,6 +10697,7 @@
               </a:defRPr>
             </a:lvl8pPr>
             <a:lvl9pPr>
+              <a:buNone/>
               <a:defRPr sz="2025" b="0">
                 <a:solidFill>
                   <a:srgbClr val="67D1BE"/>
@@ -10332,6 +10710,7 @@
           </a:lstStyle>
           <a:p xmlns:a="http://schemas.openxmlformats.org/drawingml/2006/main">
             <a:pPr>
+              <a:buNone/>
               <a:defRPr sz="2025" b="0">
                 <a:solidFill>
                   <a:srgbClr val="67D1BE"/>
@@ -10355,6 +10734,7 @@
           </a:p>
           <a:p xmlns:a="http://schemas.openxmlformats.org/drawingml/2006/main">
             <a:pPr>
+              <a:buNone/>
               <a:defRPr sz="2025" b="0">
                 <a:solidFill>
                   <a:srgbClr val="67D1BE"/>
@@ -10448,6 +10828,7 @@
               </a:defRPr>
             </a:defPPr>
             <a:lvl1pPr>
+              <a:buNone/>
               <a:defRPr sz="3450" b="1">
                 <a:solidFill>
                   <a:srgbClr val="E8F0ED"/>
@@ -10458,6 +10839,7 @@
               </a:defRPr>
             </a:lvl1pPr>
             <a:lvl2pPr>
+              <a:buNone/>
               <a:defRPr sz="3450" b="1">
                 <a:solidFill>
                   <a:srgbClr val="E8F0ED"/>
@@ -10468,6 +10850,7 @@
               </a:defRPr>
             </a:lvl2pPr>
             <a:lvl3pPr>
+              <a:buNone/>
               <a:defRPr sz="3450" b="1">
                 <a:solidFill>
                   <a:srgbClr val="E8F0ED"/>
@@ -10478,6 +10861,7 @@
               </a:defRPr>
             </a:lvl3pPr>
             <a:lvl4pPr>
+              <a:buNone/>
               <a:defRPr sz="3450" b="1">
                 <a:solidFill>
                   <a:srgbClr val="E8F0ED"/>
@@ -10488,6 +10872,7 @@
               </a:defRPr>
             </a:lvl4pPr>
             <a:lvl5pPr>
+              <a:buNone/>
               <a:defRPr sz="3450" b="1">
                 <a:solidFill>
                   <a:srgbClr val="E8F0ED"/>
@@ -10498,6 +10883,7 @@
               </a:defRPr>
             </a:lvl5pPr>
             <a:lvl6pPr>
+              <a:buNone/>
               <a:defRPr sz="3450" b="1">
                 <a:solidFill>
                   <a:srgbClr val="E8F0ED"/>
@@ -10508,6 +10894,7 @@
               </a:defRPr>
             </a:lvl6pPr>
             <a:lvl7pPr>
+              <a:buNone/>
               <a:defRPr sz="3450" b="1">
                 <a:solidFill>
                   <a:srgbClr val="E8F0ED"/>
@@ -10518,6 +10905,7 @@
               </a:defRPr>
             </a:lvl7pPr>
             <a:lvl8pPr>
+              <a:buNone/>
               <a:defRPr sz="3450" b="1">
                 <a:solidFill>
                   <a:srgbClr val="E8F0ED"/>
@@ -10528,6 +10916,7 @@
               </a:defRPr>
             </a:lvl8pPr>
             <a:lvl9pPr>
+              <a:buNone/>
               <a:defRPr sz="3450" b="1">
                 <a:solidFill>
                   <a:srgbClr val="E8F0ED"/>
@@ -10540,6 +10929,7 @@
           </a:lstStyle>
           <a:p xmlns:a="http://schemas.openxmlformats.org/drawingml/2006/main">
             <a:pPr>
+              <a:buNone/>
               <a:defRPr sz="3450" b="1">
                 <a:solidFill>
                   <a:srgbClr val="E8F0ED"/>
@@ -10604,6 +10994,7 @@
               </a:defRPr>
             </a:defPPr>
             <a:lvl1pPr>
+              <a:buNone/>
               <a:defRPr sz="1350" b="0">
                 <a:solidFill>
                   <a:srgbClr val="A4B8BE"/>
@@ -10614,6 +11005,7 @@
               </a:defRPr>
             </a:lvl1pPr>
             <a:lvl2pPr>
+              <a:buNone/>
               <a:defRPr sz="1350" b="0">
                 <a:solidFill>
                   <a:srgbClr val="A4B8BE"/>
@@ -10624,6 +11016,7 @@
               </a:defRPr>
             </a:lvl2pPr>
             <a:lvl3pPr>
+              <a:buNone/>
               <a:defRPr sz="1350" b="0">
                 <a:solidFill>
                   <a:srgbClr val="A4B8BE"/>
@@ -10634,6 +11027,7 @@
               </a:defRPr>
             </a:lvl3pPr>
             <a:lvl4pPr>
+              <a:buNone/>
               <a:defRPr sz="1350" b="0">
                 <a:solidFill>
                   <a:srgbClr val="A4B8BE"/>
@@ -10644,6 +11038,7 @@
               </a:defRPr>
             </a:lvl4pPr>
             <a:lvl5pPr>
+              <a:buNone/>
               <a:defRPr sz="1350" b="0">
                 <a:solidFill>
                   <a:srgbClr val="A4B8BE"/>
@@ -10654,6 +11049,7 @@
               </a:defRPr>
             </a:lvl5pPr>
             <a:lvl6pPr>
+              <a:buNone/>
               <a:defRPr sz="1350" b="0">
                 <a:solidFill>
                   <a:srgbClr val="A4B8BE"/>
@@ -10664,6 +11060,7 @@
               </a:defRPr>
             </a:lvl6pPr>
             <a:lvl7pPr>
+              <a:buNone/>
               <a:defRPr sz="1350" b="0">
                 <a:solidFill>
                   <a:srgbClr val="A4B8BE"/>
@@ -10674,6 +11071,7 @@
               </a:defRPr>
             </a:lvl7pPr>
             <a:lvl8pPr>
+              <a:buNone/>
               <a:defRPr sz="1350" b="0">
                 <a:solidFill>
                   <a:srgbClr val="A4B8BE"/>
@@ -10684,6 +11082,7 @@
               </a:defRPr>
             </a:lvl8pPr>
             <a:lvl9pPr>
+              <a:buNone/>
               <a:defRPr sz="1350" b="0">
                 <a:solidFill>
                   <a:srgbClr val="A4B8BE"/>
@@ -10696,6 +11095,7 @@
           </a:lstStyle>
           <a:p xmlns:a="http://schemas.openxmlformats.org/drawingml/2006/main">
             <a:pPr>
+              <a:buNone/>
               <a:defRPr sz="1350" b="0">
                 <a:solidFill>
                   <a:srgbClr val="A4B8BE"/>
@@ -10760,6 +11160,7 @@
               </a:defRPr>
             </a:defPPr>
             <a:lvl1pPr>
+              <a:buNone/>
               <a:defRPr sz="2400" b="1">
                 <a:solidFill>
                   <a:srgbClr val="67D1BE"/>
@@ -10770,6 +11171,7 @@
               </a:defRPr>
             </a:lvl1pPr>
             <a:lvl2pPr>
+              <a:buNone/>
               <a:defRPr sz="2400" b="1">
                 <a:solidFill>
                   <a:srgbClr val="67D1BE"/>
@@ -10780,6 +11182,7 @@
               </a:defRPr>
             </a:lvl2pPr>
             <a:lvl3pPr>
+              <a:buNone/>
               <a:defRPr sz="2400" b="1">
                 <a:solidFill>
                   <a:srgbClr val="67D1BE"/>
@@ -10790,6 +11193,7 @@
               </a:defRPr>
             </a:lvl3pPr>
             <a:lvl4pPr>
+              <a:buNone/>
               <a:defRPr sz="2400" b="1">
                 <a:solidFill>
                   <a:srgbClr val="67D1BE"/>
@@ -10800,6 +11204,7 @@
               </a:defRPr>
             </a:lvl4pPr>
             <a:lvl5pPr>
+              <a:buNone/>
               <a:defRPr sz="2400" b="1">
                 <a:solidFill>
                   <a:srgbClr val="67D1BE"/>
@@ -10810,6 +11215,7 @@
               </a:defRPr>
             </a:lvl5pPr>
             <a:lvl6pPr>
+              <a:buNone/>
               <a:defRPr sz="2400" b="1">
                 <a:solidFill>
                   <a:srgbClr val="67D1BE"/>
@@ -10820,6 +11226,7 @@
               </a:defRPr>
             </a:lvl6pPr>
             <a:lvl7pPr>
+              <a:buNone/>
               <a:defRPr sz="2400" b="1">
                 <a:solidFill>
                   <a:srgbClr val="67D1BE"/>
@@ -10830,6 +11237,7 @@
               </a:defRPr>
             </a:lvl7pPr>
             <a:lvl8pPr>
+              <a:buNone/>
               <a:defRPr sz="2400" b="1">
                 <a:solidFill>
                   <a:srgbClr val="67D1BE"/>
@@ -10840,6 +11248,7 @@
               </a:defRPr>
             </a:lvl8pPr>
             <a:lvl9pPr>
+              <a:buNone/>
               <a:defRPr sz="2400" b="1">
                 <a:solidFill>
                   <a:srgbClr val="67D1BE"/>
@@ -10852,6 +11261,7 @@
           </a:lstStyle>
           <a:p xmlns:a="http://schemas.openxmlformats.org/drawingml/2006/main">
             <a:pPr>
+              <a:buNone/>
               <a:defRPr sz="2400" b="1">
                 <a:solidFill>
                   <a:srgbClr val="67D1BE"/>
@@ -10916,6 +11326,7 @@
               </a:defRPr>
             </a:defPPr>
             <a:lvl1pPr>
+              <a:buNone/>
               <a:defRPr sz="2175" b="0">
                 <a:solidFill>
                   <a:srgbClr val="E8F0ED"/>
@@ -10926,6 +11337,7 @@
               </a:defRPr>
             </a:lvl1pPr>
             <a:lvl2pPr>
+              <a:buNone/>
               <a:defRPr sz="2175" b="0">
                 <a:solidFill>
                   <a:srgbClr val="E8F0ED"/>
@@ -10936,6 +11348,7 @@
               </a:defRPr>
             </a:lvl2pPr>
             <a:lvl3pPr>
+              <a:buNone/>
               <a:defRPr sz="2175" b="0">
                 <a:solidFill>
                   <a:srgbClr val="E8F0ED"/>
@@ -10946,6 +11359,7 @@
               </a:defRPr>
             </a:lvl3pPr>
             <a:lvl4pPr>
+              <a:buNone/>
               <a:defRPr sz="2175" b="0">
                 <a:solidFill>
                   <a:srgbClr val="E8F0ED"/>
@@ -10956,6 +11370,7 @@
               </a:defRPr>
             </a:lvl4pPr>
             <a:lvl5pPr>
+              <a:buNone/>
               <a:defRPr sz="2175" b="0">
                 <a:solidFill>
                   <a:srgbClr val="E8F0ED"/>
@@ -10966,6 +11381,7 @@
               </a:defRPr>
             </a:lvl5pPr>
             <a:lvl6pPr>
+              <a:buNone/>
               <a:defRPr sz="2175" b="0">
                 <a:solidFill>
                   <a:srgbClr val="E8F0ED"/>
@@ -10976,6 +11392,7 @@
               </a:defRPr>
             </a:lvl6pPr>
             <a:lvl7pPr>
+              <a:buNone/>
               <a:defRPr sz="2175" b="0">
                 <a:solidFill>
                   <a:srgbClr val="E8F0ED"/>
@@ -10986,6 +11403,7 @@
               </a:defRPr>
             </a:lvl7pPr>
             <a:lvl8pPr>
+              <a:buNone/>
               <a:defRPr sz="2175" b="0">
                 <a:solidFill>
                   <a:srgbClr val="E8F0ED"/>
@@ -10996,6 +11414,7 @@
               </a:defRPr>
             </a:lvl8pPr>
             <a:lvl9pPr>
+              <a:buNone/>
               <a:defRPr sz="2175" b="0">
                 <a:solidFill>
                   <a:srgbClr val="E8F0ED"/>
@@ -11008,6 +11427,7 @@
           </a:lstStyle>
           <a:p xmlns:a="http://schemas.openxmlformats.org/drawingml/2006/main">
             <a:pPr>
+              <a:buNone/>
               <a:defRPr sz="2175" b="0">
                 <a:solidFill>
                   <a:srgbClr val="E8F0ED"/>
@@ -11031,6 +11451,7 @@
           </a:p>
           <a:p xmlns:a="http://schemas.openxmlformats.org/drawingml/2006/main">
             <a:pPr>
+              <a:buNone/>
               <a:defRPr sz="2175" b="0">
                 <a:solidFill>
                   <a:srgbClr val="E8F0ED"/>
@@ -11054,6 +11475,7 @@
           </a:p>
           <a:p xmlns:a="http://schemas.openxmlformats.org/drawingml/2006/main">
             <a:pPr>
+              <a:buNone/>
               <a:defRPr sz="2175" b="0">
                 <a:solidFill>
                   <a:srgbClr val="E8F0ED"/>
@@ -11118,6 +11540,7 @@
               </a:defRPr>
             </a:defPPr>
             <a:lvl1pPr>
+              <a:buNone/>
               <a:defRPr sz="2250" b="0">
                 <a:solidFill>
                   <a:srgbClr val="E7A063"/>
@@ -11128,6 +11551,7 @@
               </a:defRPr>
             </a:lvl1pPr>
             <a:lvl2pPr>
+              <a:buNone/>
               <a:defRPr sz="2250" b="0">
                 <a:solidFill>
                   <a:srgbClr val="E7A063"/>
@@ -11138,6 +11562,7 @@
               </a:defRPr>
             </a:lvl2pPr>
             <a:lvl3pPr>
+              <a:buNone/>
               <a:defRPr sz="2250" b="0">
                 <a:solidFill>
                   <a:srgbClr val="E7A063"/>
@@ -11148,6 +11573,7 @@
               </a:defRPr>
             </a:lvl3pPr>
             <a:lvl4pPr>
+              <a:buNone/>
               <a:defRPr sz="2250" b="0">
                 <a:solidFill>
                   <a:srgbClr val="E7A063"/>
@@ -11158,6 +11584,7 @@
               </a:defRPr>
             </a:lvl4pPr>
             <a:lvl5pPr>
+              <a:buNone/>
               <a:defRPr sz="2250" b="0">
                 <a:solidFill>
                   <a:srgbClr val="E7A063"/>
@@ -11168,6 +11595,7 @@
               </a:defRPr>
             </a:lvl5pPr>
             <a:lvl6pPr>
+              <a:buNone/>
               <a:defRPr sz="2250" b="0">
                 <a:solidFill>
                   <a:srgbClr val="E7A063"/>
@@ -11178,6 +11606,7 @@
               </a:defRPr>
             </a:lvl6pPr>
             <a:lvl7pPr>
+              <a:buNone/>
               <a:defRPr sz="2250" b="0">
                 <a:solidFill>
                   <a:srgbClr val="E7A063"/>
@@ -11188,6 +11617,7 @@
               </a:defRPr>
             </a:lvl7pPr>
             <a:lvl8pPr>
+              <a:buNone/>
               <a:defRPr sz="2250" b="0">
                 <a:solidFill>
                   <a:srgbClr val="E7A063"/>
@@ -11198,6 +11628,7 @@
               </a:defRPr>
             </a:lvl8pPr>
             <a:lvl9pPr>
+              <a:buNone/>
               <a:defRPr sz="2250" b="0">
                 <a:solidFill>
                   <a:srgbClr val="E7A063"/>
@@ -11210,6 +11641,7 @@
           </a:lstStyle>
           <a:p xmlns:a="http://schemas.openxmlformats.org/drawingml/2006/main">
             <a:pPr>
+              <a:buNone/>
               <a:defRPr sz="2250" b="0">
                 <a:solidFill>
                   <a:srgbClr val="E7A063"/>
@@ -11233,6 +11665,7 @@
           </a:p>
           <a:p xmlns:a="http://schemas.openxmlformats.org/drawingml/2006/main">
             <a:pPr>
+              <a:buNone/>
               <a:defRPr sz="2250" b="0">
                 <a:solidFill>
                   <a:srgbClr val="E7A063"/>
@@ -11297,6 +11730,7 @@
               </a:defRPr>
             </a:defPPr>
             <a:lvl1pPr>
+              <a:buNone/>
               <a:defRPr sz="1725" b="0">
                 <a:solidFill>
                   <a:srgbClr val="A4B8BE"/>
@@ -11307,6 +11741,7 @@
               </a:defRPr>
             </a:lvl1pPr>
             <a:lvl2pPr>
+              <a:buNone/>
               <a:defRPr sz="1725" b="0">
                 <a:solidFill>
                   <a:srgbClr val="A4B8BE"/>
@@ -11317,6 +11752,7 @@
               </a:defRPr>
             </a:lvl2pPr>
             <a:lvl3pPr>
+              <a:buNone/>
               <a:defRPr sz="1725" b="0">
                 <a:solidFill>
                   <a:srgbClr val="A4B8BE"/>
@@ -11327,6 +11763,7 @@
               </a:defRPr>
             </a:lvl3pPr>
             <a:lvl4pPr>
+              <a:buNone/>
               <a:defRPr sz="1725" b="0">
                 <a:solidFill>
                   <a:srgbClr val="A4B8BE"/>
@@ -11337,6 +11774,7 @@
               </a:defRPr>
             </a:lvl4pPr>
             <a:lvl5pPr>
+              <a:buNone/>
               <a:defRPr sz="1725" b="0">
                 <a:solidFill>
                   <a:srgbClr val="A4B8BE"/>
@@ -11347,6 +11785,7 @@
               </a:defRPr>
             </a:lvl5pPr>
             <a:lvl6pPr>
+              <a:buNone/>
               <a:defRPr sz="1725" b="0">
                 <a:solidFill>
                   <a:srgbClr val="A4B8BE"/>
@@ -11357,6 +11796,7 @@
               </a:defRPr>
             </a:lvl6pPr>
             <a:lvl7pPr>
+              <a:buNone/>
               <a:defRPr sz="1725" b="0">
                 <a:solidFill>
                   <a:srgbClr val="A4B8BE"/>
@@ -11367,6 +11807,7 @@
               </a:defRPr>
             </a:lvl7pPr>
             <a:lvl8pPr>
+              <a:buNone/>
               <a:defRPr sz="1725" b="0">
                 <a:solidFill>
                   <a:srgbClr val="A4B8BE"/>
@@ -11377,6 +11818,7 @@
               </a:defRPr>
             </a:lvl8pPr>
             <a:lvl9pPr>
+              <a:buNone/>
               <a:defRPr sz="1725" b="0">
                 <a:solidFill>
                   <a:srgbClr val="A4B8BE"/>
@@ -11389,6 +11831,7 @@
           </a:lstStyle>
           <a:p xmlns:a="http://schemas.openxmlformats.org/drawingml/2006/main">
             <a:pPr>
+              <a:buNone/>
               <a:defRPr sz="1725" b="0">
                 <a:solidFill>
                   <a:srgbClr val="A4B8BE"/>
@@ -11417,7 +11860,7 @@
           <p:cNvPr id="7" name="">
             <a:extLst xmlns:a="http://schemas.openxmlformats.org/drawingml/2006/main">
               <a:ext uri="{FF2B5EF4-FFF2-40B4-BE49-F238E27FC236}">
-                <a16:creationId xmlns:a16="http://schemas.microsoft.com/office/drawing/2014/main" id="{395B46D3-FA0E-4421-B184-2E9287B6FDEB}"/>
+                <a16:creationId xmlns:a16="http://schemas.microsoft.com/office/drawing/2014/main" id="{F3F08530-B82B-472B-A9F7-D0951082F4FC}"/>
               </a:ext>
             </a:extLst>
           </p:cNvPr>
@@ -11427,7 +11870,7 @@
           <p:nvPr/>
         </p:nvPicPr>
         <p:blipFill>
-          <a:blip xmlns:r="http://schemas.openxmlformats.org/officeDocument/2006/relationships" xmlns:a="http://schemas.openxmlformats.org/drawingml/2006/main" r:embed="Raee92d6c94a147ee"/>
+          <a:blip xmlns:r="http://schemas.openxmlformats.org/officeDocument/2006/relationships" xmlns:a="http://schemas.openxmlformats.org/drawingml/2006/main" r:embed="R4c330572aea445e5"/>
           <a:stretch xmlns:a="http://schemas.openxmlformats.org/drawingml/2006/main"/>
         </p:blipFill>
         <p:spPr>
@@ -11510,6 +11953,7 @@
               </a:defRPr>
             </a:defPPr>
             <a:lvl1pPr>
+              <a:buNone/>
               <a:defRPr sz="3450" b="1">
                 <a:solidFill>
                   <a:srgbClr val="E8F0ED"/>
@@ -11520,6 +11964,7 @@
               </a:defRPr>
             </a:lvl1pPr>
             <a:lvl2pPr>
+              <a:buNone/>
               <a:defRPr sz="3450" b="1">
                 <a:solidFill>
                   <a:srgbClr val="E8F0ED"/>
@@ -11530,6 +11975,7 @@
               </a:defRPr>
             </a:lvl2pPr>
             <a:lvl3pPr>
+              <a:buNone/>
               <a:defRPr sz="3450" b="1">
                 <a:solidFill>
                   <a:srgbClr val="E8F0ED"/>
@@ -11540,6 +11986,7 @@
               </a:defRPr>
             </a:lvl3pPr>
             <a:lvl4pPr>
+              <a:buNone/>
               <a:defRPr sz="3450" b="1">
                 <a:solidFill>
                   <a:srgbClr val="E8F0ED"/>
@@ -11550,6 +11997,7 @@
               </a:defRPr>
             </a:lvl4pPr>
             <a:lvl5pPr>
+              <a:buNone/>
               <a:defRPr sz="3450" b="1">
                 <a:solidFill>
                   <a:srgbClr val="E8F0ED"/>
@@ -11560,6 +12008,7 @@
               </a:defRPr>
             </a:lvl5pPr>
             <a:lvl6pPr>
+              <a:buNone/>
               <a:defRPr sz="3450" b="1">
                 <a:solidFill>
                   <a:srgbClr val="E8F0ED"/>
@@ -11570,6 +12019,7 @@
               </a:defRPr>
             </a:lvl6pPr>
             <a:lvl7pPr>
+              <a:buNone/>
               <a:defRPr sz="3450" b="1">
                 <a:solidFill>
                   <a:srgbClr val="E8F0ED"/>
@@ -11580,6 +12030,7 @@
               </a:defRPr>
             </a:lvl7pPr>
             <a:lvl8pPr>
+              <a:buNone/>
               <a:defRPr sz="3450" b="1">
                 <a:solidFill>
                   <a:srgbClr val="E8F0ED"/>
@@ -11590,6 +12041,7 @@
               </a:defRPr>
             </a:lvl8pPr>
             <a:lvl9pPr>
+              <a:buNone/>
               <a:defRPr sz="3450" b="1">
                 <a:solidFill>
                   <a:srgbClr val="E8F0ED"/>
@@ -11602,6 +12054,7 @@
           </a:lstStyle>
           <a:p xmlns:a="http://schemas.openxmlformats.org/drawingml/2006/main">
             <a:pPr>
+              <a:buNone/>
               <a:defRPr sz="3450" b="1">
                 <a:solidFill>
                   <a:srgbClr val="E8F0ED"/>
@@ -11666,6 +12119,7 @@
               </a:defRPr>
             </a:defPPr>
             <a:lvl1pPr>
+              <a:buNone/>
               <a:defRPr sz="1350" b="0">
                 <a:solidFill>
                   <a:srgbClr val="A4B8BE"/>
@@ -11676,6 +12130,7 @@
               </a:defRPr>
             </a:lvl1pPr>
             <a:lvl2pPr>
+              <a:buNone/>
               <a:defRPr sz="1350" b="0">
                 <a:solidFill>
                   <a:srgbClr val="A4B8BE"/>
@@ -11686,6 +12141,7 @@
               </a:defRPr>
             </a:lvl2pPr>
             <a:lvl3pPr>
+              <a:buNone/>
               <a:defRPr sz="1350" b="0">
                 <a:solidFill>
                   <a:srgbClr val="A4B8BE"/>
@@ -11696,6 +12152,7 @@
               </a:defRPr>
             </a:lvl3pPr>
             <a:lvl4pPr>
+              <a:buNone/>
               <a:defRPr sz="1350" b="0">
                 <a:solidFill>
                   <a:srgbClr val="A4B8BE"/>
@@ -11706,6 +12163,7 @@
               </a:defRPr>
             </a:lvl4pPr>
             <a:lvl5pPr>
+              <a:buNone/>
               <a:defRPr sz="1350" b="0">
                 <a:solidFill>
                   <a:srgbClr val="A4B8BE"/>
@@ -11716,6 +12174,7 @@
               </a:defRPr>
             </a:lvl5pPr>
             <a:lvl6pPr>
+              <a:buNone/>
               <a:defRPr sz="1350" b="0">
                 <a:solidFill>
                   <a:srgbClr val="A4B8BE"/>
@@ -11726,6 +12185,7 @@
               </a:defRPr>
             </a:lvl6pPr>
             <a:lvl7pPr>
+              <a:buNone/>
               <a:defRPr sz="1350" b="0">
                 <a:solidFill>
                   <a:srgbClr val="A4B8BE"/>
@@ -11736,6 +12196,7 @@
               </a:defRPr>
             </a:lvl7pPr>
             <a:lvl8pPr>
+              <a:buNone/>
               <a:defRPr sz="1350" b="0">
                 <a:solidFill>
                   <a:srgbClr val="A4B8BE"/>
@@ -11746,6 +12207,7 @@
               </a:defRPr>
             </a:lvl8pPr>
             <a:lvl9pPr>
+              <a:buNone/>
               <a:defRPr sz="1350" b="0">
                 <a:solidFill>
                   <a:srgbClr val="A4B8BE"/>
@@ -11758,6 +12220,7 @@
           </a:lstStyle>
           <a:p xmlns:a="http://schemas.openxmlformats.org/drawingml/2006/main">
             <a:pPr>
+              <a:buNone/>
               <a:defRPr sz="1350" b="0">
                 <a:solidFill>
                   <a:srgbClr val="A4B8BE"/>
@@ -11786,7 +12249,7 @@
           <p:cNvPr id="3" name="">
             <a:extLst xmlns:a="http://schemas.openxmlformats.org/drawingml/2006/main">
               <a:ext uri="{FF2B5EF4-FFF2-40B4-BE49-F238E27FC236}">
-                <a16:creationId xmlns:a16="http://schemas.microsoft.com/office/drawing/2014/main" id="{A9E077AF-3B32-4BC7-A74D-AFE2306A1C3F}"/>
+                <a16:creationId xmlns:a16="http://schemas.microsoft.com/office/drawing/2014/main" id="{714CEEB3-956D-4E84-AD0E-4D70B8406331}"/>
               </a:ext>
             </a:extLst>
           </p:cNvPr>
@@ -11796,7 +12259,7 @@
           <p:nvPr/>
         </p:nvPicPr>
         <p:blipFill>
-          <a:blip xmlns:r="http://schemas.openxmlformats.org/officeDocument/2006/relationships" xmlns:a="http://schemas.openxmlformats.org/drawingml/2006/main" r:embed="R06dd88108567469d"/>
+          <a:blip xmlns:r="http://schemas.openxmlformats.org/officeDocument/2006/relationships" xmlns:a="http://schemas.openxmlformats.org/drawingml/2006/main" r:embed="Ra1116bc5500e4bac"/>
           <a:stretch xmlns:a="http://schemas.openxmlformats.org/drawingml/2006/main"/>
         </p:blipFill>
         <p:spPr>
@@ -11850,6 +12313,7 @@
               </a:defRPr>
             </a:defPPr>
             <a:lvl1pPr>
+              <a:buNone/>
               <a:defRPr sz="2325" b="1">
                 <a:solidFill>
                   <a:srgbClr val="67D1BE"/>
@@ -11860,6 +12324,7 @@
               </a:defRPr>
             </a:lvl1pPr>
             <a:lvl2pPr>
+              <a:buNone/>
               <a:defRPr sz="2325" b="1">
                 <a:solidFill>
                   <a:srgbClr val="67D1BE"/>
@@ -11870,6 +12335,7 @@
               </a:defRPr>
             </a:lvl2pPr>
             <a:lvl3pPr>
+              <a:buNone/>
               <a:defRPr sz="2325" b="1">
                 <a:solidFill>
                   <a:srgbClr val="67D1BE"/>
@@ -11880,6 +12346,7 @@
               </a:defRPr>
             </a:lvl3pPr>
             <a:lvl4pPr>
+              <a:buNone/>
               <a:defRPr sz="2325" b="1">
                 <a:solidFill>
                   <a:srgbClr val="67D1BE"/>
@@ -11890,6 +12357,7 @@
               </a:defRPr>
             </a:lvl4pPr>
             <a:lvl5pPr>
+              <a:buNone/>
               <a:defRPr sz="2325" b="1">
                 <a:solidFill>
                   <a:srgbClr val="67D1BE"/>
@@ -11900,6 +12368,7 @@
               </a:defRPr>
             </a:lvl5pPr>
             <a:lvl6pPr>
+              <a:buNone/>
               <a:defRPr sz="2325" b="1">
                 <a:solidFill>
                   <a:srgbClr val="67D1BE"/>
@@ -11910,6 +12379,7 @@
               </a:defRPr>
             </a:lvl6pPr>
             <a:lvl7pPr>
+              <a:buNone/>
               <a:defRPr sz="2325" b="1">
                 <a:solidFill>
                   <a:srgbClr val="67D1BE"/>
@@ -11920,6 +12390,7 @@
               </a:defRPr>
             </a:lvl7pPr>
             <a:lvl8pPr>
+              <a:buNone/>
               <a:defRPr sz="2325" b="1">
                 <a:solidFill>
                   <a:srgbClr val="67D1BE"/>
@@ -11930,6 +12401,7 @@
               </a:defRPr>
             </a:lvl8pPr>
             <a:lvl9pPr>
+              <a:buNone/>
               <a:defRPr sz="2325" b="1">
                 <a:solidFill>
                   <a:srgbClr val="67D1BE"/>
@@ -11942,6 +12414,7 @@
           </a:lstStyle>
           <a:p xmlns:a="http://schemas.openxmlformats.org/drawingml/2006/main">
             <a:pPr>
+              <a:buNone/>
               <a:defRPr sz="2325" b="1">
                 <a:solidFill>
                   <a:srgbClr val="67D1BE"/>
@@ -12006,6 +12479,7 @@
               </a:defRPr>
             </a:defPPr>
             <a:lvl1pPr>
+              <a:buNone/>
               <a:defRPr sz="2025" b="0">
                 <a:solidFill>
                   <a:srgbClr val="E8F0ED"/>
@@ -12016,6 +12490,7 @@
               </a:defRPr>
             </a:lvl1pPr>
             <a:lvl2pPr>
+              <a:buNone/>
               <a:defRPr sz="2025" b="0">
                 <a:solidFill>
                   <a:srgbClr val="E8F0ED"/>
@@ -12026,6 +12501,7 @@
               </a:defRPr>
             </a:lvl2pPr>
             <a:lvl3pPr>
+              <a:buNone/>
               <a:defRPr sz="2025" b="0">
                 <a:solidFill>
                   <a:srgbClr val="E8F0ED"/>
@@ -12036,6 +12512,7 @@
               </a:defRPr>
             </a:lvl3pPr>
             <a:lvl4pPr>
+              <a:buNone/>
               <a:defRPr sz="2025" b="0">
                 <a:solidFill>
                   <a:srgbClr val="E8F0ED"/>
@@ -12046,6 +12523,7 @@
               </a:defRPr>
             </a:lvl4pPr>
             <a:lvl5pPr>
+              <a:buNone/>
               <a:defRPr sz="2025" b="0">
                 <a:solidFill>
                   <a:srgbClr val="E8F0ED"/>
@@ -12056,6 +12534,7 @@
               </a:defRPr>
             </a:lvl5pPr>
             <a:lvl6pPr>
+              <a:buNone/>
               <a:defRPr sz="2025" b="0">
                 <a:solidFill>
                   <a:srgbClr val="E8F0ED"/>
@@ -12066,6 +12545,7 @@
               </a:defRPr>
             </a:lvl6pPr>
             <a:lvl7pPr>
+              <a:buNone/>
               <a:defRPr sz="2025" b="0">
                 <a:solidFill>
                   <a:srgbClr val="E8F0ED"/>
@@ -12076,6 +12556,7 @@
               </a:defRPr>
             </a:lvl7pPr>
             <a:lvl8pPr>
+              <a:buNone/>
               <a:defRPr sz="2025" b="0">
                 <a:solidFill>
                   <a:srgbClr val="E8F0ED"/>
@@ -12086,6 +12567,7 @@
               </a:defRPr>
             </a:lvl8pPr>
             <a:lvl9pPr>
+              <a:buNone/>
               <a:defRPr sz="2025" b="0">
                 <a:solidFill>
                   <a:srgbClr val="E8F0ED"/>
@@ -12098,6 +12580,7 @@
           </a:lstStyle>
           <a:p xmlns:a="http://schemas.openxmlformats.org/drawingml/2006/main">
             <a:pPr>
+              <a:buNone/>
               <a:defRPr sz="2025" b="0">
                 <a:solidFill>
                   <a:srgbClr val="E8F0ED"/>
@@ -12121,6 +12604,7 @@
           </a:p>
           <a:p xmlns:a="http://schemas.openxmlformats.org/drawingml/2006/main">
             <a:pPr>
+              <a:buNone/>
               <a:defRPr sz="2025" b="0">
                 <a:solidFill>
                   <a:srgbClr val="E8F0ED"/>
@@ -12185,6 +12669,7 @@
               </a:defRPr>
             </a:defPPr>
             <a:lvl1pPr>
+              <a:buNone/>
               <a:defRPr sz="2325" b="1">
                 <a:solidFill>
                   <a:srgbClr val="67D1BE"/>
@@ -12195,6 +12680,7 @@
               </a:defRPr>
             </a:lvl1pPr>
             <a:lvl2pPr>
+              <a:buNone/>
               <a:defRPr sz="2325" b="1">
                 <a:solidFill>
                   <a:srgbClr val="67D1BE"/>
@@ -12205,6 +12691,7 @@
               </a:defRPr>
             </a:lvl2pPr>
             <a:lvl3pPr>
+              <a:buNone/>
               <a:defRPr sz="2325" b="1">
                 <a:solidFill>
                   <a:srgbClr val="67D1BE"/>
@@ -12215,6 +12702,7 @@
               </a:defRPr>
             </a:lvl3pPr>
             <a:lvl4pPr>
+              <a:buNone/>
               <a:defRPr sz="2325" b="1">
                 <a:solidFill>
                   <a:srgbClr val="67D1BE"/>
@@ -12225,6 +12713,7 @@
               </a:defRPr>
             </a:lvl4pPr>
             <a:lvl5pPr>
+              <a:buNone/>
               <a:defRPr sz="2325" b="1">
                 <a:solidFill>
                   <a:srgbClr val="67D1BE"/>
@@ -12235,6 +12724,7 @@
               </a:defRPr>
             </a:lvl5pPr>
             <a:lvl6pPr>
+              <a:buNone/>
               <a:defRPr sz="2325" b="1">
                 <a:solidFill>
                   <a:srgbClr val="67D1BE"/>
@@ -12245,6 +12735,7 @@
               </a:defRPr>
             </a:lvl6pPr>
             <a:lvl7pPr>
+              <a:buNone/>
               <a:defRPr sz="2325" b="1">
                 <a:solidFill>
                   <a:srgbClr val="67D1BE"/>
@@ -12255,6 +12746,7 @@
               </a:defRPr>
             </a:lvl7pPr>
             <a:lvl8pPr>
+              <a:buNone/>
               <a:defRPr sz="2325" b="1">
                 <a:solidFill>
                   <a:srgbClr val="67D1BE"/>
@@ -12265,6 +12757,7 @@
               </a:defRPr>
             </a:lvl8pPr>
             <a:lvl9pPr>
+              <a:buNone/>
               <a:defRPr sz="2325" b="1">
                 <a:solidFill>
                   <a:srgbClr val="67D1BE"/>
@@ -12277,6 +12770,7 @@
           </a:lstStyle>
           <a:p xmlns:a="http://schemas.openxmlformats.org/drawingml/2006/main">
             <a:pPr>
+              <a:buNone/>
               <a:defRPr sz="2325" b="1">
                 <a:solidFill>
                   <a:srgbClr val="67D1BE"/>
@@ -12341,6 +12835,7 @@
               </a:defRPr>
             </a:defPPr>
             <a:lvl1pPr>
+              <a:buNone/>
               <a:defRPr sz="2025" b="0">
                 <a:solidFill>
                   <a:srgbClr val="E8F0ED"/>
@@ -12351,6 +12846,7 @@
               </a:defRPr>
             </a:lvl1pPr>
             <a:lvl2pPr>
+              <a:buNone/>
               <a:defRPr sz="2025" b="0">
                 <a:solidFill>
                   <a:srgbClr val="E8F0ED"/>
@@ -12361,6 +12857,7 @@
               </a:defRPr>
             </a:lvl2pPr>
             <a:lvl3pPr>
+              <a:buNone/>
               <a:defRPr sz="2025" b="0">
                 <a:solidFill>
                   <a:srgbClr val="E8F0ED"/>
@@ -12371,6 +12868,7 @@
               </a:defRPr>
             </a:lvl3pPr>
             <a:lvl4pPr>
+              <a:buNone/>
               <a:defRPr sz="2025" b="0">
                 <a:solidFill>
                   <a:srgbClr val="E8F0ED"/>
@@ -12381,6 +12879,7 @@
               </a:defRPr>
             </a:lvl4pPr>
             <a:lvl5pPr>
+              <a:buNone/>
               <a:defRPr sz="2025" b="0">
                 <a:solidFill>
                   <a:srgbClr val="E8F0ED"/>
@@ -12391,6 +12890,7 @@
               </a:defRPr>
             </a:lvl5pPr>
             <a:lvl6pPr>
+              <a:buNone/>
               <a:defRPr sz="2025" b="0">
                 <a:solidFill>
                   <a:srgbClr val="E8F0ED"/>
@@ -12401,6 +12901,7 @@
               </a:defRPr>
             </a:lvl6pPr>
             <a:lvl7pPr>
+              <a:buNone/>
               <a:defRPr sz="2025" b="0">
                 <a:solidFill>
                   <a:srgbClr val="E8F0ED"/>
@@ -12411,6 +12912,7 @@
               </a:defRPr>
             </a:lvl7pPr>
             <a:lvl8pPr>
+              <a:buNone/>
               <a:defRPr sz="2025" b="0">
                 <a:solidFill>
                   <a:srgbClr val="E8F0ED"/>
@@ -12421,6 +12923,7 @@
               </a:defRPr>
             </a:lvl8pPr>
             <a:lvl9pPr>
+              <a:buNone/>
               <a:defRPr sz="2025" b="0">
                 <a:solidFill>
                   <a:srgbClr val="E8F0ED"/>
@@ -12433,6 +12936,7 @@
           </a:lstStyle>
           <a:p xmlns:a="http://schemas.openxmlformats.org/drawingml/2006/main">
             <a:pPr>
+              <a:buNone/>
               <a:defRPr sz="2025" b="0">
                 <a:solidFill>
                   <a:srgbClr val="E8F0ED"/>
@@ -12456,6 +12960,7 @@
           </a:p>
           <a:p xmlns:a="http://schemas.openxmlformats.org/drawingml/2006/main">
             <a:pPr>
+              <a:buNone/>
               <a:defRPr sz="2025" b="0">
                 <a:solidFill>
                   <a:srgbClr val="E8F0ED"/>
@@ -12479,6 +12984,7 @@
           </a:p>
           <a:p xmlns:a="http://schemas.openxmlformats.org/drawingml/2006/main">
             <a:pPr>
+              <a:buNone/>
               <a:defRPr sz="2025" b="0">
                 <a:solidFill>
                   <a:srgbClr val="E8F0ED"/>
@@ -12543,6 +13049,7 @@
               </a:defRPr>
             </a:defPPr>
             <a:lvl1pPr>
+              <a:buNone/>
               <a:defRPr sz="1875" b="0">
                 <a:solidFill>
                   <a:srgbClr val="E7A063"/>
@@ -12553,6 +13060,7 @@
               </a:defRPr>
             </a:lvl1pPr>
             <a:lvl2pPr>
+              <a:buNone/>
               <a:defRPr sz="1875" b="0">
                 <a:solidFill>
                   <a:srgbClr val="E7A063"/>
@@ -12563,6 +13071,7 @@
               </a:defRPr>
             </a:lvl2pPr>
             <a:lvl3pPr>
+              <a:buNone/>
               <a:defRPr sz="1875" b="0">
                 <a:solidFill>
                   <a:srgbClr val="E7A063"/>
@@ -12573,6 +13082,7 @@
               </a:defRPr>
             </a:lvl3pPr>
             <a:lvl4pPr>
+              <a:buNone/>
               <a:defRPr sz="1875" b="0">
                 <a:solidFill>
                   <a:srgbClr val="E7A063"/>
@@ -12583,6 +13093,7 @@
               </a:defRPr>
             </a:lvl4pPr>
             <a:lvl5pPr>
+              <a:buNone/>
               <a:defRPr sz="1875" b="0">
                 <a:solidFill>
                   <a:srgbClr val="E7A063"/>
@@ -12593,6 +13104,7 @@
               </a:defRPr>
             </a:lvl5pPr>
             <a:lvl6pPr>
+              <a:buNone/>
               <a:defRPr sz="1875" b="0">
                 <a:solidFill>
                   <a:srgbClr val="E7A063"/>
@@ -12603,6 +13115,7 @@
               </a:defRPr>
             </a:lvl6pPr>
             <a:lvl7pPr>
+              <a:buNone/>
               <a:defRPr sz="1875" b="0">
                 <a:solidFill>
                   <a:srgbClr val="E7A063"/>
@@ -12613,6 +13126,7 @@
               </a:defRPr>
             </a:lvl7pPr>
             <a:lvl8pPr>
+              <a:buNone/>
               <a:defRPr sz="1875" b="0">
                 <a:solidFill>
                   <a:srgbClr val="E7A063"/>
@@ -12623,6 +13137,7 @@
               </a:defRPr>
             </a:lvl8pPr>
             <a:lvl9pPr>
+              <a:buNone/>
               <a:defRPr sz="1875" b="0">
                 <a:solidFill>
                   <a:srgbClr val="E7A063"/>
@@ -12635,6 +13150,7 @@
           </a:lstStyle>
           <a:p xmlns:a="http://schemas.openxmlformats.org/drawingml/2006/main">
             <a:pPr>
+              <a:buNone/>
               <a:defRPr sz="1875" b="0">
                 <a:solidFill>
                   <a:srgbClr val="E7A063"/>
@@ -12728,6 +13244,7 @@
               </a:defRPr>
             </a:defPPr>
             <a:lvl1pPr>
+              <a:buNone/>
               <a:defRPr sz="3450" b="1">
                 <a:solidFill>
                   <a:srgbClr val="E8F0ED"/>
@@ -12738,6 +13255,7 @@
               </a:defRPr>
             </a:lvl1pPr>
             <a:lvl2pPr>
+              <a:buNone/>
               <a:defRPr sz="3450" b="1">
                 <a:solidFill>
                   <a:srgbClr val="E8F0ED"/>
@@ -12748,6 +13266,7 @@
               </a:defRPr>
             </a:lvl2pPr>
             <a:lvl3pPr>
+              <a:buNone/>
               <a:defRPr sz="3450" b="1">
                 <a:solidFill>
                   <a:srgbClr val="E8F0ED"/>
@@ -12758,6 +13277,7 @@
               </a:defRPr>
             </a:lvl3pPr>
             <a:lvl4pPr>
+              <a:buNone/>
               <a:defRPr sz="3450" b="1">
                 <a:solidFill>
                   <a:srgbClr val="E8F0ED"/>
@@ -12768,6 +13288,7 @@
               </a:defRPr>
             </a:lvl4pPr>
             <a:lvl5pPr>
+              <a:buNone/>
               <a:defRPr sz="3450" b="1">
                 <a:solidFill>
                   <a:srgbClr val="E8F0ED"/>
@@ -12778,6 +13299,7 @@
               </a:defRPr>
             </a:lvl5pPr>
             <a:lvl6pPr>
+              <a:buNone/>
               <a:defRPr sz="3450" b="1">
                 <a:solidFill>
                   <a:srgbClr val="E8F0ED"/>
@@ -12788,6 +13310,7 @@
               </a:defRPr>
             </a:lvl6pPr>
             <a:lvl7pPr>
+              <a:buNone/>
               <a:defRPr sz="3450" b="1">
                 <a:solidFill>
                   <a:srgbClr val="E8F0ED"/>
@@ -12798,6 +13321,7 @@
               </a:defRPr>
             </a:lvl7pPr>
             <a:lvl8pPr>
+              <a:buNone/>
               <a:defRPr sz="3450" b="1">
                 <a:solidFill>
                   <a:srgbClr val="E8F0ED"/>
@@ -12808,6 +13332,7 @@
               </a:defRPr>
             </a:lvl8pPr>
             <a:lvl9pPr>
+              <a:buNone/>
               <a:defRPr sz="3450" b="1">
                 <a:solidFill>
                   <a:srgbClr val="E8F0ED"/>
@@ -12820,6 +13345,7 @@
           </a:lstStyle>
           <a:p xmlns:a="http://schemas.openxmlformats.org/drawingml/2006/main">
             <a:pPr>
+              <a:buNone/>
               <a:defRPr sz="3450" b="1">
                 <a:solidFill>
                   <a:srgbClr val="E8F0ED"/>
@@ -12884,6 +13410,7 @@
               </a:defRPr>
             </a:defPPr>
             <a:lvl1pPr>
+              <a:buNone/>
               <a:defRPr sz="1350" b="0">
                 <a:solidFill>
                   <a:srgbClr val="A4B8BE"/>
@@ -12894,6 +13421,7 @@
               </a:defRPr>
             </a:lvl1pPr>
             <a:lvl2pPr>
+              <a:buNone/>
               <a:defRPr sz="1350" b="0">
                 <a:solidFill>
                   <a:srgbClr val="A4B8BE"/>
@@ -12904,6 +13432,7 @@
               </a:defRPr>
             </a:lvl2pPr>
             <a:lvl3pPr>
+              <a:buNone/>
               <a:defRPr sz="1350" b="0">
                 <a:solidFill>
                   <a:srgbClr val="A4B8BE"/>
@@ -12914,6 +13443,7 @@
               </a:defRPr>
             </a:lvl3pPr>
             <a:lvl4pPr>
+              <a:buNone/>
               <a:defRPr sz="1350" b="0">
                 <a:solidFill>
                   <a:srgbClr val="A4B8BE"/>
@@ -12924,6 +13454,7 @@
               </a:defRPr>
             </a:lvl4pPr>
             <a:lvl5pPr>
+              <a:buNone/>
               <a:defRPr sz="1350" b="0">
                 <a:solidFill>
                   <a:srgbClr val="A4B8BE"/>
@@ -12934,6 +13465,7 @@
               </a:defRPr>
             </a:lvl5pPr>
             <a:lvl6pPr>
+              <a:buNone/>
               <a:defRPr sz="1350" b="0">
                 <a:solidFill>
                   <a:srgbClr val="A4B8BE"/>
@@ -12944,6 +13476,7 @@
               </a:defRPr>
             </a:lvl6pPr>
             <a:lvl7pPr>
+              <a:buNone/>
               <a:defRPr sz="1350" b="0">
                 <a:solidFill>
                   <a:srgbClr val="A4B8BE"/>
@@ -12954,6 +13487,7 @@
               </a:defRPr>
             </a:lvl7pPr>
             <a:lvl8pPr>
+              <a:buNone/>
               <a:defRPr sz="1350" b="0">
                 <a:solidFill>
                   <a:srgbClr val="A4B8BE"/>
@@ -12964,6 +13498,7 @@
               </a:defRPr>
             </a:lvl8pPr>
             <a:lvl9pPr>
+              <a:buNone/>
               <a:defRPr sz="1350" b="0">
                 <a:solidFill>
                   <a:srgbClr val="A4B8BE"/>
@@ -12976,6 +13511,7 @@
           </a:lstStyle>
           <a:p xmlns:a="http://schemas.openxmlformats.org/drawingml/2006/main">
             <a:pPr>
+              <a:buNone/>
               <a:defRPr sz="1350" b="0">
                 <a:solidFill>
                   <a:srgbClr val="A4B8BE"/>
@@ -13004,7 +13540,7 @@
           <p:cNvPr id="3" name="">
             <a:extLst xmlns:a="http://schemas.openxmlformats.org/drawingml/2006/main">
               <a:ext uri="{FF2B5EF4-FFF2-40B4-BE49-F238E27FC236}">
-                <a16:creationId xmlns:a16="http://schemas.microsoft.com/office/drawing/2014/main" id="{FB11728F-D638-478A-92C7-783D73D43F34}"/>
+                <a16:creationId xmlns:a16="http://schemas.microsoft.com/office/drawing/2014/main" id="{20B45B15-C4E6-4C78-91F4-21DE8F3304C1}"/>
               </a:ext>
             </a:extLst>
           </p:cNvPr>
@@ -13014,7 +13550,7 @@
           <p:nvPr/>
         </p:nvPicPr>
         <p:blipFill>
-          <a:blip xmlns:r="http://schemas.openxmlformats.org/officeDocument/2006/relationships" xmlns:a="http://schemas.openxmlformats.org/drawingml/2006/main" r:embed="R2bb58eaf2a4d4086"/>
+          <a:blip xmlns:r="http://schemas.openxmlformats.org/officeDocument/2006/relationships" xmlns:a="http://schemas.openxmlformats.org/drawingml/2006/main" r:embed="R95ef31d1d7db4bf8"/>
           <a:stretch xmlns:a="http://schemas.openxmlformats.org/drawingml/2006/main"/>
         </p:blipFill>
         <p:spPr>
@@ -13068,6 +13604,7 @@
               </a:defRPr>
             </a:defPPr>
             <a:lvl1pPr>
+              <a:buNone/>
               <a:defRPr sz="2400" b="1">
                 <a:solidFill>
                   <a:srgbClr val="67D1BE"/>
@@ -13078,6 +13615,7 @@
               </a:defRPr>
             </a:lvl1pPr>
             <a:lvl2pPr>
+              <a:buNone/>
               <a:defRPr sz="2400" b="1">
                 <a:solidFill>
                   <a:srgbClr val="67D1BE"/>
@@ -13088,6 +13626,7 @@
               </a:defRPr>
             </a:lvl2pPr>
             <a:lvl3pPr>
+              <a:buNone/>
               <a:defRPr sz="2400" b="1">
                 <a:solidFill>
                   <a:srgbClr val="67D1BE"/>
@@ -13098,6 +13637,7 @@
               </a:defRPr>
             </a:lvl3pPr>
             <a:lvl4pPr>
+              <a:buNone/>
               <a:defRPr sz="2400" b="1">
                 <a:solidFill>
                   <a:srgbClr val="67D1BE"/>
@@ -13108,6 +13648,7 @@
               </a:defRPr>
             </a:lvl4pPr>
             <a:lvl5pPr>
+              <a:buNone/>
               <a:defRPr sz="2400" b="1">
                 <a:solidFill>
                   <a:srgbClr val="67D1BE"/>
@@ -13118,6 +13659,7 @@
               </a:defRPr>
             </a:lvl5pPr>
             <a:lvl6pPr>
+              <a:buNone/>
               <a:defRPr sz="2400" b="1">
                 <a:solidFill>
                   <a:srgbClr val="67D1BE"/>
@@ -13128,6 +13670,7 @@
               </a:defRPr>
             </a:lvl6pPr>
             <a:lvl7pPr>
+              <a:buNone/>
               <a:defRPr sz="2400" b="1">
                 <a:solidFill>
                   <a:srgbClr val="67D1BE"/>
@@ -13138,6 +13681,7 @@
               </a:defRPr>
             </a:lvl7pPr>
             <a:lvl8pPr>
+              <a:buNone/>
               <a:defRPr sz="2400" b="1">
                 <a:solidFill>
                   <a:srgbClr val="67D1BE"/>
@@ -13148,6 +13692,7 @@
               </a:defRPr>
             </a:lvl8pPr>
             <a:lvl9pPr>
+              <a:buNone/>
               <a:defRPr sz="2400" b="1">
                 <a:solidFill>
                   <a:srgbClr val="67D1BE"/>
@@ -13160,6 +13705,7 @@
           </a:lstStyle>
           <a:p xmlns:a="http://schemas.openxmlformats.org/drawingml/2006/main">
             <a:pPr>
+              <a:buNone/>
               <a:defRPr sz="2400" b="1">
                 <a:solidFill>
                   <a:srgbClr val="67D1BE"/>
@@ -13224,6 +13770,7 @@
               </a:defRPr>
             </a:defPPr>
             <a:lvl1pPr>
+              <a:buNone/>
               <a:defRPr sz="2250" b="0">
                 <a:solidFill>
                   <a:srgbClr val="E8F0ED"/>
@@ -13234,6 +13781,7 @@
               </a:defRPr>
             </a:lvl1pPr>
             <a:lvl2pPr>
+              <a:buNone/>
               <a:defRPr sz="2250" b="0">
                 <a:solidFill>
                   <a:srgbClr val="E8F0ED"/>
@@ -13244,6 +13792,7 @@
               </a:defRPr>
             </a:lvl2pPr>
             <a:lvl3pPr>
+              <a:buNone/>
               <a:defRPr sz="2250" b="0">
                 <a:solidFill>
                   <a:srgbClr val="E8F0ED"/>
@@ -13254,6 +13803,7 @@
               </a:defRPr>
             </a:lvl3pPr>
             <a:lvl4pPr>
+              <a:buNone/>
               <a:defRPr sz="2250" b="0">
                 <a:solidFill>
                   <a:srgbClr val="E8F0ED"/>
@@ -13264,6 +13814,7 @@
               </a:defRPr>
             </a:lvl4pPr>
             <a:lvl5pPr>
+              <a:buNone/>
               <a:defRPr sz="2250" b="0">
                 <a:solidFill>
                   <a:srgbClr val="E8F0ED"/>
@@ -13274,6 +13825,7 @@
               </a:defRPr>
             </a:lvl5pPr>
             <a:lvl6pPr>
+              <a:buNone/>
               <a:defRPr sz="2250" b="0">
                 <a:solidFill>
                   <a:srgbClr val="E8F0ED"/>
@@ -13284,6 +13836,7 @@
               </a:defRPr>
             </a:lvl6pPr>
             <a:lvl7pPr>
+              <a:buNone/>
               <a:defRPr sz="2250" b="0">
                 <a:solidFill>
                   <a:srgbClr val="E8F0ED"/>
@@ -13294,6 +13847,7 @@
               </a:defRPr>
             </a:lvl7pPr>
             <a:lvl8pPr>
+              <a:buNone/>
               <a:defRPr sz="2250" b="0">
                 <a:solidFill>
                   <a:srgbClr val="E8F0ED"/>
@@ -13304,6 +13858,7 @@
               </a:defRPr>
             </a:lvl8pPr>
             <a:lvl9pPr>
+              <a:buNone/>
               <a:defRPr sz="2250" b="0">
                 <a:solidFill>
                   <a:srgbClr val="E8F0ED"/>
@@ -13316,6 +13871,7 @@
           </a:lstStyle>
           <a:p xmlns:a="http://schemas.openxmlformats.org/drawingml/2006/main">
             <a:pPr>
+              <a:buNone/>
               <a:defRPr sz="2250" b="0">
                 <a:solidFill>
                   <a:srgbClr val="E8F0ED"/>
@@ -13339,6 +13895,7 @@
           </a:p>
           <a:p xmlns:a="http://schemas.openxmlformats.org/drawingml/2006/main">
             <a:pPr>
+              <a:buNone/>
               <a:defRPr sz="2250" b="0">
                 <a:solidFill>
                   <a:srgbClr val="E8F0ED"/>
@@ -13362,6 +13919,7 @@
           </a:p>
           <a:p xmlns:a="http://schemas.openxmlformats.org/drawingml/2006/main">
             <a:pPr>
+              <a:buNone/>
               <a:defRPr sz="2250" b="0">
                 <a:solidFill>
                   <a:srgbClr val="E8F0ED"/>
@@ -13426,6 +13984,7 @@
               </a:defRPr>
             </a:defPPr>
             <a:lvl1pPr>
+              <a:buNone/>
               <a:defRPr sz="2100" b="0">
                 <a:solidFill>
                   <a:srgbClr val="E7A063"/>
@@ -13436,6 +13995,7 @@
               </a:defRPr>
             </a:lvl1pPr>
             <a:lvl2pPr>
+              <a:buNone/>
               <a:defRPr sz="2100" b="0">
                 <a:solidFill>
                   <a:srgbClr val="E7A063"/>
@@ -13446,6 +14006,7 @@
               </a:defRPr>
             </a:lvl2pPr>
             <a:lvl3pPr>
+              <a:buNone/>
               <a:defRPr sz="2100" b="0">
                 <a:solidFill>
                   <a:srgbClr val="E7A063"/>
@@ -13456,6 +14017,7 @@
               </a:defRPr>
             </a:lvl3pPr>
             <a:lvl4pPr>
+              <a:buNone/>
               <a:defRPr sz="2100" b="0">
                 <a:solidFill>
                   <a:srgbClr val="E7A063"/>
@@ -13466,6 +14028,7 @@
               </a:defRPr>
             </a:lvl4pPr>
             <a:lvl5pPr>
+              <a:buNone/>
               <a:defRPr sz="2100" b="0">
                 <a:solidFill>
                   <a:srgbClr val="E7A063"/>
@@ -13476,6 +14039,7 @@
               </a:defRPr>
             </a:lvl5pPr>
             <a:lvl6pPr>
+              <a:buNone/>
               <a:defRPr sz="2100" b="0">
                 <a:solidFill>
                   <a:srgbClr val="E7A063"/>
@@ -13486,6 +14050,7 @@
               </a:defRPr>
             </a:lvl6pPr>
             <a:lvl7pPr>
+              <a:buNone/>
               <a:defRPr sz="2100" b="0">
                 <a:solidFill>
                   <a:srgbClr val="E7A063"/>
@@ -13496,6 +14061,7 @@
               </a:defRPr>
             </a:lvl7pPr>
             <a:lvl8pPr>
+              <a:buNone/>
               <a:defRPr sz="2100" b="0">
                 <a:solidFill>
                   <a:srgbClr val="E7A063"/>
@@ -13506,6 +14072,7 @@
               </a:defRPr>
             </a:lvl8pPr>
             <a:lvl9pPr>
+              <a:buNone/>
               <a:defRPr sz="2100" b="0">
                 <a:solidFill>
                   <a:srgbClr val="E7A063"/>
@@ -13518,6 +14085,7 @@
           </a:lstStyle>
           <a:p xmlns:a="http://schemas.openxmlformats.org/drawingml/2006/main">
             <a:pPr>
+              <a:buNone/>
               <a:defRPr sz="2100" b="0">
                 <a:solidFill>
                   <a:srgbClr val="E7A063"/>
@@ -13611,6 +14179,7 @@
               </a:defRPr>
             </a:defPPr>
             <a:lvl1pPr>
+              <a:buNone/>
               <a:defRPr sz="3450" b="1">
                 <a:solidFill>
                   <a:srgbClr val="E8F0ED"/>
@@ -13621,6 +14190,7 @@
               </a:defRPr>
             </a:lvl1pPr>
             <a:lvl2pPr>
+              <a:buNone/>
               <a:defRPr sz="3450" b="1">
                 <a:solidFill>
                   <a:srgbClr val="E8F0ED"/>
@@ -13631,6 +14201,7 @@
               </a:defRPr>
             </a:lvl2pPr>
             <a:lvl3pPr>
+              <a:buNone/>
               <a:defRPr sz="3450" b="1">
                 <a:solidFill>
                   <a:srgbClr val="E8F0ED"/>
@@ -13641,6 +14212,7 @@
               </a:defRPr>
             </a:lvl3pPr>
             <a:lvl4pPr>
+              <a:buNone/>
               <a:defRPr sz="3450" b="1">
                 <a:solidFill>
                   <a:srgbClr val="E8F0ED"/>
@@ -13651,6 +14223,7 @@
               </a:defRPr>
             </a:lvl4pPr>
             <a:lvl5pPr>
+              <a:buNone/>
               <a:defRPr sz="3450" b="1">
                 <a:solidFill>
                   <a:srgbClr val="E8F0ED"/>
@@ -13661,6 +14234,7 @@
               </a:defRPr>
             </a:lvl5pPr>
             <a:lvl6pPr>
+              <a:buNone/>
               <a:defRPr sz="3450" b="1">
                 <a:solidFill>
                   <a:srgbClr val="E8F0ED"/>
@@ -13671,6 +14245,7 @@
               </a:defRPr>
             </a:lvl6pPr>
             <a:lvl7pPr>
+              <a:buNone/>
               <a:defRPr sz="3450" b="1">
                 <a:solidFill>
                   <a:srgbClr val="E8F0ED"/>
@@ -13681,6 +14256,7 @@
               </a:defRPr>
             </a:lvl7pPr>
             <a:lvl8pPr>
+              <a:buNone/>
               <a:defRPr sz="3450" b="1">
                 <a:solidFill>
                   <a:srgbClr val="E8F0ED"/>
@@ -13691,6 +14267,7 @@
               </a:defRPr>
             </a:lvl8pPr>
             <a:lvl9pPr>
+              <a:buNone/>
               <a:defRPr sz="3450" b="1">
                 <a:solidFill>
                   <a:srgbClr val="E8F0ED"/>
@@ -13703,6 +14280,7 @@
           </a:lstStyle>
           <a:p xmlns:a="http://schemas.openxmlformats.org/drawingml/2006/main">
             <a:pPr>
+              <a:buNone/>
               <a:defRPr sz="3450" b="1">
                 <a:solidFill>
                   <a:srgbClr val="E8F0ED"/>
@@ -13767,6 +14345,7 @@
               </a:defRPr>
             </a:defPPr>
             <a:lvl1pPr>
+              <a:buNone/>
               <a:defRPr sz="1350" b="0">
                 <a:solidFill>
                   <a:srgbClr val="A4B8BE"/>
@@ -13777,6 +14356,7 @@
               </a:defRPr>
             </a:lvl1pPr>
             <a:lvl2pPr>
+              <a:buNone/>
               <a:defRPr sz="1350" b="0">
                 <a:solidFill>
                   <a:srgbClr val="A4B8BE"/>
@@ -13787,6 +14367,7 @@
               </a:defRPr>
             </a:lvl2pPr>
             <a:lvl3pPr>
+              <a:buNone/>
               <a:defRPr sz="1350" b="0">
                 <a:solidFill>
                   <a:srgbClr val="A4B8BE"/>
@@ -13797,6 +14378,7 @@
               </a:defRPr>
             </a:lvl3pPr>
             <a:lvl4pPr>
+              <a:buNone/>
               <a:defRPr sz="1350" b="0">
                 <a:solidFill>
                   <a:srgbClr val="A4B8BE"/>
@@ -13807,6 +14389,7 @@
               </a:defRPr>
             </a:lvl4pPr>
             <a:lvl5pPr>
+              <a:buNone/>
               <a:defRPr sz="1350" b="0">
                 <a:solidFill>
                   <a:srgbClr val="A4B8BE"/>
@@ -13817,6 +14400,7 @@
               </a:defRPr>
             </a:lvl5pPr>
             <a:lvl6pPr>
+              <a:buNone/>
               <a:defRPr sz="1350" b="0">
                 <a:solidFill>
                   <a:srgbClr val="A4B8BE"/>
@@ -13827,6 +14411,7 @@
               </a:defRPr>
             </a:lvl6pPr>
             <a:lvl7pPr>
+              <a:buNone/>
               <a:defRPr sz="1350" b="0">
                 <a:solidFill>
                   <a:srgbClr val="A4B8BE"/>
@@ -13837,6 +14422,7 @@
               </a:defRPr>
             </a:lvl7pPr>
             <a:lvl8pPr>
+              <a:buNone/>
               <a:defRPr sz="1350" b="0">
                 <a:solidFill>
                   <a:srgbClr val="A4B8BE"/>
@@ -13847,6 +14433,7 @@
               </a:defRPr>
             </a:lvl8pPr>
             <a:lvl9pPr>
+              <a:buNone/>
               <a:defRPr sz="1350" b="0">
                 <a:solidFill>
                   <a:srgbClr val="A4B8BE"/>
@@ -13859,6 +14446,7 @@
           </a:lstStyle>
           <a:p xmlns:a="http://schemas.openxmlformats.org/drawingml/2006/main">
             <a:pPr>
+              <a:buNone/>
               <a:defRPr sz="1350" b="0">
                 <a:solidFill>
                   <a:srgbClr val="A4B8BE"/>
@@ -13887,7 +14475,7 @@
           <p:cNvPr id="3" name="">
             <a:extLst xmlns:a="http://schemas.openxmlformats.org/drawingml/2006/main">
               <a:ext uri="{FF2B5EF4-FFF2-40B4-BE49-F238E27FC236}">
-                <a16:creationId xmlns:a16="http://schemas.microsoft.com/office/drawing/2014/main" id="{2D5939CB-6185-4BC9-B560-CCC9D6E4FCFE}"/>
+                <a16:creationId xmlns:a16="http://schemas.microsoft.com/office/drawing/2014/main" id="{01687A67-F69C-4FE8-A098-B59323645A5E}"/>
               </a:ext>
             </a:extLst>
           </p:cNvPr>
@@ -14443,6 +15031,7 @@
               </a:defRPr>
             </a:defPPr>
             <a:lvl1pPr>
+              <a:buNone/>
               <a:defRPr sz="2175" b="0">
                 <a:solidFill>
                   <a:srgbClr val="67D1BE"/>
@@ -14453,6 +15042,7 @@
               </a:defRPr>
             </a:lvl1pPr>
             <a:lvl2pPr>
+              <a:buNone/>
               <a:defRPr sz="2175" b="0">
                 <a:solidFill>
                   <a:srgbClr val="67D1BE"/>
@@ -14463,6 +15053,7 @@
               </a:defRPr>
             </a:lvl2pPr>
             <a:lvl3pPr>
+              <a:buNone/>
               <a:defRPr sz="2175" b="0">
                 <a:solidFill>
                   <a:srgbClr val="67D1BE"/>
@@ -14473,6 +15064,7 @@
               </a:defRPr>
             </a:lvl3pPr>
             <a:lvl4pPr>
+              <a:buNone/>
               <a:defRPr sz="2175" b="0">
                 <a:solidFill>
                   <a:srgbClr val="67D1BE"/>
@@ -14483,6 +15075,7 @@
               </a:defRPr>
             </a:lvl4pPr>
             <a:lvl5pPr>
+              <a:buNone/>
               <a:defRPr sz="2175" b="0">
                 <a:solidFill>
                   <a:srgbClr val="67D1BE"/>
@@ -14493,6 +15086,7 @@
               </a:defRPr>
             </a:lvl5pPr>
             <a:lvl6pPr>
+              <a:buNone/>
               <a:defRPr sz="2175" b="0">
                 <a:solidFill>
                   <a:srgbClr val="67D1BE"/>
@@ -14503,6 +15097,7 @@
               </a:defRPr>
             </a:lvl6pPr>
             <a:lvl7pPr>
+              <a:buNone/>
               <a:defRPr sz="2175" b="0">
                 <a:solidFill>
                   <a:srgbClr val="67D1BE"/>
@@ -14513,6 +15108,7 @@
               </a:defRPr>
             </a:lvl7pPr>
             <a:lvl8pPr>
+              <a:buNone/>
               <a:defRPr sz="2175" b="0">
                 <a:solidFill>
                   <a:srgbClr val="67D1BE"/>
@@ -14523,6 +15119,7 @@
               </a:defRPr>
             </a:lvl8pPr>
             <a:lvl9pPr>
+              <a:buNone/>
               <a:defRPr sz="2175" b="0">
                 <a:solidFill>
                   <a:srgbClr val="67D1BE"/>
@@ -14535,6 +15132,7 @@
           </a:lstStyle>
           <a:p xmlns:a="http://schemas.openxmlformats.org/drawingml/2006/main">
             <a:pPr>
+              <a:buNone/>
               <a:defRPr sz="2175" b="0">
                 <a:solidFill>
                   <a:srgbClr val="67D1BE"/>
@@ -14558,6 +15156,7 @@
           </a:p>
           <a:p xmlns:a="http://schemas.openxmlformats.org/drawingml/2006/main">
             <a:pPr>
+              <a:buNone/>
               <a:defRPr sz="2175" b="0">
                 <a:solidFill>
                   <a:srgbClr val="67D1BE"/>
@@ -14581,6 +15180,7 @@
           </a:p>
           <a:p xmlns:a="http://schemas.openxmlformats.org/drawingml/2006/main">
             <a:pPr>
+              <a:buNone/>
               <a:defRPr sz="2175" b="0">
                 <a:solidFill>
                   <a:srgbClr val="67D1BE"/>
@@ -14645,6 +15245,7 @@
               </a:defRPr>
             </a:defPPr>
             <a:lvl1pPr>
+              <a:buNone/>
               <a:defRPr sz="1950" b="0">
                 <a:solidFill>
                   <a:srgbClr val="A4B8BE"/>
@@ -14655,6 +15256,7 @@
               </a:defRPr>
             </a:lvl1pPr>
             <a:lvl2pPr>
+              <a:buNone/>
               <a:defRPr sz="1950" b="0">
                 <a:solidFill>
                   <a:srgbClr val="A4B8BE"/>
@@ -14665,6 +15267,7 @@
               </a:defRPr>
             </a:lvl2pPr>
             <a:lvl3pPr>
+              <a:buNone/>
               <a:defRPr sz="1950" b="0">
                 <a:solidFill>
                   <a:srgbClr val="A4B8BE"/>
@@ -14675,6 +15278,7 @@
               </a:defRPr>
             </a:lvl3pPr>
             <a:lvl4pPr>
+              <a:buNone/>
               <a:defRPr sz="1950" b="0">
                 <a:solidFill>
                   <a:srgbClr val="A4B8BE"/>
@@ -14685,6 +15289,7 @@
               </a:defRPr>
             </a:lvl4pPr>
             <a:lvl5pPr>
+              <a:buNone/>
               <a:defRPr sz="1950" b="0">
                 <a:solidFill>
                   <a:srgbClr val="A4B8BE"/>
@@ -14695,6 +15300,7 @@
               </a:defRPr>
             </a:lvl5pPr>
             <a:lvl6pPr>
+              <a:buNone/>
               <a:defRPr sz="1950" b="0">
                 <a:solidFill>
                   <a:srgbClr val="A4B8BE"/>
@@ -14705,6 +15311,7 @@
               </a:defRPr>
             </a:lvl6pPr>
             <a:lvl7pPr>
+              <a:buNone/>
               <a:defRPr sz="1950" b="0">
                 <a:solidFill>
                   <a:srgbClr val="A4B8BE"/>
@@ -14715,6 +15322,7 @@
               </a:defRPr>
             </a:lvl7pPr>
             <a:lvl8pPr>
+              <a:buNone/>
               <a:defRPr sz="1950" b="0">
                 <a:solidFill>
                   <a:srgbClr val="A4B8BE"/>
@@ -14725,6 +15333,7 @@
               </a:defRPr>
             </a:lvl8pPr>
             <a:lvl9pPr>
+              <a:buNone/>
               <a:defRPr sz="1950" b="0">
                 <a:solidFill>
                   <a:srgbClr val="A4B8BE"/>
@@ -14737,6 +15346,7 @@
           </a:lstStyle>
           <a:p xmlns:a="http://schemas.openxmlformats.org/drawingml/2006/main">
             <a:pPr>
+              <a:buNone/>
               <a:defRPr sz="1950" b="0">
                 <a:solidFill>
                   <a:srgbClr val="A4B8BE"/>
@@ -14830,6 +15440,7 @@
               </a:defRPr>
             </a:defPPr>
             <a:lvl1pPr>
+              <a:buNone/>
               <a:defRPr sz="3450" b="1">
                 <a:solidFill>
                   <a:srgbClr val="E8F0ED"/>
@@ -14840,6 +15451,7 @@
               </a:defRPr>
             </a:lvl1pPr>
             <a:lvl2pPr>
+              <a:buNone/>
               <a:defRPr sz="3450" b="1">
                 <a:solidFill>
                   <a:srgbClr val="E8F0ED"/>
@@ -14850,6 +15462,7 @@
               </a:defRPr>
             </a:lvl2pPr>
             <a:lvl3pPr>
+              <a:buNone/>
               <a:defRPr sz="3450" b="1">
                 <a:solidFill>
                   <a:srgbClr val="E8F0ED"/>
@@ -14860,6 +15473,7 @@
               </a:defRPr>
             </a:lvl3pPr>
             <a:lvl4pPr>
+              <a:buNone/>
               <a:defRPr sz="3450" b="1">
                 <a:solidFill>
                   <a:srgbClr val="E8F0ED"/>
@@ -14870,6 +15484,7 @@
               </a:defRPr>
             </a:lvl4pPr>
             <a:lvl5pPr>
+              <a:buNone/>
               <a:defRPr sz="3450" b="1">
                 <a:solidFill>
                   <a:srgbClr val="E8F0ED"/>
@@ -14880,6 +15495,7 @@
               </a:defRPr>
             </a:lvl5pPr>
             <a:lvl6pPr>
+              <a:buNone/>
               <a:defRPr sz="3450" b="1">
                 <a:solidFill>
                   <a:srgbClr val="E8F0ED"/>
@@ -14890,6 +15506,7 @@
               </a:defRPr>
             </a:lvl6pPr>
             <a:lvl7pPr>
+              <a:buNone/>
               <a:defRPr sz="3450" b="1">
                 <a:solidFill>
                   <a:srgbClr val="E8F0ED"/>
@@ -14900,6 +15517,7 @@
               </a:defRPr>
             </a:lvl7pPr>
             <a:lvl8pPr>
+              <a:buNone/>
               <a:defRPr sz="3450" b="1">
                 <a:solidFill>
                   <a:srgbClr val="E8F0ED"/>
@@ -14910,6 +15528,7 @@
               </a:defRPr>
             </a:lvl8pPr>
             <a:lvl9pPr>
+              <a:buNone/>
               <a:defRPr sz="3450" b="1">
                 <a:solidFill>
                   <a:srgbClr val="E8F0ED"/>
@@ -14922,6 +15541,7 @@
           </a:lstStyle>
           <a:p xmlns:a="http://schemas.openxmlformats.org/drawingml/2006/main">
             <a:pPr>
+              <a:buNone/>
               <a:defRPr sz="3450" b="1">
                 <a:solidFill>
                   <a:srgbClr val="E8F0ED"/>
@@ -14986,6 +15606,7 @@
               </a:defRPr>
             </a:defPPr>
             <a:lvl1pPr>
+              <a:buNone/>
               <a:defRPr sz="1350" b="0">
                 <a:solidFill>
                   <a:srgbClr val="A4B8BE"/>
@@ -14996,6 +15617,7 @@
               </a:defRPr>
             </a:lvl1pPr>
             <a:lvl2pPr>
+              <a:buNone/>
               <a:defRPr sz="1350" b="0">
                 <a:solidFill>
                   <a:srgbClr val="A4B8BE"/>
@@ -15006,6 +15628,7 @@
               </a:defRPr>
             </a:lvl2pPr>
             <a:lvl3pPr>
+              <a:buNone/>
               <a:defRPr sz="1350" b="0">
                 <a:solidFill>
                   <a:srgbClr val="A4B8BE"/>
@@ -15016,6 +15639,7 @@
               </a:defRPr>
             </a:lvl3pPr>
             <a:lvl4pPr>
+              <a:buNone/>
               <a:defRPr sz="1350" b="0">
                 <a:solidFill>
                   <a:srgbClr val="A4B8BE"/>
@@ -15026,6 +15650,7 @@
               </a:defRPr>
             </a:lvl4pPr>
             <a:lvl5pPr>
+              <a:buNone/>
               <a:defRPr sz="1350" b="0">
                 <a:solidFill>
                   <a:srgbClr val="A4B8BE"/>
@@ -15036,6 +15661,7 @@
               </a:defRPr>
             </a:lvl5pPr>
             <a:lvl6pPr>
+              <a:buNone/>
               <a:defRPr sz="1350" b="0">
                 <a:solidFill>
                   <a:srgbClr val="A4B8BE"/>
@@ -15046,6 +15672,7 @@
               </a:defRPr>
             </a:lvl6pPr>
             <a:lvl7pPr>
+              <a:buNone/>
               <a:defRPr sz="1350" b="0">
                 <a:solidFill>
                   <a:srgbClr val="A4B8BE"/>
@@ -15056,6 +15683,7 @@
               </a:defRPr>
             </a:lvl7pPr>
             <a:lvl8pPr>
+              <a:buNone/>
               <a:defRPr sz="1350" b="0">
                 <a:solidFill>
                   <a:srgbClr val="A4B8BE"/>
@@ -15066,6 +15694,7 @@
               </a:defRPr>
             </a:lvl8pPr>
             <a:lvl9pPr>
+              <a:buNone/>
               <a:defRPr sz="1350" b="0">
                 <a:solidFill>
                   <a:srgbClr val="A4B8BE"/>
@@ -15078,6 +15707,7 @@
           </a:lstStyle>
           <a:p xmlns:a="http://schemas.openxmlformats.org/drawingml/2006/main">
             <a:pPr>
+              <a:buNone/>
               <a:defRPr sz="1350" b="0">
                 <a:solidFill>
                   <a:srgbClr val="A4B8BE"/>
@@ -15106,7 +15736,7 @@
           <p:cNvPr id="3" name="">
             <a:extLst xmlns:a="http://schemas.openxmlformats.org/drawingml/2006/main">
               <a:ext uri="{FF2B5EF4-FFF2-40B4-BE49-F238E27FC236}">
-                <a16:creationId xmlns:a16="http://schemas.microsoft.com/office/drawing/2014/main" id="{22D2850A-9998-472E-B1A8-5C549DCAF66F}"/>
+                <a16:creationId xmlns:a16="http://schemas.microsoft.com/office/drawing/2014/main" id="{0E0424A5-A784-4164-BF9D-B2A69753990C}"/>
               </a:ext>
             </a:extLst>
           </p:cNvPr>
@@ -15317,7 +15947,7 @@
                           <a:ea typeface="Arial"/>
                           <a:cs typeface="Arial"/>
                         </a:rPr>
-                        <a:t>1068.3</a:t>
+                        <a:t>504.4</a:t>
                       </a:r>
                     </a:p>
                   </a:txBody>
@@ -15353,7 +15983,7 @@
                           <a:ea typeface="Arial"/>
                           <a:cs typeface="Arial"/>
                         </a:rPr>
-                        <a:t>1.32 ms</a:t>
+                        <a:t>3.93 ms</a:t>
                       </a:r>
                     </a:p>
                   </a:txBody>
@@ -15433,7 +16063,7 @@
                           <a:ea typeface="Arial"/>
                           <a:cs typeface="Arial"/>
                         </a:rPr>
-                        <a:t>699.0</a:t>
+                        <a:t>477.6</a:t>
                       </a:r>
                     </a:p>
                   </a:txBody>
@@ -15469,7 +16099,7 @@
                           <a:ea typeface="Arial"/>
                           <a:cs typeface="Arial"/>
                         </a:rPr>
-                        <a:t>2.44 ms</a:t>
+                        <a:t>2.73 ms</a:t>
                       </a:r>
                     </a:p>
                   </a:txBody>
@@ -15549,7 +16179,7 @@
                           <a:ea typeface="Arial"/>
                           <a:cs typeface="Arial"/>
                         </a:rPr>
-                        <a:t>929.9</a:t>
+                        <a:t>586.2</a:t>
                       </a:r>
                     </a:p>
                   </a:txBody>
@@ -15585,7 +16215,7 @@
                           <a:ea typeface="Arial"/>
                           <a:cs typeface="Arial"/>
                         </a:rPr>
-                        <a:t>1.76 ms</a:t>
+                        <a:t>2.14 ms</a:t>
                       </a:r>
                     </a:p>
                   </a:txBody>
@@ -15653,6 +16283,7 @@
               </a:defRPr>
             </a:defPPr>
             <a:lvl1pPr>
+              <a:buNone/>
               <a:defRPr sz="1950" b="0">
                 <a:solidFill>
                   <a:srgbClr val="A4B8BE"/>
@@ -15663,6 +16294,7 @@
               </a:defRPr>
             </a:lvl1pPr>
             <a:lvl2pPr>
+              <a:buNone/>
               <a:defRPr sz="1950" b="0">
                 <a:solidFill>
                   <a:srgbClr val="A4B8BE"/>
@@ -15673,6 +16305,7 @@
               </a:defRPr>
             </a:lvl2pPr>
             <a:lvl3pPr>
+              <a:buNone/>
               <a:defRPr sz="1950" b="0">
                 <a:solidFill>
                   <a:srgbClr val="A4B8BE"/>
@@ -15683,6 +16316,7 @@
               </a:defRPr>
             </a:lvl3pPr>
             <a:lvl4pPr>
+              <a:buNone/>
               <a:defRPr sz="1950" b="0">
                 <a:solidFill>
                   <a:srgbClr val="A4B8BE"/>
@@ -15693,6 +16327,7 @@
               </a:defRPr>
             </a:lvl4pPr>
             <a:lvl5pPr>
+              <a:buNone/>
               <a:defRPr sz="1950" b="0">
                 <a:solidFill>
                   <a:srgbClr val="A4B8BE"/>
@@ -15703,6 +16338,7 @@
               </a:defRPr>
             </a:lvl5pPr>
             <a:lvl6pPr>
+              <a:buNone/>
               <a:defRPr sz="1950" b="0">
                 <a:solidFill>
                   <a:srgbClr val="A4B8BE"/>
@@ -15713,6 +16349,7 @@
               </a:defRPr>
             </a:lvl6pPr>
             <a:lvl7pPr>
+              <a:buNone/>
               <a:defRPr sz="1950" b="0">
                 <a:solidFill>
                   <a:srgbClr val="A4B8BE"/>
@@ -15723,6 +16360,7 @@
               </a:defRPr>
             </a:lvl7pPr>
             <a:lvl8pPr>
+              <a:buNone/>
               <a:defRPr sz="1950" b="0">
                 <a:solidFill>
                   <a:srgbClr val="A4B8BE"/>
@@ -15733,6 +16371,7 @@
               </a:defRPr>
             </a:lvl8pPr>
             <a:lvl9pPr>
+              <a:buNone/>
               <a:defRPr sz="1950" b="0">
                 <a:solidFill>
                   <a:srgbClr val="A4B8BE"/>
@@ -15745,6 +16384,7 @@
           </a:lstStyle>
           <a:p xmlns:a="http://schemas.openxmlformats.org/drawingml/2006/main">
             <a:pPr>
+              <a:buNone/>
               <a:defRPr sz="1950" b="0">
                 <a:solidFill>
                   <a:srgbClr val="A4B8BE"/>
@@ -15768,6 +16408,7 @@
           </a:p>
           <a:p xmlns:a="http://schemas.openxmlformats.org/drawingml/2006/main">
             <a:pPr>
+              <a:buNone/>
               <a:defRPr sz="1950" b="0">
                 <a:solidFill>
                   <a:srgbClr val="A4B8BE"/>
@@ -15832,6 +16473,7 @@
               </a:defRPr>
             </a:defPPr>
             <a:lvl1pPr>
+              <a:buNone/>
               <a:defRPr sz="2025" b="0">
                 <a:solidFill>
                   <a:srgbClr val="67D1BE"/>
@@ -15842,6 +16484,7 @@
               </a:defRPr>
             </a:lvl1pPr>
             <a:lvl2pPr>
+              <a:buNone/>
               <a:defRPr sz="2025" b="0">
                 <a:solidFill>
                   <a:srgbClr val="67D1BE"/>
@@ -15852,6 +16495,7 @@
               </a:defRPr>
             </a:lvl2pPr>
             <a:lvl3pPr>
+              <a:buNone/>
               <a:defRPr sz="2025" b="0">
                 <a:solidFill>
                   <a:srgbClr val="67D1BE"/>
@@ -15862,6 +16506,7 @@
               </a:defRPr>
             </a:lvl3pPr>
             <a:lvl4pPr>
+              <a:buNone/>
               <a:defRPr sz="2025" b="0">
                 <a:solidFill>
                   <a:srgbClr val="67D1BE"/>
@@ -15872,6 +16517,7 @@
               </a:defRPr>
             </a:lvl4pPr>
             <a:lvl5pPr>
+              <a:buNone/>
               <a:defRPr sz="2025" b="0">
                 <a:solidFill>
                   <a:srgbClr val="67D1BE"/>
@@ -15882,6 +16528,7 @@
               </a:defRPr>
             </a:lvl5pPr>
             <a:lvl6pPr>
+              <a:buNone/>
               <a:defRPr sz="2025" b="0">
                 <a:solidFill>
                   <a:srgbClr val="67D1BE"/>
@@ -15892,6 +16539,7 @@
               </a:defRPr>
             </a:lvl6pPr>
             <a:lvl7pPr>
+              <a:buNone/>
               <a:defRPr sz="2025" b="0">
                 <a:solidFill>
                   <a:srgbClr val="67D1BE"/>
@@ -15902,6 +16550,7 @@
               </a:defRPr>
             </a:lvl7pPr>
             <a:lvl8pPr>
+              <a:buNone/>
               <a:defRPr sz="2025" b="0">
                 <a:solidFill>
                   <a:srgbClr val="67D1BE"/>
@@ -15912,6 +16561,7 @@
               </a:defRPr>
             </a:lvl8pPr>
             <a:lvl9pPr>
+              <a:buNone/>
               <a:defRPr sz="2025" b="0">
                 <a:solidFill>
                   <a:srgbClr val="67D1BE"/>
@@ -15924,6 +16574,7 @@
           </a:lstStyle>
           <a:p xmlns:a="http://schemas.openxmlformats.org/drawingml/2006/main">
             <a:pPr>
+              <a:buNone/>
               <a:defRPr sz="2025" b="0">
                 <a:solidFill>
                   <a:srgbClr val="67D1BE"/>
@@ -15942,7 +16593,7 @@
                 <a:ea typeface="Arial"/>
                 <a:cs typeface="Arial"/>
               </a:rPr>
-              <a:t>Simulation tests pass. TA-machine verification remains required.</a:t>
+              <a:t>Mission and terrain tests pass. TA-machine check remains required.</a:t>
             </a:r>
           </a:p>
         </p:txBody>
